--- a/Final Deliverables/GRIDSHIELD_Executive_Presentation.pptx
+++ b/Final Deliverables/GRIDSHIELD_Executive_Presentation.pptx
@@ -4,6 +4,9 @@
   <p:sldMasterIdLst>
     <p:sldMasterId id="2147483648" r:id="rId1"/>
   </p:sldMasterIdLst>
+  <p:notesMasterIdLst>
+    <p:notesMasterId r:id="rId17"/>
+  </p:notesMasterIdLst>
   <p:sldIdLst>
     <p:sldId id="256" r:id="rId2"/>
     <p:sldId id="257" r:id="rId3"/>
@@ -21,10 +24,7 @@
     <p:sldId id="269" r:id="rId15"/>
     <p:sldId id="270" r:id="rId16"/>
   </p:sldIdLst>
-  <p:notesMasterIdLst>
-    <p:notesMasterId r:id="rId17"/>
-  </p:notesMasterIdLst>
-  <p:sldSz cx="9144000" cy="5143500"/>
+  <p:sldSz cx="9144000" cy="5143500" type="screen16x9"/>
   <p:notesSz cx="5143500" cy="9144000"/>
   <p:defaultTextStyle>
     <a:lvl1pPr marL="0" algn="l" defTabSz="914400" rtl="0" eaLnBrk="1" latinLnBrk="0" hangingPunct="1">
@@ -118,13 +118,20 @@
       </a:defRPr>
     </a:lvl9pPr>
   </p:defaultTextStyle>
+  <p:extLst>
+    <p:ext uri="{EFAFB233-063F-42B5-8137-9DF3F51BA10A}">
+      <p15:sldGuideLst xmlns:p15="http://schemas.microsoft.com/office/powerpoint/2012/main"/>
+    </p:ext>
+  </p:extLst>
 </p:presentation>
 </file>
 
 <file path=ppt/charts/chart1.xml><?xml version="1.0" encoding="utf-8"?>
-<c:chartSpace xmlns:c="http://schemas.openxmlformats.org/drawingml/2006/chart" xmlns:a="http://schemas.openxmlformats.org/drawingml/2006/main" xmlns:r="http://schemas.openxmlformats.org/officeDocument/2006/relationships">
+<c:chartSpace xmlns:c="http://schemas.openxmlformats.org/drawingml/2006/chart" xmlns:a="http://schemas.openxmlformats.org/drawingml/2006/main" xmlns:r="http://schemas.openxmlformats.org/officeDocument/2006/relationships" xmlns:c16r2="http://schemas.microsoft.com/office/drawing/2015/06/chart">
   <c:date1904 val="0"/>
+  <c:lang val="en-GB"/>
   <c:roundedCorners val="0"/>
+  <c:style val="2"/>
   <c:chart>
     <c:autoTitleDeleted val="1"/>
     <c:plotArea>
@@ -154,40 +161,15 @@
             <a:effectLst/>
           </c:spPr>
           <c:invertIfNegative val="0"/>
-          <c:dLbls>
-            <c:numFmt formatCode="#,##0" sourceLinked="0"/>
-            <c:txPr>
-              <a:bodyPr/>
-              <a:lstStyle/>
-              <a:p>
-                <a:pPr>
-                  <a:defRPr b="0" i="0" strike="noStrike" sz="1000" u="none">
-                    <a:solidFill>
-                      <a:srgbClr val="FFFFFF"/>
-                    </a:solidFill>
-                    <a:latin typeface="Arial"/>
-                  </a:defRPr>
-                </a:pPr>
-              </a:p>
-            </c:txPr>
-            <c:showLegendKey val="0"/>
-            <c:showVal val="1"/>
-            <c:showCatName val="0"/>
-            <c:showSerName val="0"/>
-            <c:showPercent val="0"/>
-            <c:showBubbleSize val="0"/>
-            <c:showLeaderLines val="0"/>
-          </c:dLbls>
           <c:dPt>
             <c:idx val="0"/>
             <c:invertIfNegative val="0"/>
             <c:bubble3D val="0"/>
-            <c:spPr>
-              <a:solidFill>
-                <a:srgbClr val="A93226"/>
-              </a:solidFill>
-              <a:effectLst/>
-            </c:spPr>
+            <c:extLst>
+              <c:ext xmlns:c16="http://schemas.microsoft.com/office/drawing/2014/chart" uri="{C3380CC4-5D6E-409C-BE32-E72D297353CC}">
+                <c16:uniqueId val="{00000001-68B0-D24E-8292-F81BF481FEB6}"/>
+              </c:ext>
+            </c:extLst>
           </c:dPt>
           <c:dPt>
             <c:idx val="1"/>
@@ -199,22 +181,62 @@
               </a:solidFill>
               <a:effectLst/>
             </c:spPr>
+            <c:extLst>
+              <c:ext xmlns:c16="http://schemas.microsoft.com/office/drawing/2014/chart" uri="{C3380CC4-5D6E-409C-BE32-E72D297353CC}">
+                <c16:uniqueId val="{00000003-68B0-D24E-8292-F81BF481FEB6}"/>
+              </c:ext>
+            </c:extLst>
           </c:dPt>
+          <c:dLbls>
+            <c:numFmt formatCode="#,##0" sourceLinked="0"/>
+            <c:spPr>
+              <a:noFill/>
+              <a:ln>
+                <a:noFill/>
+              </a:ln>
+              <a:effectLst/>
+            </c:spPr>
+            <c:txPr>
+              <a:bodyPr/>
+              <a:lstStyle/>
+              <a:p>
+                <a:pPr>
+                  <a:defRPr sz="1000" b="0" i="0" u="none" strike="noStrike">
+                    <a:solidFill>
+                      <a:srgbClr val="FFFFFF"/>
+                    </a:solidFill>
+                    <a:latin typeface="Arial"/>
+                  </a:defRPr>
+                </a:pPr>
+                <a:endParaRPr lang="en-US"/>
+              </a:p>
+            </c:txPr>
+            <c:showLegendKey val="0"/>
+            <c:showVal val="1"/>
+            <c:showCatName val="0"/>
+            <c:showSerName val="0"/>
+            <c:showPercent val="0"/>
+            <c:showBubbleSize val="0"/>
+            <c:showLeaderLines val="0"/>
+            <c:extLst>
+              <c:ext xmlns:c15="http://schemas.microsoft.com/office/drawing/2012/chart" uri="{CE6537A1-D6FC-4f65-9D91-7224C49458BB}">
+                <c15:showLeaderLines val="0"/>
+              </c:ext>
+            </c:extLst>
+          </c:dLbls>
           <c:cat>
-            <c:multiLvlStrRef>
+            <c:strRef>
               <c:f>Sheet1!$A$2:$A$3</c:f>
-              <c:multiLvlStrCache>
+              <c:strCache>
                 <c:ptCount val="2"/>
-                <c:lvl>
-                  <c:pt idx="0">
-                    <c:v>Naive Baseline</c:v>
-                  </c:pt>
-                  <c:pt idx="1">
-                    <c:v>GRIDSHIELD Model</c:v>
-                  </c:pt>
-                </c:lvl>
-              </c:multiLvlStrCache>
-            </c:multiLvlStrRef>
+                <c:pt idx="0">
+                  <c:v>Naive Baseline</c:v>
+                </c:pt>
+                <c:pt idx="1">
+                  <c:v>GRIDSHIELD Model</c:v>
+                </c:pt>
+              </c:strCache>
+            </c:strRef>
           </c:cat>
           <c:val>
             <c:numRef>
@@ -226,41 +248,28 @@
                   <c:v>32.5</c:v>
                 </c:pt>
                 <c:pt idx="1">
-                  <c:v>1.16</c:v>
+                  <c:v>1.1599999999999999</c:v>
                 </c:pt>
               </c:numCache>
             </c:numRef>
           </c:val>
+          <c:extLst>
+            <c:ext xmlns:c16="http://schemas.microsoft.com/office/drawing/2014/chart" uri="{C3380CC4-5D6E-409C-BE32-E72D297353CC}">
+              <c16:uniqueId val="{00000004-68B0-D24E-8292-F81BF481FEB6}"/>
+            </c:ext>
+          </c:extLst>
         </c:ser>
         <c:dLbls>
-          <c:numFmt formatCode="#,##0" sourceLinked="0"/>
-          <c:txPr>
-            <a:bodyPr/>
-            <a:lstStyle/>
-            <a:p>
-              <a:pPr>
-                <a:defRPr b="0" i="0" strike="noStrike" sz="1000" u="none">
-                  <a:solidFill>
-                    <a:srgbClr val="FFFFFF"/>
-                  </a:solidFill>
-                  <a:latin typeface="Arial"/>
-                </a:defRPr>
-              </a:pPr>
-            </a:p>
-          </c:txPr>
           <c:showLegendKey val="0"/>
           <c:showVal val="1"/>
           <c:showCatName val="0"/>
           <c:showSerName val="0"/>
           <c:showPercent val="0"/>
           <c:showBubbleSize val="0"/>
-          <c:showLeaderLines val="0"/>
         </c:dLbls>
         <c:gapWidth val="150"/>
-        <c:overlap val="0"/>
         <c:axId val="2094734554"/>
         <c:axId val="2094734552"/>
-        <c:axId val="2094734556"/>
       </c:barChart>
       <c:catAx>
         <c:axId val="2094734554"/>
@@ -301,6 +310,7 @@
         <c:crosses val="autoZero"/>
         <c:auto val="1"/>
         <c:lblAlgn val="ctr"/>
+        <c:lblOffset val="100"/>
         <c:noMultiLvlLbl val="1"/>
       </c:catAx>
       <c:valAx>
@@ -363,6 +373,7 @@
     </c:plotArea>
     <c:plotVisOnly val="1"/>
     <c:dispBlanksAs val="span"/>
+    <c:showDLblsOverMax val="1"/>
   </c:chart>
   <c:spPr>
     <a:solidFill>
@@ -380,9 +391,11 @@
 </file>
 
 <file path=ppt/charts/chart2.xml><?xml version="1.0" encoding="utf-8"?>
-<c:chartSpace xmlns:c="http://schemas.openxmlformats.org/drawingml/2006/chart" xmlns:a="http://schemas.openxmlformats.org/drawingml/2006/main" xmlns:r="http://schemas.openxmlformats.org/officeDocument/2006/relationships">
+<c:chartSpace xmlns:c="http://schemas.openxmlformats.org/drawingml/2006/chart" xmlns:a="http://schemas.openxmlformats.org/drawingml/2006/main" xmlns:r="http://schemas.openxmlformats.org/officeDocument/2006/relationships" xmlns:c16r2="http://schemas.microsoft.com/office/drawing/2015/06/chart">
   <c:date1904 val="0"/>
+  <c:lang val="en-GB"/>
   <c:roundedCorners val="0"/>
+  <c:style val="2"/>
   <c:chart>
     <c:autoTitleDeleted val="1"/>
     <c:plotArea>
@@ -412,40 +425,15 @@
             <a:effectLst/>
           </c:spPr>
           <c:invertIfNegative val="0"/>
-          <c:dLbls>
-            <c:numFmt formatCode="#,##0" sourceLinked="0"/>
-            <c:txPr>
-              <a:bodyPr/>
-              <a:lstStyle/>
-              <a:p>
-                <a:pPr>
-                  <a:defRPr b="0" i="0" strike="noStrike" sz="900" u="none">
-                    <a:solidFill>
-                      <a:srgbClr val="FFFFFF"/>
-                    </a:solidFill>
-                    <a:latin typeface="Arial"/>
-                  </a:defRPr>
-                </a:pPr>
-              </a:p>
-            </c:txPr>
-            <c:showLegendKey val="0"/>
-            <c:showVal val="1"/>
-            <c:showCatName val="0"/>
-            <c:showSerName val="0"/>
-            <c:showPercent val="0"/>
-            <c:showBubbleSize val="0"/>
-            <c:showLeaderLines val="0"/>
-          </c:dLbls>
           <c:dPt>
             <c:idx val="0"/>
             <c:invertIfNegative val="0"/>
             <c:bubble3D val="0"/>
-            <c:spPr>
-              <a:solidFill>
-                <a:srgbClr val="0D7377"/>
-              </a:solidFill>
-              <a:effectLst/>
-            </c:spPr>
+            <c:extLst>
+              <c:ext xmlns:c16="http://schemas.microsoft.com/office/drawing/2014/chart" uri="{C3380CC4-5D6E-409C-BE32-E72D297353CC}">
+                <c16:uniqueId val="{00000001-1438-124F-B706-F831BAA6C857}"/>
+              </c:ext>
+            </c:extLst>
           </c:dPt>
           <c:dPt>
             <c:idx val="1"/>
@@ -457,6 +445,11 @@
               </a:solidFill>
               <a:effectLst/>
             </c:spPr>
+            <c:extLst>
+              <c:ext xmlns:c16="http://schemas.microsoft.com/office/drawing/2014/chart" uri="{C3380CC4-5D6E-409C-BE32-E72D297353CC}">
+                <c16:uniqueId val="{00000003-1438-124F-B706-F831BAA6C857}"/>
+              </c:ext>
+            </c:extLst>
           </c:dPt>
           <c:dPt>
             <c:idx val="2"/>
@@ -468,6 +461,11 @@
               </a:solidFill>
               <a:effectLst/>
             </c:spPr>
+            <c:extLst>
+              <c:ext xmlns:c16="http://schemas.microsoft.com/office/drawing/2014/chart" uri="{C3380CC4-5D6E-409C-BE32-E72D297353CC}">
+                <c16:uniqueId val="{00000005-1438-124F-B706-F831BAA6C857}"/>
+              </c:ext>
+            </c:extLst>
           </c:dPt>
           <c:dPt>
             <c:idx val="3"/>
@@ -479,6 +477,11 @@
               </a:solidFill>
               <a:effectLst/>
             </c:spPr>
+            <c:extLst>
+              <c:ext xmlns:c16="http://schemas.microsoft.com/office/drawing/2014/chart" uri="{C3380CC4-5D6E-409C-BE32-E72D297353CC}">
+                <c16:uniqueId val="{00000007-1438-124F-B706-F831BAA6C857}"/>
+              </c:ext>
+            </c:extLst>
           </c:dPt>
           <c:dPt>
             <c:idx val="4"/>
@@ -490,36 +493,76 @@
               </a:solidFill>
               <a:effectLst/>
             </c:spPr>
+            <c:extLst>
+              <c:ext xmlns:c16="http://schemas.microsoft.com/office/drawing/2014/chart" uri="{C3380CC4-5D6E-409C-BE32-E72D297353CC}">
+                <c16:uniqueId val="{00000009-1438-124F-B706-F831BAA6C857}"/>
+              </c:ext>
+            </c:extLst>
           </c:dPt>
+          <c:dLbls>
+            <c:numFmt formatCode="#,##0" sourceLinked="0"/>
+            <c:spPr>
+              <a:noFill/>
+              <a:ln>
+                <a:noFill/>
+              </a:ln>
+              <a:effectLst/>
+            </c:spPr>
+            <c:txPr>
+              <a:bodyPr/>
+              <a:lstStyle/>
+              <a:p>
+                <a:pPr>
+                  <a:defRPr sz="900" b="0" i="0" u="none" strike="noStrike">
+                    <a:solidFill>
+                      <a:srgbClr val="FFFFFF"/>
+                    </a:solidFill>
+                    <a:latin typeface="Arial"/>
+                  </a:defRPr>
+                </a:pPr>
+                <a:endParaRPr lang="en-US"/>
+              </a:p>
+            </c:txPr>
+            <c:showLegendKey val="0"/>
+            <c:showVal val="1"/>
+            <c:showCatName val="0"/>
+            <c:showSerName val="0"/>
+            <c:showPercent val="0"/>
+            <c:showBubbleSize val="0"/>
+            <c:showLeaderLines val="0"/>
+            <c:extLst>
+              <c:ext xmlns:c15="http://schemas.microsoft.com/office/drawing/2012/chart" uri="{CE6537A1-D6FC-4f65-9D91-7224C49458BB}">
+                <c15:showLeaderLines val="0"/>
+              </c:ext>
+            </c:extLst>
+          </c:dLbls>
           <c:cat>
-            <c:multiLvlStrRef>
+            <c:strRef>
               <c:f>Sheet1!$A$2:$A$6</c:f>
-              <c:multiLvlStrCache>
+              <c:strCache>
                 <c:ptCount val="5"/>
-                <c:lvl>
-                  <c:pt idx="0">
-                    <c:v>Stage 1 Baseline
+                <c:pt idx="0">
+                  <c:v>Stage 1 Baseline
 (Rs. 196/day)</c:v>
-                  </c:pt>
-                  <c:pt idx="1">
-                    <c:v>Regulatory Shock
+                </c:pt>
+                <c:pt idx="1">
+                  <c:v>Regulatory Shock
 (+15% factor)</c:v>
-                  </c:pt>
-                  <c:pt idx="2">
-                    <c:v>Demand Regime
+                </c:pt>
+                <c:pt idx="2">
+                  <c:v>Demand Regime
 (Break the Chain)</c:v>
-                  </c:pt>
-                  <c:pt idx="3">
-                    <c:v>Cyclone Tauktae
+                </c:pt>
+                <c:pt idx="3">
+                  <c:v>Cyclone Tauktae
 (May 17-18 nadir)</c:v>
-                  </c:pt>
-                  <c:pt idx="4">
-                    <c:v>Stage 2 Total
+                </c:pt>
+                <c:pt idx="4">
+                  <c:v>Stage 2 Total
 (Rs. 6,096/day)</c:v>
-                  </c:pt>
-                </c:lvl>
-              </c:multiLvlStrCache>
-            </c:multiLvlStrRef>
+                </c:pt>
+              </c:strCache>
+            </c:strRef>
           </c:cat>
           <c:val>
             <c:numRef>
@@ -545,36 +588,23 @@
               </c:numCache>
             </c:numRef>
           </c:val>
+          <c:extLst>
+            <c:ext xmlns:c16="http://schemas.microsoft.com/office/drawing/2014/chart" uri="{C3380CC4-5D6E-409C-BE32-E72D297353CC}">
+              <c16:uniqueId val="{0000000A-1438-124F-B706-F831BAA6C857}"/>
+            </c:ext>
+          </c:extLst>
         </c:ser>
         <c:dLbls>
-          <c:numFmt formatCode="#,##0" sourceLinked="0"/>
-          <c:txPr>
-            <a:bodyPr/>
-            <a:lstStyle/>
-            <a:p>
-              <a:pPr>
-                <a:defRPr b="0" i="0" strike="noStrike" sz="900" u="none">
-                  <a:solidFill>
-                    <a:srgbClr val="FFFFFF"/>
-                  </a:solidFill>
-                  <a:latin typeface="Arial"/>
-                </a:defRPr>
-              </a:pPr>
-            </a:p>
-          </c:txPr>
           <c:showLegendKey val="0"/>
           <c:showVal val="1"/>
           <c:showCatName val="0"/>
           <c:showSerName val="0"/>
           <c:showPercent val="0"/>
           <c:showBubbleSize val="0"/>
-          <c:showLeaderLines val="0"/>
         </c:dLbls>
         <c:gapWidth val="150"/>
-        <c:overlap val="0"/>
         <c:axId val="2094734554"/>
         <c:axId val="2094734552"/>
-        <c:axId val="2094734556"/>
       </c:barChart>
       <c:catAx>
         <c:axId val="2094734554"/>
@@ -615,6 +645,7 @@
         <c:crosses val="autoZero"/>
         <c:auto val="1"/>
         <c:lblAlgn val="ctr"/>
+        <c:lblOffset val="100"/>
         <c:noMultiLvlLbl val="1"/>
       </c:catAx>
       <c:valAx>
@@ -677,6 +708,7 @@
     </c:plotArea>
     <c:plotVisOnly val="1"/>
     <c:dispBlanksAs val="span"/>
+    <c:showDLblsOverMax val="1"/>
   </c:chart>
   <c:spPr>
     <a:solidFill>
@@ -715,234 +747,10 @@
           <a:chExt cx="0" cy="0"/>
         </a:xfrm>
       </p:grpSpPr>
-      <p:sp>
-        <p:nvSpPr>
-          <p:cNvPr id="2" name="Header Placeholder 1"/>
-          <p:cNvSpPr>
-            <a:spLocks noGrp="1"/>
-          </p:cNvSpPr>
-          <p:nvPr>
-            <p:ph type="hdr" sz="quarter"/>
-          </p:nvPr>
-        </p:nvSpPr>
-        <p:spPr>
-          <a:xfrm>
-            <a:off x="0" y="0"/>
-            <a:ext cx="2971800" cy="458788"/>
-          </a:xfrm>
-          <a:prstGeom prst="rect">
-            <a:avLst/>
-          </a:prstGeom>
-        </p:spPr>
-        <p:txBody>
-          <a:bodyPr vert="horz" lIns="91440" tIns="45720" rIns="91440" bIns="45720" rtlCol="0"/>
-          <a:lstStyle>
-            <a:lvl1pPr algn="l">
-              <a:defRPr sz="1200"/>
-            </a:lvl1pPr>
-          </a:lstStyle>
-          <a:p>
-            <a:endParaRPr lang="en-US"/>
-          </a:p>
-        </p:txBody>
-      </p:sp>
-      <p:sp>
-        <p:nvSpPr>
-          <p:cNvPr id="3" name="Date Placeholder 2"/>
-          <p:cNvSpPr>
-            <a:spLocks noGrp="1"/>
-          </p:cNvSpPr>
-          <p:nvPr>
-            <p:ph type="dt" idx="1"/>
-          </p:nvPr>
-        </p:nvSpPr>
-        <p:spPr>
-          <a:xfrm>
-            <a:off x="3884613" y="0"/>
-            <a:ext cx="2971800" cy="458788"/>
-          </a:xfrm>
-          <a:prstGeom prst="rect">
-            <a:avLst/>
-          </a:prstGeom>
-        </p:spPr>
-        <p:txBody>
-          <a:bodyPr vert="horz" lIns="91440" tIns="45720" rIns="91440" bIns="45720" rtlCol="0"/>
-          <a:lstStyle>
-            <a:lvl1pPr algn="r">
-              <a:defRPr sz="1200"/>
-            </a:lvl1pPr>
-          </a:lstStyle>
-          <a:p>
-            <a:fld id="{5282F153-3F37-0F45-9E97-73ACFA13230C}" type="datetimeFigureOut">
-              <a:rPr lang="en-US"/>
-              <a:t>7/23/19</a:t>
-            </a:fld>
-            <a:endParaRPr lang="en-US"/>
-          </a:p>
-        </p:txBody>
-      </p:sp>
-      <p:sp>
-        <p:nvSpPr>
-          <p:cNvPr id="4" name="Slide Image Placeholder 3"/>
-          <p:cNvSpPr>
-            <a:spLocks noGrp="1" noRot="1" noChangeAspect="1"/>
-          </p:cNvSpPr>
-          <p:nvPr>
-            <p:ph type="sldImg" idx="2"/>
-          </p:nvPr>
-        </p:nvSpPr>
-        <p:spPr>
-          <a:xfrm>
-            <a:off x="685800" y="1143000"/>
-            <a:ext cx="5486400" cy="3086100"/>
-          </a:xfrm>
-          <a:prstGeom prst="rect">
-            <a:avLst/>
-          </a:prstGeom>
-          <a:noFill/>
-          <a:ln w="12700">
-            <a:solidFill>
-              <a:prstClr val="black"/>
-            </a:solidFill>
-          </a:ln>
-        </p:spPr>
-        <p:txBody>
-          <a:bodyPr vert="horz" lIns="91440" tIns="45720" rIns="91440" bIns="45720" rtlCol="0" anchor="ctr"/>
-          <a:lstStyle/>
-          <a:p>
-            <a:endParaRPr lang="en-US"/>
-          </a:p>
-        </p:txBody>
-      </p:sp>
-      <p:sp>
-        <p:nvSpPr>
-          <p:cNvPr id="5" name="Notes Placeholder 4"/>
-          <p:cNvSpPr>
-            <a:spLocks noGrp="1"/>
-          </p:cNvSpPr>
-          <p:nvPr>
-            <p:ph type="body" sz="quarter" idx="3"/>
-          </p:nvPr>
-        </p:nvSpPr>
-        <p:spPr>
-          <a:xfrm>
-            <a:off x="685800" y="4400550"/>
-            <a:ext cx="5486400" cy="3600450"/>
-          </a:xfrm>
-          <a:prstGeom prst="rect">
-            <a:avLst/>
-          </a:prstGeom>
-        </p:spPr>
-        <p:txBody>
-          <a:bodyPr vert="horz" lIns="91440" tIns="45720" rIns="91440" bIns="45720" rtlCol="0"/>
-          <a:lstStyle/>
-          <a:p>
-            <a:pPr lvl="0"/>
-            <a:r>
-              <a:rPr lang="en-US"/>
-              <a:t>Click to edit Master text styles</a:t>
-            </a:r>
-          </a:p>
-          <a:p>
-            <a:pPr lvl="1"/>
-            <a:r>
-              <a:rPr lang="en-US"/>
-              <a:t>Second level</a:t>
-            </a:r>
-          </a:p>
-          <a:p>
-            <a:pPr lvl="2"/>
-            <a:r>
-              <a:rPr lang="en-US"/>
-              <a:t>Third level</a:t>
-            </a:r>
-          </a:p>
-          <a:p>
-            <a:pPr lvl="3"/>
-            <a:r>
-              <a:rPr lang="en-US"/>
-              <a:t>Fourth level</a:t>
-            </a:r>
-          </a:p>
-          <a:p>
-            <a:pPr lvl="4"/>
-            <a:r>
-              <a:rPr lang="en-US"/>
-              <a:t>Fifth level</a:t>
-            </a:r>
-          </a:p>
-        </p:txBody>
-      </p:sp>
-      <p:sp>
-        <p:nvSpPr>
-          <p:cNvPr id="6" name="Footer Placeholder 5"/>
-          <p:cNvSpPr>
-            <a:spLocks noGrp="1"/>
-          </p:cNvSpPr>
-          <p:nvPr>
-            <p:ph type="ftr" sz="quarter" idx="4"/>
-          </p:nvPr>
-        </p:nvSpPr>
-        <p:spPr>
-          <a:xfrm>
-            <a:off x="0" y="8685213"/>
-            <a:ext cx="2971800" cy="458787"/>
-          </a:xfrm>
-          <a:prstGeom prst="rect">
-            <a:avLst/>
-          </a:prstGeom>
-        </p:spPr>
-        <p:txBody>
-          <a:bodyPr vert="horz" lIns="91440" tIns="45720" rIns="91440" bIns="45720" rtlCol="0" anchor="b"/>
-          <a:lstStyle>
-            <a:lvl1pPr algn="l">
-              <a:defRPr sz="1200"/>
-            </a:lvl1pPr>
-          </a:lstStyle>
-          <a:p>
-            <a:endParaRPr lang="en-US"/>
-          </a:p>
-        </p:txBody>
-      </p:sp>
-      <p:sp>
-        <p:nvSpPr>
-          <p:cNvPr id="7" name="Slide Number Placeholder 6"/>
-          <p:cNvSpPr>
-            <a:spLocks noGrp="1"/>
-          </p:cNvSpPr>
-          <p:nvPr>
-            <p:ph type="sldNum" sz="quarter" idx="5"/>
-          </p:nvPr>
-        </p:nvSpPr>
-        <p:spPr>
-          <a:xfrm>
-            <a:off x="3884613" y="8685213"/>
-            <a:ext cx="2971800" cy="458787"/>
-          </a:xfrm>
-          <a:prstGeom prst="rect">
-            <a:avLst/>
-          </a:prstGeom>
-        </p:spPr>
-        <p:txBody>
-          <a:bodyPr vert="horz" lIns="91440" tIns="45720" rIns="91440" bIns="45720" rtlCol="0" anchor="b"/>
-          <a:lstStyle>
-            <a:lvl1pPr algn="r">
-              <a:defRPr sz="1200"/>
-            </a:lvl1pPr>
-          </a:lstStyle>
-          <a:p>
-            <a:fld id="{CE5E9CC1-C706-0F49-92D6-E571CC5EEA8F}" type="slidenum">
-              <a:rPr lang="en-US"/>
-              <a:t>‹#›</a:t>
-            </a:fld>
-            <a:endParaRPr lang="en-US"/>
-          </a:p>
-        </p:txBody>
-      </p:sp>
     </p:spTree>
     <p:extLst>
       <p:ext uri="{BB962C8B-B14F-4D97-AF65-F5344CB8AC3E}">
-        <p14:creationId xmlns:p14="http://schemas.microsoft.com/office/powerpoint/2010/main" val="1024086991"/>
+        <p14:creationId xmlns:p14="http://schemas.microsoft.com/office/powerpoint/2010/main" val="4085425493"/>
       </p:ext>
     </p:extLst>
   </p:cSld>
@@ -1086,10 +894,6 @@
           <a:bodyPr/>
           <a:lstStyle/>
           <a:p>
-            <a:r>
-              <a:rPr lang="en-US" dirty="0"/>
-              <a:t/>
-            </a:r>
             <a:endParaRPr lang="en-US" dirty="0"/>
           </a:p>
         </p:txBody>
@@ -1174,10 +978,6 @@
           <a:bodyPr/>
           <a:lstStyle/>
           <a:p>
-            <a:r>
-              <a:rPr lang="en-US" dirty="0"/>
-              <a:t/>
-            </a:r>
             <a:endParaRPr lang="en-US" dirty="0"/>
           </a:p>
         </p:txBody>
@@ -1262,10 +1062,6 @@
           <a:bodyPr/>
           <a:lstStyle/>
           <a:p>
-            <a:r>
-              <a:rPr lang="en-US" dirty="0"/>
-              <a:t/>
-            </a:r>
             <a:endParaRPr lang="en-US" dirty="0"/>
           </a:p>
         </p:txBody>
@@ -1350,10 +1146,6 @@
           <a:bodyPr/>
           <a:lstStyle/>
           <a:p>
-            <a:r>
-              <a:rPr lang="en-US" dirty="0"/>
-              <a:t/>
-            </a:r>
             <a:endParaRPr lang="en-US" dirty="0"/>
           </a:p>
         </p:txBody>
@@ -1438,10 +1230,6 @@
           <a:bodyPr/>
           <a:lstStyle/>
           <a:p>
-            <a:r>
-              <a:rPr lang="en-US" dirty="0"/>
-              <a:t/>
-            </a:r>
             <a:endParaRPr lang="en-US" dirty="0"/>
           </a:p>
         </p:txBody>
@@ -1526,10 +1314,6 @@
           <a:bodyPr/>
           <a:lstStyle/>
           <a:p>
-            <a:r>
-              <a:rPr lang="en-US" dirty="0"/>
-              <a:t/>
-            </a:r>
             <a:endParaRPr lang="en-US" dirty="0"/>
           </a:p>
         </p:txBody>
@@ -1614,10 +1398,6 @@
           <a:bodyPr/>
           <a:lstStyle/>
           <a:p>
-            <a:r>
-              <a:rPr lang="en-US" dirty="0"/>
-              <a:t/>
-            </a:r>
             <a:endParaRPr lang="en-US" dirty="0"/>
           </a:p>
         </p:txBody>
@@ -1702,10 +1482,6 @@
           <a:bodyPr/>
           <a:lstStyle/>
           <a:p>
-            <a:r>
-              <a:rPr lang="en-US" dirty="0"/>
-              <a:t/>
-            </a:r>
             <a:endParaRPr lang="en-US" dirty="0"/>
           </a:p>
         </p:txBody>
@@ -1790,10 +1566,6 @@
           <a:bodyPr/>
           <a:lstStyle/>
           <a:p>
-            <a:r>
-              <a:rPr lang="en-US" dirty="0"/>
-              <a:t/>
-            </a:r>
             <a:endParaRPr lang="en-US" dirty="0"/>
           </a:p>
         </p:txBody>
@@ -1878,10 +1650,6 @@
           <a:bodyPr/>
           <a:lstStyle/>
           <a:p>
-            <a:r>
-              <a:rPr lang="en-US" dirty="0"/>
-              <a:t/>
-            </a:r>
             <a:endParaRPr lang="en-US" dirty="0"/>
           </a:p>
         </p:txBody>
@@ -1966,10 +1734,6 @@
           <a:bodyPr/>
           <a:lstStyle/>
           <a:p>
-            <a:r>
-              <a:rPr lang="en-US" dirty="0"/>
-              <a:t/>
-            </a:r>
             <a:endParaRPr lang="en-US" dirty="0"/>
           </a:p>
         </p:txBody>
@@ -2054,10 +1818,6 @@
           <a:bodyPr/>
           <a:lstStyle/>
           <a:p>
-            <a:r>
-              <a:rPr lang="en-US" dirty="0"/>
-              <a:t/>
-            </a:r>
             <a:endParaRPr lang="en-US" dirty="0"/>
           </a:p>
         </p:txBody>
@@ -2142,10 +1902,6 @@
           <a:bodyPr/>
           <a:lstStyle/>
           <a:p>
-            <a:r>
-              <a:rPr lang="en-US" dirty="0"/>
-              <a:t/>
-            </a:r>
             <a:endParaRPr lang="en-US" dirty="0"/>
           </a:p>
         </p:txBody>
@@ -2230,10 +1986,6 @@
           <a:bodyPr/>
           <a:lstStyle/>
           <a:p>
-            <a:r>
-              <a:rPr lang="en-US" dirty="0"/>
-              <a:t/>
-            </a:r>
             <a:endParaRPr lang="en-US" dirty="0"/>
           </a:p>
         </p:txBody>
@@ -2318,10 +2070,6 @@
           <a:bodyPr/>
           <a:lstStyle/>
           <a:p>
-            <a:r>
-              <a:rPr lang="en-US" dirty="0"/>
-              <a:t/>
-            </a:r>
             <a:endParaRPr lang="en-US" dirty="0"/>
           </a:p>
         </p:txBody>
@@ -2395,6 +2143,11 @@
 <file path=ppt/slideMasters/slideMaster1.xml><?xml version="1.0" encoding="utf-8"?>
 <p:sldMaster xmlns:a="http://schemas.openxmlformats.org/drawingml/2006/main" xmlns:r="http://schemas.openxmlformats.org/officeDocument/2006/relationships" xmlns:p="http://schemas.openxmlformats.org/presentationml/2006/main">
   <p:cSld>
+    <p:bg>
+      <p:bgRef idx="1001">
+        <a:schemeClr val="bg1"/>
+      </p:bgRef>
+    </p:bg>
     <p:spTree>
       <p:nvGrpSpPr>
         <p:cNvPr id="1" name=""/>
@@ -2677,6 +2430,7 @@
         <a:solidFill>
           <a:srgbClr val="1B2A4A"/>
         </a:solidFill>
+        <a:effectLst/>
       </p:bgPr>
     </p:bg>
     <p:spTree>
@@ -2768,11 +2522,11 @@
           <a:bodyPr wrap="square" rtlCol="0" anchor="ctr"/>
           <a:lstStyle/>
           <a:p>
-            <a:pPr indent="0" marL="0">
-              <a:buNone/>
-            </a:pPr>
-            <a:r>
-              <a:rPr lang="en-US" sz="5200" b="1" spc="800" kern="0" dirty="0">
+            <a:pPr marL="0" indent="0">
+              <a:buNone/>
+            </a:pPr>
+            <a:r>
+              <a:rPr lang="en-US" sz="5200" b="1" kern="0" spc="800" dirty="0">
                 <a:solidFill>
                   <a:srgbClr val="FFFFFF"/>
                 </a:solidFill>
@@ -2807,7 +2561,7 @@
           <a:bodyPr wrap="square" rtlCol="0" anchor="ctr"/>
           <a:lstStyle/>
           <a:p>
-            <a:pPr indent="0" marL="0">
+            <a:pPr marL="0" indent="0">
               <a:buNone/>
             </a:pPr>
             <a:r>
@@ -2846,7 +2600,7 @@
           <a:bodyPr wrap="square" rtlCol="0" anchor="ctr"/>
           <a:lstStyle/>
           <a:p>
-            <a:pPr indent="0" marL="0">
+            <a:pPr marL="0" indent="0">
               <a:buNone/>
             </a:pPr>
             <a:r>
@@ -2863,7 +2617,7 @@
             <a:endParaRPr lang="en-US" sz="1800" dirty="0"/>
           </a:p>
           <a:p>
-            <a:pPr indent="0" marL="0">
+            <a:pPr marL="0" indent="0">
               <a:buNone/>
             </a:pPr>
             <a:r>
@@ -2902,7 +2656,7 @@
           <a:bodyPr wrap="square" rtlCol="0" anchor="ctr"/>
           <a:lstStyle/>
           <a:p>
-            <a:pPr indent="0" marL="0">
+            <a:pPr marL="0" indent="0">
               <a:buNone/>
             </a:pPr>
             <a:r>
@@ -2941,7 +2695,7 @@
           <a:bodyPr wrap="square" rtlCol="0" anchor="ctr"/>
           <a:lstStyle/>
           <a:p>
-            <a:pPr indent="0" marL="0">
+            <a:pPr marL="0" indent="0">
               <a:buNone/>
             </a:pPr>
             <a:r>
@@ -3007,7 +2761,7 @@
           <a:bodyPr wrap="square" rtlCol="0" anchor="ctr"/>
           <a:lstStyle/>
           <a:p>
-            <a:pPr algn="ctr" indent="0" marL="0">
+            <a:pPr marL="0" indent="0" algn="ctr">
               <a:buNone/>
             </a:pPr>
             <a:r>
@@ -3073,7 +2827,7 @@
           <a:bodyPr wrap="square" rtlCol="0" anchor="ctr"/>
           <a:lstStyle/>
           <a:p>
-            <a:pPr algn="ctr" indent="0" marL="0">
+            <a:pPr marL="0" indent="0" algn="ctr">
               <a:buNone/>
             </a:pPr>
             <a:r>
@@ -3139,7 +2893,7 @@
           <a:bodyPr wrap="square" rtlCol="0" anchor="ctr"/>
           <a:lstStyle/>
           <a:p>
-            <a:pPr algn="ctr" indent="0" marL="0">
+            <a:pPr marL="0" indent="0" algn="ctr">
               <a:buNone/>
             </a:pPr>
             <a:r>
@@ -3173,6 +2927,7 @@
         <a:solidFill>
           <a:srgbClr val="F7FAFC"/>
         </a:solidFill>
+        <a:effectLst/>
       </p:bgPr>
     </p:bg>
     <p:spTree>
@@ -3235,7 +2990,7 @@
           <a:bodyPr wrap="square" lIns="0" tIns="0" rIns="0" bIns="0" rtlCol="0" anchor="ctr"/>
           <a:lstStyle/>
           <a:p>
-            <a:pPr indent="0" marL="0">
+            <a:pPr marL="0" indent="0">
               <a:buNone/>
             </a:pPr>
             <a:r>
@@ -3274,7 +3029,7 @@
           <a:bodyPr wrap="square" lIns="0" tIns="0" rIns="0" bIns="0" rtlCol="0" anchor="ctr"/>
           <a:lstStyle/>
           <a:p>
-            <a:pPr indent="0" marL="0">
+            <a:pPr marL="0" indent="0">
               <a:buNone/>
             </a:pPr>
             <a:r>
@@ -3338,7 +3093,7 @@
           <a:bodyPr wrap="square" lIns="0" tIns="0" rIns="0" bIns="0" rtlCol="0" anchor="ctr"/>
           <a:lstStyle/>
           <a:p>
-            <a:pPr indent="0" marL="0">
+            <a:pPr marL="0" indent="0">
               <a:buNone/>
             </a:pPr>
             <a:r>
@@ -3377,7 +3132,7 @@
           <a:bodyPr wrap="square" lIns="0" tIns="0" rIns="0" bIns="0" rtlCol="0" anchor="ctr"/>
           <a:lstStyle/>
           <a:p>
-            <a:pPr indent="0" marL="0">
+            <a:pPr marL="0" indent="0">
               <a:buNone/>
             </a:pPr>
             <a:r>
@@ -3419,7 +3174,7 @@
             <a:prstDash val="solid"/>
           </a:ln>
           <a:effectLst>
-            <a:outerShdw sx="100000" sy="100000" kx="0" ky="0" algn="bl" rotWithShape="0" blurRad="101600" dist="25400" dir="8100000">
+            <a:outerShdw blurRad="101600" dist="25400" dir="8100000" algn="bl" rotWithShape="0">
               <a:srgbClr val="000000">
                 <a:alpha val="12000"/>
               </a:srgbClr>
@@ -3448,7 +3203,7 @@
           <a:bodyPr wrap="square" lIns="0" tIns="0" rIns="0" bIns="0" rtlCol="0" anchor="ctr"/>
           <a:lstStyle/>
           <a:p>
-            <a:pPr indent="0" marL="0">
+            <a:pPr marL="0" indent="0">
               <a:buNone/>
             </a:pPr>
             <a:r>
@@ -3487,11 +3242,11 @@
           <a:bodyPr wrap="square" lIns="0" tIns="0" rIns="0" bIns="0" rtlCol="0" anchor="ctr"/>
           <a:lstStyle/>
           <a:p>
-            <a:pPr indent="0" marL="0">
-              <a:buNone/>
-            </a:pPr>
-            <a:r>
-              <a:rPr lang="en-US" sz="1800" b="1" dirty="0">
+            <a:pPr marL="0" indent="0" algn="ctr">
+              <a:buNone/>
+            </a:pPr>
+            <a:r>
+              <a:rPr lang="en-US" sz="1200" b="1" dirty="0">
                 <a:solidFill>
                   <a:srgbClr val="1B2A4A"/>
                 </a:solidFill>
@@ -3501,7 +3256,7 @@
               </a:rPr>
               <a:t>C2 satisfied iff u ≥ 18%     |     C3 + C4 satisfied iff u ≤ 3%     |     18% &gt; 3%   ⟹   EMPTY SET — Infeasible</a:t>
             </a:r>
-            <a:endParaRPr lang="en-US" sz="1800" dirty="0"/>
+            <a:endParaRPr lang="en-US" sz="1200" dirty="0"/>
           </a:p>
         </p:txBody>
       </p:sp>
@@ -3526,7 +3281,7 @@
           <a:bodyPr wrap="square" rtlCol="0" anchor="ctr"/>
           <a:lstStyle/>
           <a:p>
-            <a:pPr indent="0" marL="0">
+            <a:pPr marL="0" indent="0">
               <a:buNone/>
             </a:pPr>
             <a:r>
@@ -3565,7 +3320,7 @@
           <a:bodyPr wrap="square" lIns="0" tIns="0" rIns="0" bIns="0" rtlCol="0" anchor="ctr"/>
           <a:lstStyle/>
           <a:p>
-            <a:pPr indent="0" marL="0">
+            <a:pPr marL="0" indent="0">
               <a:buNone/>
             </a:pPr>
             <a:r>
@@ -3607,7 +3362,7 @@
             <a:prstDash val="solid"/>
           </a:ln>
           <a:effectLst>
-            <a:outerShdw sx="100000" sy="100000" kx="0" ky="0" algn="bl" rotWithShape="0" blurRad="101600" dist="25400" dir="8100000">
+            <a:outerShdw blurRad="101600" dist="25400" dir="8100000" algn="bl" rotWithShape="0">
               <a:srgbClr val="000000">
                 <a:alpha val="12000"/>
               </a:srgbClr>
@@ -3661,7 +3416,7 @@
           <a:bodyPr wrap="square" lIns="0" tIns="0" rIns="0" bIns="0" rtlCol="0" anchor="ctr"/>
           <a:lstStyle/>
           <a:p>
-            <a:pPr indent="0" marL="0">
+            <a:pPr marL="0" indent="0">
               <a:buNone/>
             </a:pPr>
             <a:r>
@@ -3700,7 +3455,7 @@
           <a:bodyPr wrap="square" lIns="0" tIns="0" rIns="0" bIns="0" rtlCol="0" anchor="t"/>
           <a:lstStyle/>
           <a:p>
-            <a:pPr indent="0" marL="0">
+            <a:pPr marL="0" indent="0">
               <a:buNone/>
             </a:pPr>
             <a:r>
@@ -3742,7 +3497,7 @@
             <a:prstDash val="solid"/>
           </a:ln>
           <a:effectLst>
-            <a:outerShdw sx="100000" sy="100000" kx="0" ky="0" algn="bl" rotWithShape="0" blurRad="101600" dist="25400" dir="8100000">
+            <a:outerShdw blurRad="101600" dist="25400" dir="8100000" algn="bl" rotWithShape="0">
               <a:srgbClr val="000000">
                 <a:alpha val="12000"/>
               </a:srgbClr>
@@ -3796,7 +3551,7 @@
           <a:bodyPr wrap="square" lIns="0" tIns="0" rIns="0" bIns="0" rtlCol="0" anchor="ctr"/>
           <a:lstStyle/>
           <a:p>
-            <a:pPr indent="0" marL="0">
+            <a:pPr marL="0" indent="0">
               <a:buNone/>
             </a:pPr>
             <a:r>
@@ -3835,7 +3590,7 @@
           <a:bodyPr wrap="square" lIns="0" tIns="0" rIns="0" bIns="0" rtlCol="0" anchor="t"/>
           <a:lstStyle/>
           <a:p>
-            <a:pPr indent="0" marL="0">
+            <a:pPr marL="0" indent="0">
               <a:buNone/>
             </a:pPr>
             <a:r>
@@ -3874,7 +3629,7 @@
           <a:bodyPr wrap="square" rtlCol="0" anchor="ctr"/>
           <a:lstStyle/>
           <a:p>
-            <a:pPr indent="0" marL="0">
+            <a:pPr marL="0" indent="0">
               <a:buNone/>
             </a:pPr>
             <a:r>
@@ -3908,6 +3663,7 @@
         <a:solidFill>
           <a:srgbClr val="F7FAFC"/>
         </a:solidFill>
+        <a:effectLst/>
       </p:bgPr>
     </p:bg>
     <p:spTree>
@@ -3970,7 +3726,7 @@
           <a:bodyPr wrap="square" lIns="0" tIns="0" rIns="0" bIns="0" rtlCol="0" anchor="ctr"/>
           <a:lstStyle/>
           <a:p>
-            <a:pPr indent="0" marL="0">
+            <a:pPr marL="0" indent="0">
               <a:buNone/>
             </a:pPr>
             <a:r>
@@ -4009,7 +3765,7 @@
           <a:bodyPr wrap="square" lIns="0" tIns="0" rIns="0" bIns="0" rtlCol="0" anchor="ctr"/>
           <a:lstStyle/>
           <a:p>
-            <a:pPr indent="0" marL="0">
+            <a:pPr marL="0" indent="0">
               <a:buNone/>
             </a:pPr>
             <a:r>
@@ -4073,7 +3829,7 @@
           <a:bodyPr wrap="square" lIns="0" tIns="0" rIns="0" bIns="0" rtlCol="0" anchor="ctr"/>
           <a:lstStyle/>
           <a:p>
-            <a:pPr indent="0" marL="0">
+            <a:pPr marL="0" indent="0">
               <a:buNone/>
             </a:pPr>
             <a:r>
@@ -4112,7 +3868,7 @@
           <a:bodyPr wrap="square" lIns="0" tIns="0" rIns="0" bIns="0" rtlCol="0" anchor="ctr"/>
           <a:lstStyle/>
           <a:p>
-            <a:pPr indent="0" marL="0">
+            <a:pPr marL="0" indent="0">
               <a:buNone/>
             </a:pPr>
             <a:r>
@@ -4154,7 +3910,7 @@
             <a:prstDash val="solid"/>
           </a:ln>
           <a:effectLst>
-            <a:outerShdw sx="100000" sy="100000" kx="0" ky="0" algn="bl" rotWithShape="0" blurRad="101600" dist="25400" dir="8100000">
+            <a:outerShdw blurRad="101600" dist="25400" dir="8100000" algn="bl" rotWithShape="0">
               <a:srgbClr val="000000">
                 <a:alpha val="12000"/>
               </a:srgbClr>
@@ -4208,7 +3964,7 @@
           <a:bodyPr wrap="square" lIns="0" tIns="0" rIns="0" bIns="0" rtlCol="0" anchor="ctr"/>
           <a:lstStyle/>
           <a:p>
-            <a:pPr algn="ctr" indent="0" marL="0">
+            <a:pPr marL="0" indent="0" algn="ctr">
               <a:buNone/>
             </a:pPr>
             <a:r>
@@ -4247,7 +4003,7 @@
           <a:bodyPr wrap="square" lIns="0" tIns="0" rIns="0" bIns="0" rtlCol="0" anchor="ctr"/>
           <a:lstStyle/>
           <a:p>
-            <a:pPr algn="ctr" indent="0" marL="0">
+            <a:pPr marL="0" indent="0" algn="ctr">
               <a:buNone/>
             </a:pPr>
             <a:r>
@@ -4336,7 +4092,7 @@
           <a:bodyPr wrap="square" lIns="0" tIns="0" rIns="0" bIns="0" rtlCol="0" anchor="ctr"/>
           <a:lstStyle/>
           <a:p>
-            <a:pPr indent="0" marL="0">
+            <a:pPr marL="0" indent="0">
               <a:buNone/>
             </a:pPr>
             <a:r>
@@ -4353,7 +4109,7 @@
             <a:endParaRPr lang="en-US" sz="1000" dirty="0"/>
           </a:p>
           <a:p>
-            <a:pPr indent="0" marL="0">
+            <a:pPr marL="0" indent="0">
               <a:buNone/>
             </a:pPr>
             <a:r>
@@ -4442,7 +4198,7 @@
           <a:bodyPr wrap="square" lIns="0" tIns="0" rIns="0" bIns="0" rtlCol="0" anchor="ctr"/>
           <a:lstStyle/>
           <a:p>
-            <a:pPr indent="0" marL="0">
+            <a:pPr marL="0" indent="0">
               <a:buNone/>
             </a:pPr>
             <a:r>
@@ -4459,7 +4215,7 @@
             <a:endParaRPr lang="en-US" sz="1000" dirty="0"/>
           </a:p>
           <a:p>
-            <a:pPr indent="0" marL="0">
+            <a:pPr marL="0" indent="0">
               <a:buNone/>
             </a:pPr>
             <a:r>
@@ -4548,7 +4304,7 @@
           <a:bodyPr wrap="square" lIns="0" tIns="0" rIns="0" bIns="0" rtlCol="0" anchor="ctr"/>
           <a:lstStyle/>
           <a:p>
-            <a:pPr indent="0" marL="0">
+            <a:pPr marL="0" indent="0">
               <a:buNone/>
             </a:pPr>
             <a:r>
@@ -4565,7 +4321,7 @@
             <a:endParaRPr lang="en-US" sz="1000" dirty="0"/>
           </a:p>
           <a:p>
-            <a:pPr indent="0" marL="0">
+            <a:pPr marL="0" indent="0">
               <a:buNone/>
             </a:pPr>
             <a:r>
@@ -4654,7 +4410,7 @@
           <a:bodyPr wrap="square" lIns="0" tIns="0" rIns="0" bIns="0" rtlCol="0" anchor="ctr"/>
           <a:lstStyle/>
           <a:p>
-            <a:pPr indent="0" marL="0">
+            <a:pPr marL="0" indent="0">
               <a:buNone/>
             </a:pPr>
             <a:r>
@@ -4743,7 +4499,7 @@
           <a:bodyPr wrap="square" lIns="0" tIns="0" rIns="0" bIns="0" rtlCol="0" anchor="ctr"/>
           <a:lstStyle/>
           <a:p>
-            <a:pPr indent="0" marL="0">
+            <a:pPr marL="0" indent="0">
               <a:buNone/>
             </a:pPr>
             <a:r>
@@ -4785,7 +4541,7 @@
             <a:prstDash val="solid"/>
           </a:ln>
           <a:effectLst>
-            <a:outerShdw sx="100000" sy="100000" kx="0" ky="0" algn="bl" rotWithShape="0" blurRad="101600" dist="25400" dir="8100000">
+            <a:outerShdw blurRad="101600" dist="25400" dir="8100000" algn="bl" rotWithShape="0">
               <a:srgbClr val="000000">
                 <a:alpha val="12000"/>
               </a:srgbClr>
@@ -4839,7 +4595,7 @@
           <a:bodyPr wrap="square" lIns="0" tIns="0" rIns="0" bIns="0" rtlCol="0" anchor="ctr"/>
           <a:lstStyle/>
           <a:p>
-            <a:pPr algn="ctr" indent="0" marL="0">
+            <a:pPr marL="0" indent="0" algn="ctr">
               <a:buNone/>
             </a:pPr>
             <a:r>
@@ -4878,7 +4634,7 @@
           <a:bodyPr wrap="square" lIns="0" tIns="0" rIns="0" bIns="0" rtlCol="0" anchor="ctr"/>
           <a:lstStyle/>
           <a:p>
-            <a:pPr algn="ctr" indent="0" marL="0">
+            <a:pPr marL="0" indent="0" algn="ctr">
               <a:buNone/>
             </a:pPr>
             <a:r>
@@ -4967,7 +4723,7 @@
           <a:bodyPr wrap="square" lIns="0" tIns="0" rIns="0" bIns="0" rtlCol="0" anchor="ctr"/>
           <a:lstStyle/>
           <a:p>
-            <a:pPr indent="0" marL="0">
+            <a:pPr marL="0" indent="0">
               <a:buNone/>
             </a:pPr>
             <a:r>
@@ -4984,7 +4740,7 @@
             <a:endParaRPr lang="en-US" sz="1000" dirty="0"/>
           </a:p>
           <a:p>
-            <a:pPr indent="0" marL="0">
+            <a:pPr marL="0" indent="0">
               <a:buNone/>
             </a:pPr>
             <a:r>
@@ -5073,7 +4829,7 @@
           <a:bodyPr wrap="square" lIns="0" tIns="0" rIns="0" bIns="0" rtlCol="0" anchor="ctr"/>
           <a:lstStyle/>
           <a:p>
-            <a:pPr indent="0" marL="0">
+            <a:pPr marL="0" indent="0">
               <a:buNone/>
             </a:pPr>
             <a:r>
@@ -5090,7 +4846,7 @@
             <a:endParaRPr lang="en-US" sz="1000" dirty="0"/>
           </a:p>
           <a:p>
-            <a:pPr indent="0" marL="0">
+            <a:pPr marL="0" indent="0">
               <a:buNone/>
             </a:pPr>
             <a:r>
@@ -5179,7 +4935,7 @@
           <a:bodyPr wrap="square" lIns="0" tIns="0" rIns="0" bIns="0" rtlCol="0" anchor="ctr"/>
           <a:lstStyle/>
           <a:p>
-            <a:pPr indent="0" marL="0">
+            <a:pPr marL="0" indent="0">
               <a:buNone/>
             </a:pPr>
             <a:r>
@@ -5196,7 +4952,7 @@
             <a:endParaRPr lang="en-US" sz="1000" dirty="0"/>
           </a:p>
           <a:p>
-            <a:pPr indent="0" marL="0">
+            <a:pPr marL="0" indent="0">
               <a:buNone/>
             </a:pPr>
             <a:r>
@@ -5285,7 +5041,7 @@
           <a:bodyPr wrap="square" lIns="0" tIns="0" rIns="0" bIns="0" rtlCol="0" anchor="ctr"/>
           <a:lstStyle/>
           <a:p>
-            <a:pPr indent="0" marL="0">
+            <a:pPr marL="0" indent="0">
               <a:buNone/>
             </a:pPr>
             <a:r>
@@ -5374,7 +5130,7 @@
           <a:bodyPr wrap="square" lIns="0" tIns="0" rIns="0" bIns="0" rtlCol="0" anchor="ctr"/>
           <a:lstStyle/>
           <a:p>
-            <a:pPr indent="0" marL="0">
+            <a:pPr marL="0" indent="0">
               <a:buNone/>
             </a:pPr>
             <a:r>
@@ -5416,7 +5172,7 @@
             <a:prstDash val="solid"/>
           </a:ln>
           <a:effectLst>
-            <a:outerShdw sx="100000" sy="100000" kx="0" ky="0" algn="bl" rotWithShape="0" blurRad="101600" dist="25400" dir="8100000">
+            <a:outerShdw blurRad="101600" dist="25400" dir="8100000" algn="bl" rotWithShape="0">
               <a:srgbClr val="000000">
                 <a:alpha val="12000"/>
               </a:srgbClr>
@@ -5470,7 +5226,7 @@
           <a:bodyPr wrap="square" lIns="0" tIns="0" rIns="0" bIns="0" rtlCol="0" anchor="ctr"/>
           <a:lstStyle/>
           <a:p>
-            <a:pPr algn="ctr" indent="0" marL="0">
+            <a:pPr marL="0" indent="0" algn="ctr">
               <a:buNone/>
             </a:pPr>
             <a:r>
@@ -5509,7 +5265,7 @@
           <a:bodyPr wrap="square" lIns="0" tIns="0" rIns="0" bIns="0" rtlCol="0" anchor="ctr"/>
           <a:lstStyle/>
           <a:p>
-            <a:pPr algn="ctr" indent="0" marL="0">
+            <a:pPr marL="0" indent="0" algn="ctr">
               <a:buNone/>
             </a:pPr>
             <a:r>
@@ -5598,7 +5354,7 @@
           <a:bodyPr wrap="square" lIns="0" tIns="0" rIns="0" bIns="0" rtlCol="0" anchor="ctr"/>
           <a:lstStyle/>
           <a:p>
-            <a:pPr indent="0" marL="0">
+            <a:pPr marL="0" indent="0">
               <a:buNone/>
             </a:pPr>
             <a:r>
@@ -5615,7 +5371,7 @@
             <a:endParaRPr lang="en-US" sz="1000" dirty="0"/>
           </a:p>
           <a:p>
-            <a:pPr indent="0" marL="0">
+            <a:pPr marL="0" indent="0">
               <a:buNone/>
             </a:pPr>
             <a:r>
@@ -5704,7 +5460,7 @@
           <a:bodyPr wrap="square" lIns="0" tIns="0" rIns="0" bIns="0" rtlCol="0" anchor="ctr"/>
           <a:lstStyle/>
           <a:p>
-            <a:pPr indent="0" marL="0">
+            <a:pPr marL="0" indent="0">
               <a:buNone/>
             </a:pPr>
             <a:r>
@@ -5721,7 +5477,7 @@
             <a:endParaRPr lang="en-US" sz="1000" dirty="0"/>
           </a:p>
           <a:p>
-            <a:pPr indent="0" marL="0">
+            <a:pPr marL="0" indent="0">
               <a:buNone/>
             </a:pPr>
             <a:r>
@@ -5810,7 +5566,7 @@
           <a:bodyPr wrap="square" lIns="0" tIns="0" rIns="0" bIns="0" rtlCol="0" anchor="ctr"/>
           <a:lstStyle/>
           <a:p>
-            <a:pPr indent="0" marL="0">
+            <a:pPr marL="0" indent="0">
               <a:buNone/>
             </a:pPr>
             <a:r>
@@ -5827,7 +5583,7 @@
             <a:endParaRPr lang="en-US" sz="1000" dirty="0"/>
           </a:p>
           <a:p>
-            <a:pPr indent="0" marL="0">
+            <a:pPr marL="0" indent="0">
               <a:buNone/>
             </a:pPr>
             <a:r>
@@ -5916,7 +5672,7 @@
           <a:bodyPr wrap="square" lIns="0" tIns="0" rIns="0" bIns="0" rtlCol="0" anchor="ctr"/>
           <a:lstStyle/>
           <a:p>
-            <a:pPr indent="0" marL="0">
+            <a:pPr marL="0" indent="0">
               <a:buNone/>
             </a:pPr>
             <a:r>
@@ -5933,7 +5689,7 @@
             <a:endParaRPr lang="en-US" sz="1000" dirty="0"/>
           </a:p>
           <a:p>
-            <a:pPr indent="0" marL="0">
+            <a:pPr marL="0" indent="0">
               <a:buNone/>
             </a:pPr>
             <a:r>
@@ -6022,7 +5778,7 @@
           <a:bodyPr wrap="square" lIns="0" tIns="0" rIns="0" bIns="0" rtlCol="0" anchor="ctr"/>
           <a:lstStyle/>
           <a:p>
-            <a:pPr indent="0" marL="0">
+            <a:pPr marL="0" indent="0">
               <a:buNone/>
             </a:pPr>
             <a:r>
@@ -6039,7 +5795,7 @@
             <a:endParaRPr lang="en-US" sz="1000" dirty="0"/>
           </a:p>
           <a:p>
-            <a:pPr indent="0" marL="0">
+            <a:pPr marL="0" indent="0">
               <a:buNone/>
             </a:pPr>
             <a:r>
@@ -6119,6 +5875,7 @@
         <a:solidFill>
           <a:srgbClr val="F7FAFC"/>
         </a:solidFill>
+        <a:effectLst/>
       </p:bgPr>
     </p:bg>
     <p:spTree>
@@ -6181,7 +5938,7 @@
           <a:bodyPr wrap="square" lIns="0" tIns="0" rIns="0" bIns="0" rtlCol="0" anchor="ctr"/>
           <a:lstStyle/>
           <a:p>
-            <a:pPr indent="0" marL="0">
+            <a:pPr marL="0" indent="0">
               <a:buNone/>
             </a:pPr>
             <a:r>
@@ -6220,7 +5977,7 @@
           <a:bodyPr wrap="square" lIns="0" tIns="0" rIns="0" bIns="0" rtlCol="0" anchor="ctr"/>
           <a:lstStyle/>
           <a:p>
-            <a:pPr indent="0" marL="0">
+            <a:pPr marL="0" indent="0">
               <a:buNone/>
             </a:pPr>
             <a:r>
@@ -6284,7 +6041,7 @@
           <a:bodyPr wrap="square" lIns="0" tIns="0" rIns="0" bIns="0" rtlCol="0" anchor="ctr"/>
           <a:lstStyle/>
           <a:p>
-            <a:pPr indent="0" marL="0">
+            <a:pPr marL="0" indent="0">
               <a:buNone/>
             </a:pPr>
             <a:r>
@@ -6323,7 +6080,7 @@
           <a:bodyPr wrap="square" lIns="0" tIns="0" rIns="0" bIns="0" rtlCol="0" anchor="ctr"/>
           <a:lstStyle/>
           <a:p>
-            <a:pPr indent="0" marL="0">
+            <a:pPr marL="0" indent="0">
               <a:buNone/>
             </a:pPr>
             <a:r>
@@ -6365,7 +6122,7 @@
             <a:prstDash val="solid"/>
           </a:ln>
           <a:effectLst>
-            <a:outerShdw sx="100000" sy="100000" kx="0" ky="0" algn="bl" rotWithShape="0" blurRad="101600" dist="25400" dir="8100000">
+            <a:outerShdw blurRad="101600" dist="25400" dir="8100000" algn="bl" rotWithShape="0">
               <a:srgbClr val="000000">
                 <a:alpha val="12000"/>
               </a:srgbClr>
@@ -6394,7 +6151,7 @@
           <a:bodyPr wrap="square" lIns="0" tIns="0" rIns="0" bIns="0" rtlCol="0" anchor="ctr"/>
           <a:lstStyle/>
           <a:p>
-            <a:pPr indent="0" marL="0">
+            <a:pPr marL="0" indent="0">
               <a:buNone/>
             </a:pPr>
             <a:r>
@@ -6433,7 +6190,7 @@
           <a:bodyPr wrap="square" lIns="0" tIns="0" rIns="0" bIns="0" rtlCol="0" anchor="ctr"/>
           <a:lstStyle/>
           <a:p>
-            <a:pPr indent="0" marL="0">
+            <a:pPr marL="0" indent="0">
               <a:buNone/>
             </a:pPr>
             <a:r>
@@ -6467,17 +6224,41 @@
         </p:nvGraphicFramePr>
         <p:xfrm>
           <a:off x="182880" y="2103120"/>
-          <a:ext cx="8732520" cy="2834640"/>
+          <a:ext cx="8732520" cy="2880360"/>
         </p:xfrm>
         <a:graphic>
           <a:graphicData uri="http://schemas.openxmlformats.org/drawingml/2006/table">
             <a:tbl>
               <a:tblPr/>
               <a:tblGrid>
-                <a:gridCol w="2468880"/>
-                <a:gridCol w="2103120"/>
-                <a:gridCol w="2103120"/>
-                <a:gridCol w="2057400"/>
+                <a:gridCol w="2468880">
+                  <a:extLst>
+                    <a:ext uri="{9D8B030D-6E8A-4147-A177-3AD203B41FA5}">
+                      <a16:colId xmlns:a16="http://schemas.microsoft.com/office/drawing/2014/main" val="20000"/>
+                    </a:ext>
+                  </a:extLst>
+                </a:gridCol>
+                <a:gridCol w="2103120">
+                  <a:extLst>
+                    <a:ext uri="{9D8B030D-6E8A-4147-A177-3AD203B41FA5}">
+                      <a16:colId xmlns:a16="http://schemas.microsoft.com/office/drawing/2014/main" val="20001"/>
+                    </a:ext>
+                  </a:extLst>
+                </a:gridCol>
+                <a:gridCol w="2103120">
+                  <a:extLst>
+                    <a:ext uri="{9D8B030D-6E8A-4147-A177-3AD203B41FA5}">
+                      <a16:colId xmlns:a16="http://schemas.microsoft.com/office/drawing/2014/main" val="20002"/>
+                    </a:ext>
+                  </a:extLst>
+                </a:gridCol>
+                <a:gridCol w="2057400">
+                  <a:extLst>
+                    <a:ext uri="{9D8B030D-6E8A-4147-A177-3AD203B41FA5}">
+                      <a16:colId xmlns:a16="http://schemas.microsoft.com/office/drawing/2014/main" val="20003"/>
+                    </a:ext>
+                  </a:extLst>
+                </a:gridCol>
               </a:tblGrid>
               <a:tr h="320040">
                 <a:tc>
@@ -6485,7 +6266,7 @@
                     <a:bodyPr/>
                     <a:lstStyle/>
                     <a:p>
-                      <a:pPr indent="0" marL="0">
+                      <a:pPr marL="0" indent="0">
                         <a:buNone/>
                       </a:pPr>
                       <a:r>
@@ -6506,7 +6287,7 @@
                       </a:endParaRPr>
                     </a:p>
                   </a:txBody>
-                  <a:tcPr marL="91440" marR="91440" marT="45720" marB="45720">
+                  <a:tcPr>
                     <a:lnL w="12700" cap="flat" cmpd="sng" algn="ctr">
                       <a:solidFill>
                         <a:srgbClr val="CCCCCC"/>
@@ -6553,7 +6334,7 @@
                     <a:bodyPr/>
                     <a:lstStyle/>
                     <a:p>
-                      <a:pPr indent="0" marL="0">
+                      <a:pPr marL="0" indent="0">
                         <a:buNone/>
                       </a:pPr>
                       <a:r>
@@ -6574,7 +6355,7 @@
                       </a:endParaRPr>
                     </a:p>
                   </a:txBody>
-                  <a:tcPr marL="91440" marR="91440" marT="45720" marB="45720">
+                  <a:tcPr>
                     <a:lnL w="12700" cap="flat" cmpd="sng" algn="ctr">
                       <a:solidFill>
                         <a:srgbClr val="CCCCCC"/>
@@ -6621,7 +6402,7 @@
                     <a:bodyPr/>
                     <a:lstStyle/>
                     <a:p>
-                      <a:pPr indent="0" marL="0">
+                      <a:pPr marL="0" indent="0">
                         <a:buNone/>
                       </a:pPr>
                       <a:r>
@@ -6642,7 +6423,7 @@
                       </a:endParaRPr>
                     </a:p>
                   </a:txBody>
-                  <a:tcPr marL="91440" marR="91440" marT="45720" marB="45720">
+                  <a:tcPr>
                     <a:lnL w="12700" cap="flat" cmpd="sng" algn="ctr">
                       <a:solidFill>
                         <a:srgbClr val="CCCCCC"/>
@@ -6689,7 +6470,7 @@
                     <a:bodyPr/>
                     <a:lstStyle/>
                     <a:p>
-                      <a:pPr indent="0" marL="0">
+                      <a:pPr marL="0" indent="0">
                         <a:buNone/>
                       </a:pPr>
                       <a:r>
@@ -6710,7 +6491,7 @@
                       </a:endParaRPr>
                     </a:p>
                   </a:txBody>
-                  <a:tcPr marL="91440" marR="91440" marT="45720" marB="45720">
+                  <a:tcPr>
                     <a:lnL w="12700" cap="flat" cmpd="sng" algn="ctr">
                       <a:solidFill>
                         <a:srgbClr val="CCCCCC"/>
@@ -6752,6 +6533,11 @@
                     </a:solidFill>
                   </a:tcPr>
                 </a:tc>
+                <a:extLst>
+                  <a:ext uri="{0D108BD9-81ED-4DB2-BD59-A6C34878D82A}">
+                    <a16:rowId xmlns:a16="http://schemas.microsoft.com/office/drawing/2014/main" val="10000"/>
+                  </a:ext>
+                </a:extLst>
               </a:tr>
               <a:tr h="320040">
                 <a:tc>
@@ -6759,7 +6545,7 @@
                     <a:bodyPr/>
                     <a:lstStyle/>
                     <a:p>
-                      <a:pPr indent="0" marL="0">
+                      <a:pPr marL="0" indent="0">
                         <a:buNone/>
                       </a:pPr>
                       <a:r>
@@ -6780,7 +6566,7 @@
                       </a:endParaRPr>
                     </a:p>
                   </a:txBody>
-                  <a:tcPr marL="91440" marR="91440" marT="45720" marB="45720">
+                  <a:tcPr>
                     <a:lnL w="12700" cap="flat" cmpd="sng" algn="ctr">
                       <a:solidFill>
                         <a:srgbClr val="CCCCCC"/>
@@ -6827,7 +6613,7 @@
                     <a:bodyPr/>
                     <a:lstStyle/>
                     <a:p>
-                      <a:pPr indent="0" marL="0">
+                      <a:pPr marL="0" indent="0">
                         <a:buNone/>
                       </a:pPr>
                       <a:r>
@@ -6848,7 +6634,7 @@
                       </a:endParaRPr>
                     </a:p>
                   </a:txBody>
-                  <a:tcPr marL="91440" marR="91440" marT="45720" marB="45720">
+                  <a:tcPr>
                     <a:lnL w="12700" cap="flat" cmpd="sng" algn="ctr">
                       <a:solidFill>
                         <a:srgbClr val="CCCCCC"/>
@@ -6895,7 +6681,7 @@
                     <a:bodyPr/>
                     <a:lstStyle/>
                     <a:p>
-                      <a:pPr indent="0" marL="0">
+                      <a:pPr marL="0" indent="0">
                         <a:buNone/>
                       </a:pPr>
                       <a:r>
@@ -6916,7 +6702,7 @@
                       </a:endParaRPr>
                     </a:p>
                   </a:txBody>
-                  <a:tcPr marL="91440" marR="91440" marT="45720" marB="45720">
+                  <a:tcPr>
                     <a:lnL w="12700" cap="flat" cmpd="sng" algn="ctr">
                       <a:solidFill>
                         <a:srgbClr val="CCCCCC"/>
@@ -6963,7 +6749,7 @@
                     <a:bodyPr/>
                     <a:lstStyle/>
                     <a:p>
-                      <a:pPr indent="0" marL="0">
+                      <a:pPr marL="0" indent="0">
                         <a:buNone/>
                       </a:pPr>
                       <a:r>
@@ -6984,7 +6770,7 @@
                       </a:endParaRPr>
                     </a:p>
                   </a:txBody>
-                  <a:tcPr marL="91440" marR="91440" marT="45720" marB="45720">
+                  <a:tcPr>
                     <a:lnL w="12700" cap="flat" cmpd="sng" algn="ctr">
                       <a:solidFill>
                         <a:srgbClr val="CCCCCC"/>
@@ -7026,6 +6812,11 @@
                     </a:solidFill>
                   </a:tcPr>
                 </a:tc>
+                <a:extLst>
+                  <a:ext uri="{0D108BD9-81ED-4DB2-BD59-A6C34878D82A}">
+                    <a16:rowId xmlns:a16="http://schemas.microsoft.com/office/drawing/2014/main" val="10001"/>
+                  </a:ext>
+                </a:extLst>
               </a:tr>
               <a:tr h="320040">
                 <a:tc>
@@ -7033,7 +6824,7 @@
                     <a:bodyPr/>
                     <a:lstStyle/>
                     <a:p>
-                      <a:pPr indent="0" marL="0">
+                      <a:pPr marL="0" indent="0">
                         <a:buNone/>
                       </a:pPr>
                       <a:r>
@@ -7054,7 +6845,7 @@
                       </a:endParaRPr>
                     </a:p>
                   </a:txBody>
-                  <a:tcPr marL="91440" marR="91440" marT="45720" marB="45720">
+                  <a:tcPr>
                     <a:lnL w="12700" cap="flat" cmpd="sng" algn="ctr">
                       <a:solidFill>
                         <a:srgbClr val="CCCCCC"/>
@@ -7101,7 +6892,7 @@
                     <a:bodyPr/>
                     <a:lstStyle/>
                     <a:p>
-                      <a:pPr indent="0" marL="0">
+                      <a:pPr marL="0" indent="0">
                         <a:buNone/>
                       </a:pPr>
                       <a:r>
@@ -7122,7 +6913,7 @@
                       </a:endParaRPr>
                     </a:p>
                   </a:txBody>
-                  <a:tcPr marL="91440" marR="91440" marT="45720" marB="45720">
+                  <a:tcPr>
                     <a:lnL w="12700" cap="flat" cmpd="sng" algn="ctr">
                       <a:solidFill>
                         <a:srgbClr val="CCCCCC"/>
@@ -7169,7 +6960,7 @@
                     <a:bodyPr/>
                     <a:lstStyle/>
                     <a:p>
-                      <a:pPr indent="0" marL="0">
+                      <a:pPr marL="0" indent="0">
                         <a:buNone/>
                       </a:pPr>
                       <a:r>
@@ -7190,7 +6981,7 @@
                       </a:endParaRPr>
                     </a:p>
                   </a:txBody>
-                  <a:tcPr marL="91440" marR="91440" marT="45720" marB="45720">
+                  <a:tcPr>
                     <a:lnL w="12700" cap="flat" cmpd="sng" algn="ctr">
                       <a:solidFill>
                         <a:srgbClr val="CCCCCC"/>
@@ -7237,7 +7028,7 @@
                     <a:bodyPr/>
                     <a:lstStyle/>
                     <a:p>
-                      <a:pPr indent="0" marL="0">
+                      <a:pPr marL="0" indent="0">
                         <a:buNone/>
                       </a:pPr>
                       <a:r>
@@ -7258,7 +7049,7 @@
                       </a:endParaRPr>
                     </a:p>
                   </a:txBody>
-                  <a:tcPr marL="91440" marR="91440" marT="45720" marB="45720">
+                  <a:tcPr>
                     <a:lnL w="12700" cap="flat" cmpd="sng" algn="ctr">
                       <a:solidFill>
                         <a:srgbClr val="CCCCCC"/>
@@ -7300,6 +7091,11 @@
                     </a:solidFill>
                   </a:tcPr>
                 </a:tc>
+                <a:extLst>
+                  <a:ext uri="{0D108BD9-81ED-4DB2-BD59-A6C34878D82A}">
+                    <a16:rowId xmlns:a16="http://schemas.microsoft.com/office/drawing/2014/main" val="10002"/>
+                  </a:ext>
+                </a:extLst>
               </a:tr>
               <a:tr h="320040">
                 <a:tc>
@@ -7307,7 +7103,7 @@
                     <a:bodyPr/>
                     <a:lstStyle/>
                     <a:p>
-                      <a:pPr indent="0" marL="0">
+                      <a:pPr marL="0" indent="0">
                         <a:buNone/>
                       </a:pPr>
                       <a:r>
@@ -7328,7 +7124,7 @@
                       </a:endParaRPr>
                     </a:p>
                   </a:txBody>
-                  <a:tcPr marL="91440" marR="91440" marT="45720" marB="45720">
+                  <a:tcPr>
                     <a:lnL w="12700" cap="flat" cmpd="sng" algn="ctr">
                       <a:solidFill>
                         <a:srgbClr val="CCCCCC"/>
@@ -7375,7 +7171,7 @@
                     <a:bodyPr/>
                     <a:lstStyle/>
                     <a:p>
-                      <a:pPr indent="0" marL="0">
+                      <a:pPr marL="0" indent="0">
                         <a:buNone/>
                       </a:pPr>
                       <a:r>
@@ -7396,7 +7192,7 @@
                       </a:endParaRPr>
                     </a:p>
                   </a:txBody>
-                  <a:tcPr marL="91440" marR="91440" marT="45720" marB="45720">
+                  <a:tcPr>
                     <a:lnL w="12700" cap="flat" cmpd="sng" algn="ctr">
                       <a:solidFill>
                         <a:srgbClr val="CCCCCC"/>
@@ -7443,7 +7239,7 @@
                     <a:bodyPr/>
                     <a:lstStyle/>
                     <a:p>
-                      <a:pPr indent="0" marL="0">
+                      <a:pPr marL="0" indent="0">
                         <a:buNone/>
                       </a:pPr>
                       <a:r>
@@ -7464,7 +7260,7 @@
                       </a:endParaRPr>
                     </a:p>
                   </a:txBody>
-                  <a:tcPr marL="91440" marR="91440" marT="45720" marB="45720">
+                  <a:tcPr>
                     <a:lnL w="12700" cap="flat" cmpd="sng" algn="ctr">
                       <a:solidFill>
                         <a:srgbClr val="CCCCCC"/>
@@ -7511,7 +7307,7 @@
                     <a:bodyPr/>
                     <a:lstStyle/>
                     <a:p>
-                      <a:pPr indent="0" marL="0">
+                      <a:pPr marL="0" indent="0">
                         <a:buNone/>
                       </a:pPr>
                       <a:r>
@@ -7532,7 +7328,7 @@
                       </a:endParaRPr>
                     </a:p>
                   </a:txBody>
-                  <a:tcPr marL="91440" marR="91440" marT="45720" marB="45720">
+                  <a:tcPr>
                     <a:lnL w="12700" cap="flat" cmpd="sng" algn="ctr">
                       <a:solidFill>
                         <a:srgbClr val="CCCCCC"/>
@@ -7574,6 +7370,11 @@
                     </a:solidFill>
                   </a:tcPr>
                 </a:tc>
+                <a:extLst>
+                  <a:ext uri="{0D108BD9-81ED-4DB2-BD59-A6C34878D82A}">
+                    <a16:rowId xmlns:a16="http://schemas.microsoft.com/office/drawing/2014/main" val="10003"/>
+                  </a:ext>
+                </a:extLst>
               </a:tr>
               <a:tr h="320040">
                 <a:tc>
@@ -7581,7 +7382,7 @@
                     <a:bodyPr/>
                     <a:lstStyle/>
                     <a:p>
-                      <a:pPr indent="0" marL="0">
+                      <a:pPr marL="0" indent="0">
                         <a:buNone/>
                       </a:pPr>
                       <a:r>
@@ -7602,7 +7403,7 @@
                       </a:endParaRPr>
                     </a:p>
                   </a:txBody>
-                  <a:tcPr marL="91440" marR="91440" marT="45720" marB="45720">
+                  <a:tcPr>
                     <a:lnL w="12700" cap="flat" cmpd="sng" algn="ctr">
                       <a:solidFill>
                         <a:srgbClr val="CCCCCC"/>
@@ -7649,7 +7450,7 @@
                     <a:bodyPr/>
                     <a:lstStyle/>
                     <a:p>
-                      <a:pPr indent="0" marL="0">
+                      <a:pPr marL="0" indent="0">
                         <a:buNone/>
                       </a:pPr>
                       <a:r>
@@ -7670,7 +7471,7 @@
                       </a:endParaRPr>
                     </a:p>
                   </a:txBody>
-                  <a:tcPr marL="91440" marR="91440" marT="45720" marB="45720">
+                  <a:tcPr>
                     <a:lnL w="12700" cap="flat" cmpd="sng" algn="ctr">
                       <a:solidFill>
                         <a:srgbClr val="CCCCCC"/>
@@ -7717,7 +7518,7 @@
                     <a:bodyPr/>
                     <a:lstStyle/>
                     <a:p>
-                      <a:pPr indent="0" marL="0">
+                      <a:pPr marL="0" indent="0">
                         <a:buNone/>
                       </a:pPr>
                       <a:r>
@@ -7738,7 +7539,7 @@
                       </a:endParaRPr>
                     </a:p>
                   </a:txBody>
-                  <a:tcPr marL="91440" marR="91440" marT="45720" marB="45720">
+                  <a:tcPr>
                     <a:lnL w="12700" cap="flat" cmpd="sng" algn="ctr">
                       <a:solidFill>
                         <a:srgbClr val="CCCCCC"/>
@@ -7785,7 +7586,7 @@
                     <a:bodyPr/>
                     <a:lstStyle/>
                     <a:p>
-                      <a:pPr indent="0" marL="0">
+                      <a:pPr marL="0" indent="0">
                         <a:buNone/>
                       </a:pPr>
                       <a:r>
@@ -7806,7 +7607,7 @@
                       </a:endParaRPr>
                     </a:p>
                   </a:txBody>
-                  <a:tcPr marL="91440" marR="91440" marT="45720" marB="45720">
+                  <a:tcPr>
                     <a:lnL w="12700" cap="flat" cmpd="sng" algn="ctr">
                       <a:solidFill>
                         <a:srgbClr val="CCCCCC"/>
@@ -7848,6 +7649,11 @@
                     </a:solidFill>
                   </a:tcPr>
                 </a:tc>
+                <a:extLst>
+                  <a:ext uri="{0D108BD9-81ED-4DB2-BD59-A6C34878D82A}">
+                    <a16:rowId xmlns:a16="http://schemas.microsoft.com/office/drawing/2014/main" val="10004"/>
+                  </a:ext>
+                </a:extLst>
               </a:tr>
               <a:tr h="320040">
                 <a:tc>
@@ -7855,7 +7661,7 @@
                     <a:bodyPr/>
                     <a:lstStyle/>
                     <a:p>
-                      <a:pPr indent="0" marL="0">
+                      <a:pPr marL="0" indent="0">
                         <a:buNone/>
                       </a:pPr>
                       <a:r>
@@ -7876,7 +7682,7 @@
                       </a:endParaRPr>
                     </a:p>
                   </a:txBody>
-                  <a:tcPr marL="91440" marR="91440" marT="45720" marB="45720">
+                  <a:tcPr>
                     <a:lnL w="12700" cap="flat" cmpd="sng" algn="ctr">
                       <a:solidFill>
                         <a:srgbClr val="CCCCCC"/>
@@ -7923,7 +7729,7 @@
                     <a:bodyPr/>
                     <a:lstStyle/>
                     <a:p>
-                      <a:pPr indent="0" marL="0">
+                      <a:pPr marL="0" indent="0">
                         <a:buNone/>
                       </a:pPr>
                       <a:r>
@@ -7944,7 +7750,7 @@
                       </a:endParaRPr>
                     </a:p>
                   </a:txBody>
-                  <a:tcPr marL="91440" marR="91440" marT="45720" marB="45720">
+                  <a:tcPr>
                     <a:lnL w="12700" cap="flat" cmpd="sng" algn="ctr">
                       <a:solidFill>
                         <a:srgbClr val="CCCCCC"/>
@@ -7991,7 +7797,7 @@
                     <a:bodyPr/>
                     <a:lstStyle/>
                     <a:p>
-                      <a:pPr indent="0" marL="0">
+                      <a:pPr marL="0" indent="0">
                         <a:buNone/>
                       </a:pPr>
                       <a:r>
@@ -8012,7 +7818,7 @@
                       </a:endParaRPr>
                     </a:p>
                   </a:txBody>
-                  <a:tcPr marL="91440" marR="91440" marT="45720" marB="45720">
+                  <a:tcPr>
                     <a:lnL w="12700" cap="flat" cmpd="sng" algn="ctr">
                       <a:solidFill>
                         <a:srgbClr val="CCCCCC"/>
@@ -8059,7 +7865,7 @@
                     <a:bodyPr/>
                     <a:lstStyle/>
                     <a:p>
-                      <a:pPr indent="0" marL="0">
+                      <a:pPr marL="0" indent="0">
                         <a:buNone/>
                       </a:pPr>
                       <a:r>
@@ -8080,7 +7886,7 @@
                       </a:endParaRPr>
                     </a:p>
                   </a:txBody>
-                  <a:tcPr marL="91440" marR="91440" marT="45720" marB="45720">
+                  <a:tcPr>
                     <a:lnL w="12700" cap="flat" cmpd="sng" algn="ctr">
                       <a:solidFill>
                         <a:srgbClr val="CCCCCC"/>
@@ -8122,6 +7928,11 @@
                     </a:solidFill>
                   </a:tcPr>
                 </a:tc>
+                <a:extLst>
+                  <a:ext uri="{0D108BD9-81ED-4DB2-BD59-A6C34878D82A}">
+                    <a16:rowId xmlns:a16="http://schemas.microsoft.com/office/drawing/2014/main" val="10005"/>
+                  </a:ext>
+                </a:extLst>
               </a:tr>
               <a:tr h="320040">
                 <a:tc>
@@ -8129,7 +7940,7 @@
                     <a:bodyPr/>
                     <a:lstStyle/>
                     <a:p>
-                      <a:pPr indent="0" marL="0">
+                      <a:pPr marL="0" indent="0">
                         <a:buNone/>
                       </a:pPr>
                       <a:r>
@@ -8150,7 +7961,7 @@
                       </a:endParaRPr>
                     </a:p>
                   </a:txBody>
-                  <a:tcPr marL="91440" marR="91440" marT="45720" marB="45720">
+                  <a:tcPr>
                     <a:lnL w="12700" cap="flat" cmpd="sng" algn="ctr">
                       <a:solidFill>
                         <a:srgbClr val="CCCCCC"/>
@@ -8197,7 +8008,7 @@
                     <a:bodyPr/>
                     <a:lstStyle/>
                     <a:p>
-                      <a:pPr indent="0" marL="0">
+                      <a:pPr marL="0" indent="0">
                         <a:buNone/>
                       </a:pPr>
                       <a:r>
@@ -8218,7 +8029,7 @@
                       </a:endParaRPr>
                     </a:p>
                   </a:txBody>
-                  <a:tcPr marL="91440" marR="91440" marT="45720" marB="45720">
+                  <a:tcPr>
                     <a:lnL w="12700" cap="flat" cmpd="sng" algn="ctr">
                       <a:solidFill>
                         <a:srgbClr val="CCCCCC"/>
@@ -8265,7 +8076,7 @@
                     <a:bodyPr/>
                     <a:lstStyle/>
                     <a:p>
-                      <a:pPr indent="0" marL="0">
+                      <a:pPr marL="0" indent="0">
                         <a:buNone/>
                       </a:pPr>
                       <a:r>
@@ -8286,7 +8097,7 @@
                       </a:endParaRPr>
                     </a:p>
                   </a:txBody>
-                  <a:tcPr marL="91440" marR="91440" marT="45720" marB="45720">
+                  <a:tcPr>
                     <a:lnL w="12700" cap="flat" cmpd="sng" algn="ctr">
                       <a:solidFill>
                         <a:srgbClr val="CCCCCC"/>
@@ -8333,7 +8144,7 @@
                     <a:bodyPr/>
                     <a:lstStyle/>
                     <a:p>
-                      <a:pPr indent="0" marL="0">
+                      <a:pPr marL="0" indent="0">
                         <a:buNone/>
                       </a:pPr>
                       <a:r>
@@ -8354,7 +8165,7 @@
                       </a:endParaRPr>
                     </a:p>
                   </a:txBody>
-                  <a:tcPr marL="91440" marR="91440" marT="45720" marB="45720">
+                  <a:tcPr>
                     <a:lnL w="12700" cap="flat" cmpd="sng" algn="ctr">
                       <a:solidFill>
                         <a:srgbClr val="CCCCCC"/>
@@ -8396,6 +8207,11 @@
                     </a:solidFill>
                   </a:tcPr>
                 </a:tc>
+                <a:extLst>
+                  <a:ext uri="{0D108BD9-81ED-4DB2-BD59-A6C34878D82A}">
+                    <a16:rowId xmlns:a16="http://schemas.microsoft.com/office/drawing/2014/main" val="10006"/>
+                  </a:ext>
+                </a:extLst>
               </a:tr>
               <a:tr h="320040">
                 <a:tc>
@@ -8403,7 +8219,7 @@
                     <a:bodyPr/>
                     <a:lstStyle/>
                     <a:p>
-                      <a:pPr indent="0" marL="0">
+                      <a:pPr marL="0" indent="0">
                         <a:buNone/>
                       </a:pPr>
                       <a:r>
@@ -8424,7 +8240,7 @@
                       </a:endParaRPr>
                     </a:p>
                   </a:txBody>
-                  <a:tcPr marL="91440" marR="91440" marT="45720" marB="45720">
+                  <a:tcPr>
                     <a:lnL w="12700" cap="flat" cmpd="sng" algn="ctr">
                       <a:solidFill>
                         <a:srgbClr val="CCCCCC"/>
@@ -8471,7 +8287,7 @@
                     <a:bodyPr/>
                     <a:lstStyle/>
                     <a:p>
-                      <a:pPr indent="0" marL="0">
+                      <a:pPr marL="0" indent="0">
                         <a:buNone/>
                       </a:pPr>
                       <a:r>
@@ -8492,7 +8308,7 @@
                       </a:endParaRPr>
                     </a:p>
                   </a:txBody>
-                  <a:tcPr marL="91440" marR="91440" marT="45720" marB="45720">
+                  <a:tcPr>
                     <a:lnL w="12700" cap="flat" cmpd="sng" algn="ctr">
                       <a:solidFill>
                         <a:srgbClr val="CCCCCC"/>
@@ -8539,7 +8355,7 @@
                     <a:bodyPr/>
                     <a:lstStyle/>
                     <a:p>
-                      <a:pPr indent="0" marL="0">
+                      <a:pPr marL="0" indent="0">
                         <a:buNone/>
                       </a:pPr>
                       <a:r>
@@ -8560,7 +8376,7 @@
                       </a:endParaRPr>
                     </a:p>
                   </a:txBody>
-                  <a:tcPr marL="91440" marR="91440" marT="45720" marB="45720">
+                  <a:tcPr>
                     <a:lnL w="12700" cap="flat" cmpd="sng" algn="ctr">
                       <a:solidFill>
                         <a:srgbClr val="CCCCCC"/>
@@ -8607,7 +8423,7 @@
                     <a:bodyPr/>
                     <a:lstStyle/>
                     <a:p>
-                      <a:pPr indent="0" marL="0">
+                      <a:pPr marL="0" indent="0">
                         <a:buNone/>
                       </a:pPr>
                       <a:r>
@@ -8628,7 +8444,7 @@
                       </a:endParaRPr>
                     </a:p>
                   </a:txBody>
-                  <a:tcPr marL="91440" marR="91440" marT="45720" marB="45720">
+                  <a:tcPr>
                     <a:lnL w="12700" cap="flat" cmpd="sng" algn="ctr">
                       <a:solidFill>
                         <a:srgbClr val="CCCCCC"/>
@@ -8670,6 +8486,11 @@
                     </a:solidFill>
                   </a:tcPr>
                 </a:tc>
+                <a:extLst>
+                  <a:ext uri="{0D108BD9-81ED-4DB2-BD59-A6C34878D82A}">
+                    <a16:rowId xmlns:a16="http://schemas.microsoft.com/office/drawing/2014/main" val="10007"/>
+                  </a:ext>
+                </a:extLst>
               </a:tr>
               <a:tr h="320040">
                 <a:tc>
@@ -8677,7 +8498,7 @@
                     <a:bodyPr/>
                     <a:lstStyle/>
                     <a:p>
-                      <a:pPr indent="0" marL="0">
+                      <a:pPr marL="0" indent="0">
                         <a:buNone/>
                       </a:pPr>
                       <a:r>
@@ -8698,7 +8519,7 @@
                       </a:endParaRPr>
                     </a:p>
                   </a:txBody>
-                  <a:tcPr marL="91440" marR="91440" marT="45720" marB="45720">
+                  <a:tcPr>
                     <a:lnL w="12700" cap="flat" cmpd="sng" algn="ctr">
                       <a:solidFill>
                         <a:srgbClr val="CCCCCC"/>
@@ -8745,7 +8566,7 @@
                     <a:bodyPr/>
                     <a:lstStyle/>
                     <a:p>
-                      <a:pPr indent="0" marL="0">
+                      <a:pPr marL="0" indent="0">
                         <a:buNone/>
                       </a:pPr>
                       <a:r>
@@ -8766,7 +8587,7 @@
                       </a:endParaRPr>
                     </a:p>
                   </a:txBody>
-                  <a:tcPr marL="91440" marR="91440" marT="45720" marB="45720">
+                  <a:tcPr>
                     <a:lnL w="12700" cap="flat" cmpd="sng" algn="ctr">
                       <a:solidFill>
                         <a:srgbClr val="CCCCCC"/>
@@ -8813,7 +8634,7 @@
                     <a:bodyPr/>
                     <a:lstStyle/>
                     <a:p>
-                      <a:pPr indent="0" marL="0">
+                      <a:pPr marL="0" indent="0">
                         <a:buNone/>
                       </a:pPr>
                       <a:r>
@@ -8834,7 +8655,7 @@
                       </a:endParaRPr>
                     </a:p>
                   </a:txBody>
-                  <a:tcPr marL="91440" marR="91440" marT="45720" marB="45720">
+                  <a:tcPr>
                     <a:lnL w="12700" cap="flat" cmpd="sng" algn="ctr">
                       <a:solidFill>
                         <a:srgbClr val="CCCCCC"/>
@@ -8881,7 +8702,7 @@
                     <a:bodyPr/>
                     <a:lstStyle/>
                     <a:p>
-                      <a:pPr indent="0" marL="0">
+                      <a:pPr marL="0" indent="0">
                         <a:buNone/>
                       </a:pPr>
                       <a:r>
@@ -8902,7 +8723,7 @@
                       </a:endParaRPr>
                     </a:p>
                   </a:txBody>
-                  <a:tcPr marL="91440" marR="91440" marT="45720" marB="45720">
+                  <a:tcPr>
                     <a:lnL w="12700" cap="flat" cmpd="sng" algn="ctr">
                       <a:solidFill>
                         <a:srgbClr val="CCCCCC"/>
@@ -8944,6 +8765,11 @@
                     </a:solidFill>
                   </a:tcPr>
                 </a:tc>
+                <a:extLst>
+                  <a:ext uri="{0D108BD9-81ED-4DB2-BD59-A6C34878D82A}">
+                    <a16:rowId xmlns:a16="http://schemas.microsoft.com/office/drawing/2014/main" val="10008"/>
+                  </a:ext>
+                </a:extLst>
               </a:tr>
             </a:tbl>
           </a:graphicData>
@@ -8970,7 +8796,7 @@
           <a:bodyPr wrap="square" rtlCol="0" anchor="ctr"/>
           <a:lstStyle/>
           <a:p>
-            <a:pPr indent="0" marL="0">
+            <a:pPr marL="0" indent="0">
               <a:buNone/>
             </a:pPr>
             <a:r>
@@ -9004,6 +8830,7 @@
         <a:solidFill>
           <a:srgbClr val="F7FAFC"/>
         </a:solidFill>
+        <a:effectLst/>
       </p:bgPr>
     </p:bg>
     <p:spTree>
@@ -9066,7 +8893,7 @@
           <a:bodyPr wrap="square" lIns="0" tIns="0" rIns="0" bIns="0" rtlCol="0" anchor="ctr"/>
           <a:lstStyle/>
           <a:p>
-            <a:pPr indent="0" marL="0">
+            <a:pPr marL="0" indent="0">
               <a:buNone/>
             </a:pPr>
             <a:r>
@@ -9105,7 +8932,7 @@
           <a:bodyPr wrap="square" lIns="0" tIns="0" rIns="0" bIns="0" rtlCol="0" anchor="ctr"/>
           <a:lstStyle/>
           <a:p>
-            <a:pPr indent="0" marL="0">
+            <a:pPr marL="0" indent="0">
               <a:buNone/>
             </a:pPr>
             <a:r>
@@ -9169,7 +8996,7 @@
           <a:bodyPr wrap="square" lIns="0" tIns="0" rIns="0" bIns="0" rtlCol="0" anchor="ctr"/>
           <a:lstStyle/>
           <a:p>
-            <a:pPr indent="0" marL="0">
+            <a:pPr marL="0" indent="0">
               <a:buNone/>
             </a:pPr>
             <a:r>
@@ -9208,7 +9035,7 @@
           <a:bodyPr wrap="square" lIns="0" tIns="0" rIns="0" bIns="0" rtlCol="0" anchor="ctr"/>
           <a:lstStyle/>
           <a:p>
-            <a:pPr indent="0" marL="0">
+            <a:pPr marL="0" indent="0">
               <a:buNone/>
             </a:pPr>
             <a:r>
@@ -9247,7 +9074,7 @@
           <a:bodyPr wrap="square" lIns="0" tIns="0" rIns="0" bIns="0" rtlCol="0" anchor="ctr"/>
           <a:lstStyle/>
           <a:p>
-            <a:pPr indent="0" marL="0">
+            <a:pPr marL="0" indent="0">
               <a:buNone/>
             </a:pPr>
             <a:r>
@@ -9336,7 +9163,7 @@
           <a:bodyPr wrap="square" lIns="0" tIns="0" rIns="0" bIns="0" rtlCol="0" anchor="ctr"/>
           <a:lstStyle/>
           <a:p>
-            <a:pPr indent="0" marL="0">
+            <a:pPr marL="0" indent="0">
               <a:buNone/>
             </a:pPr>
             <a:r>
@@ -9400,7 +9227,7 @@
           <a:bodyPr wrap="square" lIns="0" tIns="0" rIns="0" bIns="0" rtlCol="0" anchor="ctr"/>
           <a:lstStyle/>
           <a:p>
-            <a:pPr algn="ctr" indent="0" marL="0">
+            <a:pPr marL="0" indent="0" algn="ctr">
               <a:buNone/>
             </a:pPr>
             <a:r>
@@ -9439,7 +9266,7 @@
           <a:bodyPr wrap="square" lIns="0" tIns="0" rIns="0" bIns="0" rtlCol="0" anchor="ctr"/>
           <a:lstStyle/>
           <a:p>
-            <a:pPr indent="0" marL="0">
+            <a:pPr marL="0" indent="0">
               <a:buNone/>
             </a:pPr>
             <a:r>
@@ -9528,7 +9355,7 @@
           <a:bodyPr wrap="square" lIns="0" tIns="0" rIns="0" bIns="0" rtlCol="0" anchor="ctr"/>
           <a:lstStyle/>
           <a:p>
-            <a:pPr indent="0" marL="0">
+            <a:pPr marL="0" indent="0">
               <a:buNone/>
             </a:pPr>
             <a:r>
@@ -9592,7 +9419,7 @@
           <a:bodyPr wrap="square" lIns="0" tIns="0" rIns="0" bIns="0" rtlCol="0" anchor="ctr"/>
           <a:lstStyle/>
           <a:p>
-            <a:pPr algn="ctr" indent="0" marL="0">
+            <a:pPr marL="0" indent="0" algn="ctr">
               <a:buNone/>
             </a:pPr>
             <a:r>
@@ -9631,7 +9458,7 @@
           <a:bodyPr wrap="square" lIns="0" tIns="0" rIns="0" bIns="0" rtlCol="0" anchor="ctr"/>
           <a:lstStyle/>
           <a:p>
-            <a:pPr indent="0" marL="0">
+            <a:pPr marL="0" indent="0">
               <a:buNone/>
             </a:pPr>
             <a:r>
@@ -9720,7 +9547,7 @@
           <a:bodyPr wrap="square" lIns="0" tIns="0" rIns="0" bIns="0" rtlCol="0" anchor="ctr"/>
           <a:lstStyle/>
           <a:p>
-            <a:pPr indent="0" marL="0">
+            <a:pPr marL="0" indent="0">
               <a:buNone/>
             </a:pPr>
             <a:r>
@@ -9784,7 +9611,7 @@
           <a:bodyPr wrap="square" lIns="0" tIns="0" rIns="0" bIns="0" rtlCol="0" anchor="ctr"/>
           <a:lstStyle/>
           <a:p>
-            <a:pPr algn="ctr" indent="0" marL="0">
+            <a:pPr marL="0" indent="0" algn="ctr">
               <a:buNone/>
             </a:pPr>
             <a:r>
@@ -9823,7 +9650,7 @@
           <a:bodyPr wrap="square" lIns="0" tIns="0" rIns="0" bIns="0" rtlCol="0" anchor="ctr"/>
           <a:lstStyle/>
           <a:p>
-            <a:pPr indent="0" marL="0">
+            <a:pPr marL="0" indent="0">
               <a:buNone/>
             </a:pPr>
             <a:r>
@@ -9912,7 +9739,7 @@
           <a:bodyPr wrap="square" lIns="0" tIns="0" rIns="0" bIns="0" rtlCol="0" anchor="ctr"/>
           <a:lstStyle/>
           <a:p>
-            <a:pPr indent="0" marL="0">
+            <a:pPr marL="0" indent="0">
               <a:buNone/>
             </a:pPr>
             <a:r>
@@ -9976,7 +9803,7 @@
           <a:bodyPr wrap="square" lIns="0" tIns="0" rIns="0" bIns="0" rtlCol="0" anchor="ctr"/>
           <a:lstStyle/>
           <a:p>
-            <a:pPr algn="ctr" indent="0" marL="0">
+            <a:pPr marL="0" indent="0" algn="ctr">
               <a:buNone/>
             </a:pPr>
             <a:r>
@@ -10015,7 +9842,7 @@
           <a:bodyPr wrap="square" lIns="0" tIns="0" rIns="0" bIns="0" rtlCol="0" anchor="ctr"/>
           <a:lstStyle/>
           <a:p>
-            <a:pPr indent="0" marL="0">
+            <a:pPr marL="0" indent="0">
               <a:buNone/>
             </a:pPr>
             <a:r>
@@ -10054,7 +9881,7 @@
           <a:bodyPr wrap="square" lIns="0" tIns="0" rIns="0" bIns="0" rtlCol="0" anchor="ctr"/>
           <a:lstStyle/>
           <a:p>
-            <a:pPr indent="0" marL="0">
+            <a:pPr marL="0" indent="0">
               <a:buNone/>
             </a:pPr>
             <a:r>
@@ -10143,7 +9970,7 @@
           <a:bodyPr wrap="square" lIns="0" tIns="0" rIns="0" bIns="0" rtlCol="0" anchor="ctr"/>
           <a:lstStyle/>
           <a:p>
-            <a:pPr algn="ctr" indent="0" marL="0">
+            <a:pPr marL="0" indent="0" algn="ctr">
               <a:buNone/>
             </a:pPr>
             <a:r>
@@ -10182,7 +10009,7 @@
           <a:bodyPr wrap="square" lIns="0" tIns="0" rIns="0" bIns="0" rtlCol="0" anchor="ctr"/>
           <a:lstStyle/>
           <a:p>
-            <a:pPr indent="0" marL="0">
+            <a:pPr marL="0" indent="0">
               <a:buNone/>
             </a:pPr>
             <a:r>
@@ -10221,7 +10048,7 @@
           <a:bodyPr wrap="square" lIns="0" tIns="0" rIns="0" bIns="0" rtlCol="0" anchor="ctr"/>
           <a:lstStyle/>
           <a:p>
-            <a:pPr indent="0" marL="0">
+            <a:pPr marL="0" indent="0">
               <a:buNone/>
             </a:pPr>
             <a:r>
@@ -10310,7 +10137,7 @@
           <a:bodyPr wrap="square" lIns="0" tIns="0" rIns="0" bIns="0" rtlCol="0" anchor="ctr"/>
           <a:lstStyle/>
           <a:p>
-            <a:pPr algn="ctr" indent="0" marL="0">
+            <a:pPr marL="0" indent="0" algn="ctr">
               <a:buNone/>
             </a:pPr>
             <a:r>
@@ -10349,7 +10176,7 @@
           <a:bodyPr wrap="square" lIns="0" tIns="0" rIns="0" bIns="0" rtlCol="0" anchor="ctr"/>
           <a:lstStyle/>
           <a:p>
-            <a:pPr indent="0" marL="0">
+            <a:pPr marL="0" indent="0">
               <a:buNone/>
             </a:pPr>
             <a:r>
@@ -10388,7 +10215,7 @@
           <a:bodyPr wrap="square" lIns="0" tIns="0" rIns="0" bIns="0" rtlCol="0" anchor="ctr"/>
           <a:lstStyle/>
           <a:p>
-            <a:pPr indent="0" marL="0">
+            <a:pPr marL="0" indent="0">
               <a:buNone/>
             </a:pPr>
             <a:r>
@@ -10477,7 +10304,7 @@
           <a:bodyPr wrap="square" lIns="0" tIns="0" rIns="0" bIns="0" rtlCol="0" anchor="ctr"/>
           <a:lstStyle/>
           <a:p>
-            <a:pPr algn="ctr" indent="0" marL="0">
+            <a:pPr marL="0" indent="0" algn="ctr">
               <a:buNone/>
             </a:pPr>
             <a:r>
@@ -10516,7 +10343,7 @@
           <a:bodyPr wrap="square" lIns="0" tIns="0" rIns="0" bIns="0" rtlCol="0" anchor="ctr"/>
           <a:lstStyle/>
           <a:p>
-            <a:pPr indent="0" marL="0">
+            <a:pPr marL="0" indent="0">
               <a:buNone/>
             </a:pPr>
             <a:r>
@@ -10555,7 +10382,7 @@
           <a:bodyPr wrap="square" lIns="0" tIns="0" rIns="0" bIns="0" rtlCol="0" anchor="ctr"/>
           <a:lstStyle/>
           <a:p>
-            <a:pPr indent="0" marL="0">
+            <a:pPr marL="0" indent="0">
               <a:buNone/>
             </a:pPr>
             <a:r>
@@ -10644,7 +10471,7 @@
           <a:bodyPr wrap="square" lIns="0" tIns="0" rIns="0" bIns="0" rtlCol="0" anchor="ctr"/>
           <a:lstStyle/>
           <a:p>
-            <a:pPr algn="ctr" indent="0" marL="0">
+            <a:pPr marL="0" indent="0" algn="ctr">
               <a:buNone/>
             </a:pPr>
             <a:r>
@@ -10683,7 +10510,7 @@
           <a:bodyPr wrap="square" lIns="0" tIns="0" rIns="0" bIns="0" rtlCol="0" anchor="ctr"/>
           <a:lstStyle/>
           <a:p>
-            <a:pPr indent="0" marL="0">
+            <a:pPr marL="0" indent="0">
               <a:buNone/>
             </a:pPr>
             <a:r>
@@ -10722,7 +10549,7 @@
           <a:bodyPr wrap="square" lIns="0" tIns="0" rIns="0" bIns="0" rtlCol="0" anchor="ctr"/>
           <a:lstStyle/>
           <a:p>
-            <a:pPr indent="0" marL="0">
+            <a:pPr marL="0" indent="0">
               <a:buNone/>
             </a:pPr>
             <a:r>
@@ -10756,6 +10583,7 @@
         <a:solidFill>
           <a:srgbClr val="F7FAFC"/>
         </a:solidFill>
+        <a:effectLst/>
       </p:bgPr>
     </p:bg>
     <p:spTree>
@@ -10818,7 +10646,7 @@
           <a:bodyPr wrap="square" lIns="0" tIns="0" rIns="0" bIns="0" rtlCol="0" anchor="ctr"/>
           <a:lstStyle/>
           <a:p>
-            <a:pPr indent="0" marL="0">
+            <a:pPr marL="0" indent="0">
               <a:buNone/>
             </a:pPr>
             <a:r>
@@ -10857,7 +10685,7 @@
           <a:bodyPr wrap="square" lIns="0" tIns="0" rIns="0" bIns="0" rtlCol="0" anchor="ctr"/>
           <a:lstStyle/>
           <a:p>
-            <a:pPr indent="0" marL="0">
+            <a:pPr marL="0" indent="0">
               <a:buNone/>
             </a:pPr>
             <a:r>
@@ -10921,7 +10749,7 @@
           <a:bodyPr wrap="square" lIns="0" tIns="0" rIns="0" bIns="0" rtlCol="0" anchor="ctr"/>
           <a:lstStyle/>
           <a:p>
-            <a:pPr indent="0" marL="0">
+            <a:pPr marL="0" indent="0">
               <a:buNone/>
             </a:pPr>
             <a:r>
@@ -10960,7 +10788,7 @@
           <a:bodyPr wrap="square" lIns="0" tIns="0" rIns="0" bIns="0" rtlCol="0" anchor="ctr"/>
           <a:lstStyle/>
           <a:p>
-            <a:pPr indent="0" marL="0">
+            <a:pPr marL="0" indent="0">
               <a:buNone/>
             </a:pPr>
             <a:r>
@@ -11002,7 +10830,7 @@
             <a:prstDash val="solid"/>
           </a:ln>
           <a:effectLst>
-            <a:outerShdw sx="100000" sy="100000" kx="0" ky="0" algn="bl" rotWithShape="0" blurRad="101600" dist="25400" dir="8100000">
+            <a:outerShdw blurRad="101600" dist="25400" dir="8100000" algn="bl" rotWithShape="0">
               <a:srgbClr val="000000">
                 <a:alpha val="12000"/>
               </a:srgbClr>
@@ -11031,7 +10859,7 @@
           <a:bodyPr wrap="square" rtlCol="0" anchor="ctr"/>
           <a:lstStyle/>
           <a:p>
-            <a:pPr algn="ctr" indent="0" marL="0">
+            <a:pPr marL="0" indent="0" algn="ctr">
               <a:buNone/>
             </a:pPr>
             <a:r>
@@ -11048,7 +10876,7 @@
             <a:endParaRPr lang="en-US" sz="1200" dirty="0"/>
           </a:p>
           <a:p>
-            <a:pPr algn="ctr" indent="0" marL="0">
+            <a:pPr marL="0" indent="0" algn="ctr">
               <a:buNone/>
             </a:pPr>
             <a:r>
@@ -11090,7 +10918,7 @@
             <a:prstDash val="solid"/>
           </a:ln>
           <a:effectLst>
-            <a:outerShdw sx="100000" sy="100000" kx="0" ky="0" algn="bl" rotWithShape="0" blurRad="101600" dist="25400" dir="8100000">
+            <a:outerShdw blurRad="101600" dist="25400" dir="8100000" algn="bl" rotWithShape="0">
               <a:srgbClr val="000000">
                 <a:alpha val="12000"/>
               </a:srgbClr>
@@ -11144,7 +10972,7 @@
           <a:bodyPr wrap="square" lIns="0" tIns="0" rIns="0" bIns="0" rtlCol="0" anchor="ctr"/>
           <a:lstStyle/>
           <a:p>
-            <a:pPr algn="ctr" indent="0" marL="0">
+            <a:pPr marL="0" indent="0" algn="ctr">
               <a:buNone/>
             </a:pPr>
             <a:r>
@@ -11161,7 +10989,7 @@
             <a:endParaRPr lang="en-US" sz="1100" dirty="0"/>
           </a:p>
           <a:p>
-            <a:pPr algn="ctr" indent="0" marL="0">
+            <a:pPr marL="0" indent="0" algn="ctr">
               <a:buNone/>
             </a:pPr>
             <a:r>
@@ -11200,7 +11028,7 @@
           <a:bodyPr wrap="square" lIns="0" tIns="0" rIns="0" bIns="0" rtlCol="0" anchor="t"/>
           <a:lstStyle/>
           <a:p>
-            <a:pPr indent="0" marL="0">
+            <a:pPr marL="0" indent="0">
               <a:buNone/>
             </a:pPr>
             <a:r>
@@ -11242,7 +11070,7 @@
             <a:prstDash val="solid"/>
           </a:ln>
           <a:effectLst>
-            <a:outerShdw sx="100000" sy="100000" kx="0" ky="0" algn="bl" rotWithShape="0" blurRad="101600" dist="25400" dir="8100000">
+            <a:outerShdw blurRad="101600" dist="25400" dir="8100000" algn="bl" rotWithShape="0">
               <a:srgbClr val="000000">
                 <a:alpha val="12000"/>
               </a:srgbClr>
@@ -11296,7 +11124,7 @@
           <a:bodyPr wrap="square" lIns="0" tIns="0" rIns="0" bIns="0" rtlCol="0" anchor="ctr"/>
           <a:lstStyle/>
           <a:p>
-            <a:pPr algn="ctr" indent="0" marL="0">
+            <a:pPr marL="0" indent="0" algn="ctr">
               <a:buNone/>
             </a:pPr>
             <a:r>
@@ -11313,7 +11141,7 @@
             <a:endParaRPr lang="en-US" sz="1100" dirty="0"/>
           </a:p>
           <a:p>
-            <a:pPr algn="ctr" indent="0" marL="0">
+            <a:pPr marL="0" indent="0" algn="ctr">
               <a:buNone/>
             </a:pPr>
             <a:r>
@@ -11352,7 +11180,7 @@
           <a:bodyPr wrap="square" lIns="0" tIns="0" rIns="0" bIns="0" rtlCol="0" anchor="t"/>
           <a:lstStyle/>
           <a:p>
-            <a:pPr indent="0" marL="0">
+            <a:pPr marL="0" indent="0">
               <a:buNone/>
             </a:pPr>
             <a:r>
@@ -11394,7 +11222,7 @@
             <a:prstDash val="solid"/>
           </a:ln>
           <a:effectLst>
-            <a:outerShdw sx="100000" sy="100000" kx="0" ky="0" algn="bl" rotWithShape="0" blurRad="101600" dist="25400" dir="8100000">
+            <a:outerShdw blurRad="101600" dist="25400" dir="8100000" algn="bl" rotWithShape="0">
               <a:srgbClr val="000000">
                 <a:alpha val="12000"/>
               </a:srgbClr>
@@ -11448,7 +11276,7 @@
           <a:bodyPr wrap="square" lIns="0" tIns="0" rIns="0" bIns="0" rtlCol="0" anchor="ctr"/>
           <a:lstStyle/>
           <a:p>
-            <a:pPr algn="ctr" indent="0" marL="0">
+            <a:pPr marL="0" indent="0" algn="ctr">
               <a:buNone/>
             </a:pPr>
             <a:r>
@@ -11465,7 +11293,7 @@
             <a:endParaRPr lang="en-US" sz="1100" dirty="0"/>
           </a:p>
           <a:p>
-            <a:pPr algn="ctr" indent="0" marL="0">
+            <a:pPr marL="0" indent="0" algn="ctr">
               <a:buNone/>
             </a:pPr>
             <a:r>
@@ -11504,7 +11332,7 @@
           <a:bodyPr wrap="square" lIns="0" tIns="0" rIns="0" bIns="0" rtlCol="0" anchor="t"/>
           <a:lstStyle/>
           <a:p>
-            <a:pPr indent="0" marL="0">
+            <a:pPr marL="0" indent="0">
               <a:buNone/>
             </a:pPr>
             <a:r>
@@ -11546,7 +11374,7 @@
             <a:prstDash val="solid"/>
           </a:ln>
           <a:effectLst>
-            <a:outerShdw sx="100000" sy="100000" kx="0" ky="0" algn="bl" rotWithShape="0" blurRad="101600" dist="25400" dir="8100000">
+            <a:outerShdw blurRad="101600" dist="25400" dir="8100000" algn="bl" rotWithShape="0">
               <a:srgbClr val="000000">
                 <a:alpha val="12000"/>
               </a:srgbClr>
@@ -11600,7 +11428,7 @@
           <a:bodyPr wrap="square" lIns="0" tIns="0" rIns="0" bIns="0" rtlCol="0" anchor="ctr"/>
           <a:lstStyle/>
           <a:p>
-            <a:pPr algn="ctr" indent="0" marL="0">
+            <a:pPr marL="0" indent="0" algn="ctr">
               <a:buNone/>
             </a:pPr>
             <a:r>
@@ -11617,7 +11445,7 @@
             <a:endParaRPr lang="en-US" sz="1100" dirty="0"/>
           </a:p>
           <a:p>
-            <a:pPr algn="ctr" indent="0" marL="0">
+            <a:pPr marL="0" indent="0" algn="ctr">
               <a:buNone/>
             </a:pPr>
             <a:r>
@@ -11656,7 +11484,7 @@
           <a:bodyPr wrap="square" lIns="0" tIns="0" rIns="0" bIns="0" rtlCol="0" anchor="t"/>
           <a:lstStyle/>
           <a:p>
-            <a:pPr indent="0" marL="0">
+            <a:pPr marL="0" indent="0">
               <a:buNone/>
             </a:pPr>
             <a:r>
@@ -11698,7 +11526,7 @@
             <a:prstDash val="solid"/>
           </a:ln>
           <a:effectLst>
-            <a:outerShdw sx="100000" sy="100000" kx="0" ky="0" algn="bl" rotWithShape="0" blurRad="101600" dist="25400" dir="8100000">
+            <a:outerShdw blurRad="101600" dist="25400" dir="8100000" algn="bl" rotWithShape="0">
               <a:srgbClr val="000000">
                 <a:alpha val="12000"/>
               </a:srgbClr>
@@ -11752,7 +11580,7 @@
           <a:bodyPr wrap="square" lIns="0" tIns="0" rIns="0" bIns="0" rtlCol="0" anchor="ctr"/>
           <a:lstStyle/>
           <a:p>
-            <a:pPr algn="ctr" indent="0" marL="0">
+            <a:pPr marL="0" indent="0" algn="ctr">
               <a:buNone/>
             </a:pPr>
             <a:r>
@@ -11769,7 +11597,7 @@
             <a:endParaRPr lang="en-US" sz="1100" dirty="0"/>
           </a:p>
           <a:p>
-            <a:pPr algn="ctr" indent="0" marL="0">
+            <a:pPr marL="0" indent="0" algn="ctr">
               <a:buNone/>
             </a:pPr>
             <a:r>
@@ -11808,7 +11636,7 @@
           <a:bodyPr wrap="square" lIns="0" tIns="0" rIns="0" bIns="0" rtlCol="0" anchor="t"/>
           <a:lstStyle/>
           <a:p>
-            <a:pPr indent="0" marL="0">
+            <a:pPr marL="0" indent="0">
               <a:buNone/>
             </a:pPr>
             <a:r>
@@ -11850,7 +11678,7 @@
             <a:prstDash val="solid"/>
           </a:ln>
           <a:effectLst>
-            <a:outerShdw sx="100000" sy="100000" kx="0" ky="0" algn="bl" rotWithShape="0" blurRad="101600" dist="25400" dir="8100000">
+            <a:outerShdw blurRad="101600" dist="25400" dir="8100000" algn="bl" rotWithShape="0">
               <a:srgbClr val="000000">
                 <a:alpha val="12000"/>
               </a:srgbClr>
@@ -11904,7 +11732,7 @@
           <a:bodyPr wrap="square" lIns="0" tIns="0" rIns="0" bIns="0" rtlCol="0" anchor="ctr"/>
           <a:lstStyle/>
           <a:p>
-            <a:pPr algn="ctr" indent="0" marL="0">
+            <a:pPr marL="0" indent="0" algn="ctr">
               <a:buNone/>
             </a:pPr>
             <a:r>
@@ -11921,7 +11749,7 @@
             <a:endParaRPr lang="en-US" sz="1100" dirty="0"/>
           </a:p>
           <a:p>
-            <a:pPr algn="ctr" indent="0" marL="0">
+            <a:pPr marL="0" indent="0" algn="ctr">
               <a:buNone/>
             </a:pPr>
             <a:r>
@@ -11960,7 +11788,7 @@
           <a:bodyPr wrap="square" lIns="0" tIns="0" rIns="0" bIns="0" rtlCol="0" anchor="t"/>
           <a:lstStyle/>
           <a:p>
-            <a:pPr indent="0" marL="0">
+            <a:pPr marL="0" indent="0">
               <a:buNone/>
             </a:pPr>
             <a:r>
@@ -12137,7 +11965,7 @@
           <a:bodyPr wrap="square" rtlCol="0" anchor="ctr"/>
           <a:lstStyle/>
           <a:p>
-            <a:pPr algn="ctr" indent="0" marL="0">
+            <a:pPr marL="0" indent="0" algn="ctr">
               <a:buNone/>
             </a:pPr>
             <a:r>
@@ -12171,6 +11999,7 @@
         <a:solidFill>
           <a:srgbClr val="1B2A4A"/>
         </a:solidFill>
+        <a:effectLst/>
       </p:bgPr>
     </p:bg>
     <p:spTree>
@@ -12258,11 +12087,11 @@
           <a:bodyPr wrap="square" rtlCol="0" anchor="ctr"/>
           <a:lstStyle/>
           <a:p>
-            <a:pPr indent="0" marL="0">
-              <a:buNone/>
-            </a:pPr>
-            <a:r>
-              <a:rPr lang="en-US" sz="2800" b="1" spc="200" kern="0" dirty="0">
+            <a:pPr marL="0" indent="0">
+              <a:buNone/>
+            </a:pPr>
+            <a:r>
+              <a:rPr lang="en-US" sz="2800" b="1" kern="0" spc="200" dirty="0">
                 <a:solidFill>
                   <a:srgbClr val="FFFFFF"/>
                 </a:solidFill>
@@ -12297,7 +12126,7 @@
           <a:bodyPr wrap="square" rtlCol="0" anchor="ctr"/>
           <a:lstStyle/>
           <a:p>
-            <a:pPr indent="0" marL="0">
+            <a:pPr marL="0" indent="0">
               <a:buNone/>
             </a:pPr>
             <a:r>
@@ -12386,7 +12215,7 @@
           <a:bodyPr wrap="square" lIns="0" tIns="0" rIns="0" bIns="0" rtlCol="0" anchor="ctr"/>
           <a:lstStyle/>
           <a:p>
-            <a:pPr indent="0" marL="0">
+            <a:pPr marL="0" indent="0">
               <a:buNone/>
             </a:pPr>
             <a:r>
@@ -12425,7 +12254,7 @@
           <a:bodyPr wrap="square" lIns="0" tIns="0" rIns="0" bIns="0" rtlCol="0" anchor="t"/>
           <a:lstStyle/>
           <a:p>
-            <a:pPr indent="0" marL="0">
+            <a:pPr marL="0" indent="0">
               <a:buNone/>
             </a:pPr>
             <a:r>
@@ -12514,7 +12343,7 @@
           <a:bodyPr wrap="square" lIns="0" tIns="0" rIns="0" bIns="0" rtlCol="0" anchor="ctr"/>
           <a:lstStyle/>
           <a:p>
-            <a:pPr indent="0" marL="0">
+            <a:pPr marL="0" indent="0">
               <a:buNone/>
             </a:pPr>
             <a:r>
@@ -12553,7 +12382,7 @@
           <a:bodyPr wrap="square" lIns="0" tIns="0" rIns="0" bIns="0" rtlCol="0" anchor="t"/>
           <a:lstStyle/>
           <a:p>
-            <a:pPr indent="0" marL="0">
+            <a:pPr marL="0" indent="0">
               <a:buNone/>
             </a:pPr>
             <a:r>
@@ -12642,7 +12471,7 @@
           <a:bodyPr wrap="square" lIns="0" tIns="0" rIns="0" bIns="0" rtlCol="0" anchor="ctr"/>
           <a:lstStyle/>
           <a:p>
-            <a:pPr indent="0" marL="0">
+            <a:pPr marL="0" indent="0">
               <a:buNone/>
             </a:pPr>
             <a:r>
@@ -12681,7 +12510,7 @@
           <a:bodyPr wrap="square" lIns="0" tIns="0" rIns="0" bIns="0" rtlCol="0" anchor="t"/>
           <a:lstStyle/>
           <a:p>
-            <a:pPr indent="0" marL="0">
+            <a:pPr marL="0" indent="0">
               <a:buNone/>
             </a:pPr>
             <a:r>
@@ -12747,7 +12576,7 @@
           <a:bodyPr wrap="square" rtlCol="0" anchor="ctr"/>
           <a:lstStyle/>
           <a:p>
-            <a:pPr indent="0" marL="0">
+            <a:pPr marL="0" indent="0">
               <a:buNone/>
             </a:pPr>
             <a:r>
@@ -12781,6 +12610,7 @@
         <a:solidFill>
           <a:srgbClr val="F7FAFC"/>
         </a:solidFill>
+        <a:effectLst/>
       </p:bgPr>
     </p:bg>
     <p:spTree>
@@ -12843,7 +12673,7 @@
           <a:bodyPr wrap="square" lIns="0" tIns="0" rIns="0" bIns="0" rtlCol="0" anchor="ctr"/>
           <a:lstStyle/>
           <a:p>
-            <a:pPr indent="0" marL="0">
+            <a:pPr marL="0" indent="0">
               <a:buNone/>
             </a:pPr>
             <a:r>
@@ -12882,7 +12712,7 @@
           <a:bodyPr wrap="square" lIns="0" tIns="0" rIns="0" bIns="0" rtlCol="0" anchor="ctr"/>
           <a:lstStyle/>
           <a:p>
-            <a:pPr indent="0" marL="0">
+            <a:pPr marL="0" indent="0">
               <a:buNone/>
             </a:pPr>
             <a:r>
@@ -12946,7 +12776,7 @@
           <a:bodyPr wrap="square" lIns="0" tIns="0" rIns="0" bIns="0" rtlCol="0" anchor="ctr"/>
           <a:lstStyle/>
           <a:p>
-            <a:pPr indent="0" marL="0">
+            <a:pPr marL="0" indent="0">
               <a:buNone/>
             </a:pPr>
             <a:r>
@@ -12985,7 +12815,7 @@
           <a:bodyPr wrap="square" lIns="0" tIns="0" rIns="0" bIns="0" rtlCol="0" anchor="ctr"/>
           <a:lstStyle/>
           <a:p>
-            <a:pPr indent="0" marL="0">
+            <a:pPr marL="0" indent="0">
               <a:buNone/>
             </a:pPr>
             <a:r>
@@ -13027,7 +12857,7 @@
             <a:prstDash val="solid"/>
           </a:ln>
           <a:effectLst>
-            <a:outerShdw sx="100000" sy="100000" kx="0" ky="0" algn="bl" rotWithShape="0" blurRad="101600" dist="25400" dir="8100000">
+            <a:outerShdw blurRad="101600" dist="25400" dir="8100000" algn="bl" rotWithShape="0">
               <a:srgbClr val="000000">
                 <a:alpha val="12000"/>
               </a:srgbClr>
@@ -13081,7 +12911,7 @@
           <a:bodyPr wrap="square" lIns="0" tIns="0" rIns="0" bIns="0" rtlCol="0" anchor="ctr"/>
           <a:lstStyle/>
           <a:p>
-            <a:pPr indent="0" marL="0">
+            <a:pPr marL="0" indent="0">
               <a:buNone/>
             </a:pPr>
             <a:r>
@@ -13120,7 +12950,7 @@
           <a:bodyPr wrap="square" lIns="0" tIns="0" rIns="0" bIns="0" rtlCol="0" anchor="t"/>
           <a:lstStyle/>
           <a:p>
-            <a:pPr indent="0" marL="0">
+            <a:pPr marL="0" indent="0">
               <a:buNone/>
             </a:pPr>
             <a:r>
@@ -13162,7 +12992,7 @@
             <a:prstDash val="solid"/>
           </a:ln>
           <a:effectLst>
-            <a:outerShdw sx="100000" sy="100000" kx="0" ky="0" algn="bl" rotWithShape="0" blurRad="101600" dist="25400" dir="8100000">
+            <a:outerShdw blurRad="101600" dist="25400" dir="8100000" algn="bl" rotWithShape="0">
               <a:srgbClr val="000000">
                 <a:alpha val="12000"/>
               </a:srgbClr>
@@ -13216,7 +13046,7 @@
           <a:bodyPr wrap="square" lIns="0" tIns="0" rIns="0" bIns="0" rtlCol="0" anchor="ctr"/>
           <a:lstStyle/>
           <a:p>
-            <a:pPr indent="0" marL="0">
+            <a:pPr marL="0" indent="0">
               <a:buNone/>
             </a:pPr>
             <a:r>
@@ -13255,7 +13085,7 @@
           <a:bodyPr wrap="square" lIns="0" tIns="0" rIns="0" bIns="0" rtlCol="0" anchor="t"/>
           <a:lstStyle/>
           <a:p>
-            <a:pPr indent="0" marL="0">
+            <a:pPr marL="0" indent="0">
               <a:buNone/>
             </a:pPr>
             <a:r>
@@ -13294,7 +13124,7 @@
           <a:bodyPr wrap="square" lIns="0" tIns="0" rIns="0" bIns="0" rtlCol="0" anchor="ctr"/>
           <a:lstStyle/>
           <a:p>
-            <a:pPr indent="0" marL="0">
+            <a:pPr marL="0" indent="0">
               <a:buNone/>
             </a:pPr>
             <a:r>
@@ -13314,7 +13144,7 @@
       </p:sp>
       <p:graphicFrame>
         <p:nvGraphicFramePr>
-          <p:cNvPr id="3" name="Table 0"/>
+          <p:cNvPr id="17" name="Table 0"/>
           <p:cNvGraphicFramePr>
             <a:graphicFrameLocks noGrp="1"/>
           </p:cNvGraphicFramePr>
@@ -13328,17 +13158,41 @@
         </p:nvGraphicFramePr>
         <p:xfrm>
           <a:off x="182880" y="3017520"/>
-          <a:ext cx="8732520" cy="1691640"/>
+          <a:ext cx="8869680" cy="1578864"/>
         </p:xfrm>
         <a:graphic>
           <a:graphicData uri="http://schemas.openxmlformats.org/drawingml/2006/table">
             <a:tbl>
               <a:tblPr/>
               <a:tblGrid>
-                <a:gridCol w="2926080"/>
-                <a:gridCol w="1828800"/>
-                <a:gridCol w="2286000"/>
-                <a:gridCol w="1828800"/>
+                <a:gridCol w="2926080">
+                  <a:extLst>
+                    <a:ext uri="{9D8B030D-6E8A-4147-A177-3AD203B41FA5}">
+                      <a16:colId xmlns:a16="http://schemas.microsoft.com/office/drawing/2014/main" val="20000"/>
+                    </a:ext>
+                  </a:extLst>
+                </a:gridCol>
+                <a:gridCol w="1828800">
+                  <a:extLst>
+                    <a:ext uri="{9D8B030D-6E8A-4147-A177-3AD203B41FA5}">
+                      <a16:colId xmlns:a16="http://schemas.microsoft.com/office/drawing/2014/main" val="20001"/>
+                    </a:ext>
+                  </a:extLst>
+                </a:gridCol>
+                <a:gridCol w="2286000">
+                  <a:extLst>
+                    <a:ext uri="{9D8B030D-6E8A-4147-A177-3AD203B41FA5}">
+                      <a16:colId xmlns:a16="http://schemas.microsoft.com/office/drawing/2014/main" val="20002"/>
+                    </a:ext>
+                  </a:extLst>
+                </a:gridCol>
+                <a:gridCol w="1828800">
+                  <a:extLst>
+                    <a:ext uri="{9D8B030D-6E8A-4147-A177-3AD203B41FA5}">
+                      <a16:colId xmlns:a16="http://schemas.microsoft.com/office/drawing/2014/main" val="20003"/>
+                    </a:ext>
+                  </a:extLst>
+                </a:gridCol>
               </a:tblGrid>
               <a:tr h="384048">
                 <a:tc>
@@ -13346,7 +13200,7 @@
                     <a:bodyPr/>
                     <a:lstStyle/>
                     <a:p>
-                      <a:pPr indent="0" marL="0">
+                      <a:pPr marL="0" indent="0">
                         <a:buNone/>
                       </a:pPr>
                       <a:r>
@@ -13367,7 +13221,7 @@
                       </a:endParaRPr>
                     </a:p>
                   </a:txBody>
-                  <a:tcPr marL="91440" marR="91440" marT="45720" marB="45720">
+                  <a:tcPr>
                     <a:lnL w="12700" cap="flat" cmpd="sng" algn="ctr">
                       <a:solidFill>
                         <a:srgbClr val="CCCCCC"/>
@@ -13414,7 +13268,7 @@
                     <a:bodyPr/>
                     <a:lstStyle/>
                     <a:p>
-                      <a:pPr indent="0" marL="0">
+                      <a:pPr marL="0" indent="0">
                         <a:buNone/>
                       </a:pPr>
                       <a:r>
@@ -13435,7 +13289,7 @@
                       </a:endParaRPr>
                     </a:p>
                   </a:txBody>
-                  <a:tcPr marL="91440" marR="91440" marT="45720" marB="45720">
+                  <a:tcPr>
                     <a:lnL w="12700" cap="flat" cmpd="sng" algn="ctr">
                       <a:solidFill>
                         <a:srgbClr val="CCCCCC"/>
@@ -13482,7 +13336,7 @@
                     <a:bodyPr/>
                     <a:lstStyle/>
                     <a:p>
-                      <a:pPr indent="0" marL="0">
+                      <a:pPr marL="0" indent="0">
                         <a:buNone/>
                       </a:pPr>
                       <a:r>
@@ -13503,7 +13357,7 @@
                       </a:endParaRPr>
                     </a:p>
                   </a:txBody>
-                  <a:tcPr marL="91440" marR="91440" marT="45720" marB="45720">
+                  <a:tcPr>
                     <a:lnL w="12700" cap="flat" cmpd="sng" algn="ctr">
                       <a:solidFill>
                         <a:srgbClr val="CCCCCC"/>
@@ -13550,7 +13404,7 @@
                     <a:bodyPr/>
                     <a:lstStyle/>
                     <a:p>
-                      <a:pPr indent="0" marL="0">
+                      <a:pPr marL="0" indent="0">
                         <a:buNone/>
                       </a:pPr>
                       <a:r>
@@ -13571,7 +13425,7 @@
                       </a:endParaRPr>
                     </a:p>
                   </a:txBody>
-                  <a:tcPr marL="91440" marR="91440" marT="45720" marB="45720">
+                  <a:tcPr>
                     <a:lnL w="12700" cap="flat" cmpd="sng" algn="ctr">
                       <a:solidFill>
                         <a:srgbClr val="CCCCCC"/>
@@ -13613,6 +13467,11 @@
                     </a:solidFill>
                   </a:tcPr>
                 </a:tc>
+                <a:extLst>
+                  <a:ext uri="{0D108BD9-81ED-4DB2-BD59-A6C34878D82A}">
+                    <a16:rowId xmlns:a16="http://schemas.microsoft.com/office/drawing/2014/main" val="10000"/>
+                  </a:ext>
+                </a:extLst>
               </a:tr>
               <a:tr h="384048">
                 <a:tc>
@@ -13620,7 +13479,7 @@
                     <a:bodyPr/>
                     <a:lstStyle/>
                     <a:p>
-                      <a:pPr indent="0" marL="0">
+                      <a:pPr marL="0" indent="0">
                         <a:buNone/>
                       </a:pPr>
                       <a:r>
@@ -13641,7 +13500,7 @@
                       </a:endParaRPr>
                     </a:p>
                   </a:txBody>
-                  <a:tcPr marL="91440" marR="91440" marT="45720" marB="45720">
+                  <a:tcPr>
                     <a:lnL w="12700" cap="flat" cmpd="sng" algn="ctr">
                       <a:solidFill>
                         <a:srgbClr val="CCCCCC"/>
@@ -13688,7 +13547,7 @@
                     <a:bodyPr/>
                     <a:lstStyle/>
                     <a:p>
-                      <a:pPr indent="0" marL="0">
+                      <a:pPr marL="0" indent="0">
                         <a:buNone/>
                       </a:pPr>
                       <a:r>
@@ -13709,7 +13568,7 @@
                       </a:endParaRPr>
                     </a:p>
                   </a:txBody>
-                  <a:tcPr marL="91440" marR="91440" marT="45720" marB="45720">
+                  <a:tcPr>
                     <a:lnL w="12700" cap="flat" cmpd="sng" algn="ctr">
                       <a:solidFill>
                         <a:srgbClr val="CCCCCC"/>
@@ -13756,7 +13615,7 @@
                     <a:bodyPr/>
                     <a:lstStyle/>
                     <a:p>
-                      <a:pPr indent="0" marL="0">
+                      <a:pPr marL="0" indent="0">
                         <a:buNone/>
                       </a:pPr>
                       <a:r>
@@ -13777,7 +13636,7 @@
                       </a:endParaRPr>
                     </a:p>
                   </a:txBody>
-                  <a:tcPr marL="91440" marR="91440" marT="45720" marB="45720">
+                  <a:tcPr>
                     <a:lnL w="12700" cap="flat" cmpd="sng" algn="ctr">
                       <a:solidFill>
                         <a:srgbClr val="CCCCCC"/>
@@ -13824,7 +13683,7 @@
                     <a:bodyPr/>
                     <a:lstStyle/>
                     <a:p>
-                      <a:pPr indent="0" marL="0">
+                      <a:pPr marL="0" indent="0">
                         <a:buNone/>
                       </a:pPr>
                       <a:r>
@@ -13845,7 +13704,7 @@
                       </a:endParaRPr>
                     </a:p>
                   </a:txBody>
-                  <a:tcPr marL="91440" marR="91440" marT="45720" marB="45720">
+                  <a:tcPr>
                     <a:lnL w="12700" cap="flat" cmpd="sng" algn="ctr">
                       <a:solidFill>
                         <a:srgbClr val="CCCCCC"/>
@@ -13887,6 +13746,11 @@
                     </a:solidFill>
                   </a:tcPr>
                 </a:tc>
+                <a:extLst>
+                  <a:ext uri="{0D108BD9-81ED-4DB2-BD59-A6C34878D82A}">
+                    <a16:rowId xmlns:a16="http://schemas.microsoft.com/office/drawing/2014/main" val="10001"/>
+                  </a:ext>
+                </a:extLst>
               </a:tr>
               <a:tr h="384048">
                 <a:tc>
@@ -13894,7 +13758,7 @@
                     <a:bodyPr/>
                     <a:lstStyle/>
                     <a:p>
-                      <a:pPr indent="0" marL="0">
+                      <a:pPr marL="0" indent="0">
                         <a:buNone/>
                       </a:pPr>
                       <a:r>
@@ -13915,7 +13779,7 @@
                       </a:endParaRPr>
                     </a:p>
                   </a:txBody>
-                  <a:tcPr marL="91440" marR="91440" marT="45720" marB="45720">
+                  <a:tcPr>
                     <a:lnL w="12700" cap="flat" cmpd="sng" algn="ctr">
                       <a:solidFill>
                         <a:srgbClr val="CCCCCC"/>
@@ -13962,7 +13826,7 @@
                     <a:bodyPr/>
                     <a:lstStyle/>
                     <a:p>
-                      <a:pPr indent="0" marL="0">
+                      <a:pPr marL="0" indent="0">
                         <a:buNone/>
                       </a:pPr>
                       <a:r>
@@ -13983,7 +13847,7 @@
                       </a:endParaRPr>
                     </a:p>
                   </a:txBody>
-                  <a:tcPr marL="91440" marR="91440" marT="45720" marB="45720">
+                  <a:tcPr>
                     <a:lnL w="12700" cap="flat" cmpd="sng" algn="ctr">
                       <a:solidFill>
                         <a:srgbClr val="CCCCCC"/>
@@ -14030,7 +13894,7 @@
                     <a:bodyPr/>
                     <a:lstStyle/>
                     <a:p>
-                      <a:pPr indent="0" marL="0">
+                      <a:pPr marL="0" indent="0">
                         <a:buNone/>
                       </a:pPr>
                       <a:r>
@@ -14051,7 +13915,7 @@
                       </a:endParaRPr>
                     </a:p>
                   </a:txBody>
-                  <a:tcPr marL="91440" marR="91440" marT="45720" marB="45720">
+                  <a:tcPr>
                     <a:lnL w="12700" cap="flat" cmpd="sng" algn="ctr">
                       <a:solidFill>
                         <a:srgbClr val="CCCCCC"/>
@@ -14098,7 +13962,7 @@
                     <a:bodyPr/>
                     <a:lstStyle/>
                     <a:p>
-                      <a:pPr indent="0" marL="0">
+                      <a:pPr marL="0" indent="0">
                         <a:buNone/>
                       </a:pPr>
                       <a:r>
@@ -14119,7 +13983,7 @@
                       </a:endParaRPr>
                     </a:p>
                   </a:txBody>
-                  <a:tcPr marL="91440" marR="91440" marT="45720" marB="45720">
+                  <a:tcPr>
                     <a:lnL w="12700" cap="flat" cmpd="sng" algn="ctr">
                       <a:solidFill>
                         <a:srgbClr val="CCCCCC"/>
@@ -14161,6 +14025,11 @@
                     </a:solidFill>
                   </a:tcPr>
                 </a:tc>
+                <a:extLst>
+                  <a:ext uri="{0D108BD9-81ED-4DB2-BD59-A6C34878D82A}">
+                    <a16:rowId xmlns:a16="http://schemas.microsoft.com/office/drawing/2014/main" val="10002"/>
+                  </a:ext>
+                </a:extLst>
               </a:tr>
               <a:tr h="384048">
                 <a:tc>
@@ -14168,7 +14037,7 @@
                     <a:bodyPr/>
                     <a:lstStyle/>
                     <a:p>
-                      <a:pPr indent="0" marL="0">
+                      <a:pPr marL="0" indent="0">
                         <a:buNone/>
                       </a:pPr>
                       <a:r>
@@ -14189,7 +14058,7 @@
                       </a:endParaRPr>
                     </a:p>
                   </a:txBody>
-                  <a:tcPr marL="91440" marR="91440" marT="45720" marB="45720">
+                  <a:tcPr>
                     <a:lnL w="12700" cap="flat" cmpd="sng" algn="ctr">
                       <a:solidFill>
                         <a:srgbClr val="CCCCCC"/>
@@ -14236,7 +14105,7 @@
                     <a:bodyPr/>
                     <a:lstStyle/>
                     <a:p>
-                      <a:pPr indent="0" marL="0">
+                      <a:pPr marL="0" indent="0">
                         <a:buNone/>
                       </a:pPr>
                       <a:r>
@@ -14257,7 +14126,7 @@
                       </a:endParaRPr>
                     </a:p>
                   </a:txBody>
-                  <a:tcPr marL="91440" marR="91440" marT="45720" marB="45720">
+                  <a:tcPr>
                     <a:lnL w="12700" cap="flat" cmpd="sng" algn="ctr">
                       <a:solidFill>
                         <a:srgbClr val="CCCCCC"/>
@@ -14304,7 +14173,7 @@
                     <a:bodyPr/>
                     <a:lstStyle/>
                     <a:p>
-                      <a:pPr indent="0" marL="0">
+                      <a:pPr marL="0" indent="0">
                         <a:buNone/>
                       </a:pPr>
                       <a:r>
@@ -14325,7 +14194,7 @@
                       </a:endParaRPr>
                     </a:p>
                   </a:txBody>
-                  <a:tcPr marL="91440" marR="91440" marT="45720" marB="45720">
+                  <a:tcPr>
                     <a:lnL w="12700" cap="flat" cmpd="sng" algn="ctr">
                       <a:solidFill>
                         <a:srgbClr val="CCCCCC"/>
@@ -14372,7 +14241,7 @@
                     <a:bodyPr/>
                     <a:lstStyle/>
                     <a:p>
-                      <a:pPr indent="0" marL="0">
+                      <a:pPr marL="0" indent="0">
                         <a:buNone/>
                       </a:pPr>
                       <a:r>
@@ -14393,7 +14262,7 @@
                       </a:endParaRPr>
                     </a:p>
                   </a:txBody>
-                  <a:tcPr marL="91440" marR="91440" marT="45720" marB="45720">
+                  <a:tcPr>
                     <a:lnL w="12700" cap="flat" cmpd="sng" algn="ctr">
                       <a:solidFill>
                         <a:srgbClr val="CCCCCC"/>
@@ -14435,6 +14304,11 @@
                     </a:solidFill>
                   </a:tcPr>
                 </a:tc>
+                <a:extLst>
+                  <a:ext uri="{0D108BD9-81ED-4DB2-BD59-A6C34878D82A}">
+                    <a16:rowId xmlns:a16="http://schemas.microsoft.com/office/drawing/2014/main" val="10003"/>
+                  </a:ext>
+                </a:extLst>
               </a:tr>
             </a:tbl>
           </a:graphicData>
@@ -14456,6 +14330,7 @@
         <a:solidFill>
           <a:srgbClr val="F7FAFC"/>
         </a:solidFill>
+        <a:effectLst/>
       </p:bgPr>
     </p:bg>
     <p:spTree>
@@ -14518,7 +14393,7 @@
           <a:bodyPr wrap="square" lIns="0" tIns="0" rIns="0" bIns="0" rtlCol="0" anchor="ctr"/>
           <a:lstStyle/>
           <a:p>
-            <a:pPr indent="0" marL="0">
+            <a:pPr marL="0" indent="0">
               <a:buNone/>
             </a:pPr>
             <a:r>
@@ -14557,7 +14432,7 @@
           <a:bodyPr wrap="square" lIns="0" tIns="0" rIns="0" bIns="0" rtlCol="0" anchor="ctr"/>
           <a:lstStyle/>
           <a:p>
-            <a:pPr indent="0" marL="0">
+            <a:pPr marL="0" indent="0">
               <a:buNone/>
             </a:pPr>
             <a:r>
@@ -14621,7 +14496,7 @@
           <a:bodyPr wrap="square" lIns="0" tIns="0" rIns="0" bIns="0" rtlCol="0" anchor="ctr"/>
           <a:lstStyle/>
           <a:p>
-            <a:pPr indent="0" marL="0">
+            <a:pPr marL="0" indent="0">
               <a:buNone/>
             </a:pPr>
             <a:r>
@@ -14660,7 +14535,7 @@
           <a:bodyPr wrap="square" lIns="0" tIns="0" rIns="0" bIns="0" rtlCol="0" anchor="ctr"/>
           <a:lstStyle/>
           <a:p>
-            <a:pPr indent="0" marL="0">
+            <a:pPr marL="0" indent="0">
               <a:buNone/>
             </a:pPr>
             <a:r>
@@ -14702,7 +14577,7 @@
             <a:prstDash val="solid"/>
           </a:ln>
           <a:effectLst>
-            <a:outerShdw sx="100000" sy="100000" kx="0" ky="0" algn="bl" rotWithShape="0" blurRad="101600" dist="25400" dir="8100000">
+            <a:outerShdw blurRad="101600" dist="25400" dir="8100000" algn="bl" rotWithShape="0">
               <a:srgbClr val="000000">
                 <a:alpha val="12000"/>
               </a:srgbClr>
@@ -14731,7 +14606,7 @@
           <a:bodyPr wrap="square" lIns="0" tIns="0" rIns="0" bIns="0" rtlCol="0" anchor="ctr"/>
           <a:lstStyle/>
           <a:p>
-            <a:pPr algn="ctr" indent="0" marL="0">
+            <a:pPr marL="0" indent="0" algn="ctr">
               <a:buNone/>
             </a:pPr>
             <a:r>
@@ -14770,7 +14645,7 @@
           <a:bodyPr wrap="square" lIns="0" tIns="0" rIns="0" bIns="0" rtlCol="0" anchor="t"/>
           <a:lstStyle/>
           <a:p>
-            <a:pPr algn="ctr" indent="0" marL="0">
+            <a:pPr marL="0" indent="0" algn="ctr">
               <a:buNone/>
             </a:pPr>
             <a:r>
@@ -14812,7 +14687,7 @@
             <a:prstDash val="solid"/>
           </a:ln>
           <a:effectLst>
-            <a:outerShdw sx="100000" sy="100000" kx="0" ky="0" algn="bl" rotWithShape="0" blurRad="101600" dist="25400" dir="8100000">
+            <a:outerShdw blurRad="101600" dist="25400" dir="8100000" algn="bl" rotWithShape="0">
               <a:srgbClr val="000000">
                 <a:alpha val="12000"/>
               </a:srgbClr>
@@ -14841,7 +14716,7 @@
           <a:bodyPr wrap="square" lIns="0" tIns="0" rIns="0" bIns="0" rtlCol="0" anchor="ctr"/>
           <a:lstStyle/>
           <a:p>
-            <a:pPr algn="ctr" indent="0" marL="0">
+            <a:pPr marL="0" indent="0" algn="ctr">
               <a:buNone/>
             </a:pPr>
             <a:r>
@@ -14880,7 +14755,7 @@
           <a:bodyPr wrap="square" lIns="0" tIns="0" rIns="0" bIns="0" rtlCol="0" anchor="t"/>
           <a:lstStyle/>
           <a:p>
-            <a:pPr algn="ctr" indent="0" marL="0">
+            <a:pPr marL="0" indent="0" algn="ctr">
               <a:buNone/>
             </a:pPr>
             <a:r>
@@ -14922,7 +14797,7 @@
             <a:prstDash val="solid"/>
           </a:ln>
           <a:effectLst>
-            <a:outerShdw sx="100000" sy="100000" kx="0" ky="0" algn="bl" rotWithShape="0" blurRad="101600" dist="25400" dir="8100000">
+            <a:outerShdw blurRad="101600" dist="25400" dir="8100000" algn="bl" rotWithShape="0">
               <a:srgbClr val="000000">
                 <a:alpha val="12000"/>
               </a:srgbClr>
@@ -14951,7 +14826,7 @@
           <a:bodyPr wrap="square" lIns="0" tIns="0" rIns="0" bIns="0" rtlCol="0" anchor="ctr"/>
           <a:lstStyle/>
           <a:p>
-            <a:pPr algn="ctr" indent="0" marL="0">
+            <a:pPr marL="0" indent="0" algn="ctr">
               <a:buNone/>
             </a:pPr>
             <a:r>
@@ -14990,7 +14865,7 @@
           <a:bodyPr wrap="square" lIns="0" tIns="0" rIns="0" bIns="0" rtlCol="0" anchor="t"/>
           <a:lstStyle/>
           <a:p>
-            <a:pPr algn="ctr" indent="0" marL="0">
+            <a:pPr marL="0" indent="0" algn="ctr">
               <a:buNone/>
             </a:pPr>
             <a:r>
@@ -15032,7 +14907,7 @@
             <a:prstDash val="solid"/>
           </a:ln>
           <a:effectLst>
-            <a:outerShdw sx="100000" sy="100000" kx="0" ky="0" algn="bl" rotWithShape="0" blurRad="101600" dist="25400" dir="8100000">
+            <a:outerShdw blurRad="101600" dist="25400" dir="8100000" algn="bl" rotWithShape="0">
               <a:srgbClr val="000000">
                 <a:alpha val="12000"/>
               </a:srgbClr>
@@ -15061,7 +14936,7 @@
           <a:bodyPr wrap="square" lIns="0" tIns="0" rIns="0" bIns="0" rtlCol="0" anchor="ctr"/>
           <a:lstStyle/>
           <a:p>
-            <a:pPr algn="ctr" indent="0" marL="0">
+            <a:pPr marL="0" indent="0" algn="ctr">
               <a:buNone/>
             </a:pPr>
             <a:r>
@@ -15100,7 +14975,7 @@
           <a:bodyPr wrap="square" lIns="0" tIns="0" rIns="0" bIns="0" rtlCol="0" anchor="t"/>
           <a:lstStyle/>
           <a:p>
-            <a:pPr algn="ctr" indent="0" marL="0">
+            <a:pPr marL="0" indent="0" algn="ctr">
               <a:buNone/>
             </a:pPr>
             <a:r>
@@ -15142,7 +15017,7 @@
             <a:prstDash val="solid"/>
           </a:ln>
           <a:effectLst>
-            <a:outerShdw sx="100000" sy="100000" kx="0" ky="0" algn="bl" rotWithShape="0" blurRad="101600" dist="25400" dir="8100000">
+            <a:outerShdw blurRad="101600" dist="25400" dir="8100000" algn="bl" rotWithShape="0">
               <a:srgbClr val="000000">
                 <a:alpha val="12000"/>
               </a:srgbClr>
@@ -15171,7 +15046,7 @@
           <a:bodyPr wrap="square" lIns="0" tIns="0" rIns="0" bIns="0" rtlCol="0" anchor="ctr"/>
           <a:lstStyle/>
           <a:p>
-            <a:pPr algn="ctr" indent="0" marL="0">
+            <a:pPr marL="0" indent="0" algn="ctr">
               <a:buNone/>
             </a:pPr>
             <a:r>
@@ -15210,7 +15085,7 @@
           <a:bodyPr wrap="square" lIns="0" tIns="0" rIns="0" bIns="0" rtlCol="0" anchor="t"/>
           <a:lstStyle/>
           <a:p>
-            <a:pPr algn="ctr" indent="0" marL="0">
+            <a:pPr marL="0" indent="0" algn="ctr">
               <a:buNone/>
             </a:pPr>
             <a:r>
@@ -15249,7 +15124,7 @@
           <a:bodyPr wrap="square" lIns="0" tIns="0" rIns="0" bIns="0" rtlCol="0" anchor="ctr"/>
           <a:lstStyle/>
           <a:p>
-            <a:pPr indent="0" marL="0">
+            <a:pPr marL="0" indent="0">
               <a:buNone/>
             </a:pPr>
             <a:r>
@@ -15400,7 +15275,7 @@
           <a:bodyPr wrap="square" lIns="0" tIns="0" rIns="0" bIns="0" rtlCol="0" anchor="ctr"/>
           <a:lstStyle/>
           <a:p>
-            <a:pPr indent="0" marL="0">
+            <a:pPr marL="0" indent="0">
               <a:buNone/>
             </a:pPr>
             <a:r>
@@ -15464,7 +15339,7 @@
           <a:bodyPr wrap="square" lIns="0" tIns="0" rIns="0" bIns="0" rtlCol="0" anchor="ctr"/>
           <a:lstStyle/>
           <a:p>
-            <a:pPr indent="0" marL="0">
+            <a:pPr marL="0" indent="0">
               <a:buNone/>
             </a:pPr>
             <a:r>
@@ -15503,7 +15378,7 @@
           <a:bodyPr wrap="square" lIns="0" tIns="0" rIns="0" bIns="0" rtlCol="0" anchor="ctr"/>
           <a:lstStyle/>
           <a:p>
-            <a:pPr indent="0" marL="0">
+            <a:pPr marL="0" indent="0">
               <a:buNone/>
             </a:pPr>
             <a:r>
@@ -15567,7 +15442,7 @@
           <a:bodyPr wrap="square" lIns="0" tIns="0" rIns="0" bIns="0" rtlCol="0" anchor="ctr"/>
           <a:lstStyle/>
           <a:p>
-            <a:pPr indent="0" marL="0">
+            <a:pPr marL="0" indent="0">
               <a:buNone/>
             </a:pPr>
             <a:r>
@@ -15606,7 +15481,7 @@
           <a:bodyPr wrap="square" lIns="0" tIns="0" rIns="0" bIns="0" rtlCol="0" anchor="ctr"/>
           <a:lstStyle/>
           <a:p>
-            <a:pPr indent="0" marL="0">
+            <a:pPr marL="0" indent="0">
               <a:buNone/>
             </a:pPr>
             <a:r>
@@ -15670,7 +15545,7 @@
           <a:bodyPr wrap="square" lIns="0" tIns="0" rIns="0" bIns="0" rtlCol="0" anchor="ctr"/>
           <a:lstStyle/>
           <a:p>
-            <a:pPr indent="0" marL="0">
+            <a:pPr marL="0" indent="0">
               <a:buNone/>
             </a:pPr>
             <a:r>
@@ -15709,7 +15584,7 @@
           <a:bodyPr wrap="square" lIns="0" tIns="0" rIns="0" bIns="0" rtlCol="0" anchor="ctr"/>
           <a:lstStyle/>
           <a:p>
-            <a:pPr indent="0" marL="0">
+            <a:pPr marL="0" indent="0">
               <a:buNone/>
             </a:pPr>
             <a:r>
@@ -15773,7 +15648,7 @@
           <a:bodyPr wrap="square" lIns="0" tIns="0" rIns="0" bIns="0" rtlCol="0" anchor="ctr"/>
           <a:lstStyle/>
           <a:p>
-            <a:pPr indent="0" marL="0">
+            <a:pPr marL="0" indent="0">
               <a:buNone/>
             </a:pPr>
             <a:r>
@@ -15812,7 +15687,7 @@
           <a:bodyPr wrap="square" lIns="0" tIns="0" rIns="0" bIns="0" rtlCol="0" anchor="ctr"/>
           <a:lstStyle/>
           <a:p>
-            <a:pPr indent="0" marL="0">
+            <a:pPr marL="0" indent="0">
               <a:buNone/>
             </a:pPr>
             <a:r>
@@ -15876,7 +15751,7 @@
           <a:bodyPr wrap="square" lIns="0" tIns="0" rIns="0" bIns="0" rtlCol="0" anchor="ctr"/>
           <a:lstStyle/>
           <a:p>
-            <a:pPr indent="0" marL="0">
+            <a:pPr marL="0" indent="0">
               <a:buNone/>
             </a:pPr>
             <a:r>
@@ -15915,7 +15790,7 @@
           <a:bodyPr wrap="square" lIns="0" tIns="0" rIns="0" bIns="0" rtlCol="0" anchor="ctr"/>
           <a:lstStyle/>
           <a:p>
-            <a:pPr indent="0" marL="0">
+            <a:pPr marL="0" indent="0">
               <a:buNone/>
             </a:pPr>
             <a:r>
@@ -15979,7 +15854,7 @@
           <a:bodyPr wrap="square" lIns="0" tIns="0" rIns="0" bIns="0" rtlCol="0" anchor="ctr"/>
           <a:lstStyle/>
           <a:p>
-            <a:pPr indent="0" marL="0">
+            <a:pPr marL="0" indent="0">
               <a:buNone/>
             </a:pPr>
             <a:r>
@@ -16018,7 +15893,7 @@
           <a:bodyPr wrap="square" lIns="0" tIns="0" rIns="0" bIns="0" rtlCol="0" anchor="ctr"/>
           <a:lstStyle/>
           <a:p>
-            <a:pPr indent="0" marL="0">
+            <a:pPr marL="0" indent="0">
               <a:buNone/>
             </a:pPr>
             <a:r>
@@ -16038,7 +15913,7 @@
       </p:sp>
       <p:graphicFrame>
         <p:nvGraphicFramePr>
-          <p:cNvPr id="44" name="Chart 0" descr=""/>
+          <p:cNvPr id="44" name="Chart 0"/>
           <p:cNvGraphicFramePr/>
           <p:nvPr/>
         </p:nvGraphicFramePr>
@@ -16046,9 +15921,9 @@
           <a:off x="182880" y="4114800"/>
           <a:ext cx="4114800" cy="777240"/>
         </p:xfrm>
-        <a:graphic xmlns:a="http://schemas.openxmlformats.org/drawingml/2006/main">
+        <a:graphic>
           <a:graphicData uri="http://schemas.openxmlformats.org/drawingml/2006/chart">
-            <c:chart xmlns:c="http://schemas.openxmlformats.org/drawingml/2006/chart" r:id="rId1"/>
+            <c:chart xmlns:c="http://schemas.openxmlformats.org/drawingml/2006/chart" xmlns:r="http://schemas.openxmlformats.org/officeDocument/2006/relationships" r:id="rId3"/>
           </a:graphicData>
         </a:graphic>
       </p:graphicFrame>
@@ -16073,7 +15948,7 @@
           <a:bodyPr wrap="square" rtlCol="0" anchor="ctr"/>
           <a:lstStyle/>
           <a:p>
-            <a:pPr indent="0" marL="0">
+            <a:pPr marL="0" indent="0">
               <a:buNone/>
             </a:pPr>
             <a:r>
@@ -16107,6 +15982,7 @@
         <a:solidFill>
           <a:srgbClr val="F7FAFC"/>
         </a:solidFill>
+        <a:effectLst/>
       </p:bgPr>
     </p:bg>
     <p:spTree>
@@ -16169,7 +16045,7 @@
           <a:bodyPr wrap="square" lIns="0" tIns="0" rIns="0" bIns="0" rtlCol="0" anchor="ctr"/>
           <a:lstStyle/>
           <a:p>
-            <a:pPr indent="0" marL="0">
+            <a:pPr marL="0" indent="0">
               <a:buNone/>
             </a:pPr>
             <a:r>
@@ -16208,7 +16084,7 @@
           <a:bodyPr wrap="square" lIns="0" tIns="0" rIns="0" bIns="0" rtlCol="0" anchor="ctr"/>
           <a:lstStyle/>
           <a:p>
-            <a:pPr indent="0" marL="0">
+            <a:pPr marL="0" indent="0">
               <a:buNone/>
             </a:pPr>
             <a:r>
@@ -16272,7 +16148,7 @@
           <a:bodyPr wrap="square" lIns="0" tIns="0" rIns="0" bIns="0" rtlCol="0" anchor="ctr"/>
           <a:lstStyle/>
           <a:p>
-            <a:pPr indent="0" marL="0">
+            <a:pPr marL="0" indent="0">
               <a:buNone/>
             </a:pPr>
             <a:r>
@@ -16311,7 +16187,7 @@
           <a:bodyPr wrap="square" lIns="0" tIns="0" rIns="0" bIns="0" rtlCol="0" anchor="ctr"/>
           <a:lstStyle/>
           <a:p>
-            <a:pPr indent="0" marL="0">
+            <a:pPr marL="0" indent="0">
               <a:buNone/>
             </a:pPr>
             <a:r>
@@ -16353,7 +16229,7 @@
             <a:prstDash val="solid"/>
           </a:ln>
           <a:effectLst>
-            <a:outerShdw sx="100000" sy="100000" kx="0" ky="0" algn="bl" rotWithShape="0" blurRad="101600" dist="25400" dir="8100000">
+            <a:outerShdw blurRad="101600" dist="25400" dir="8100000" algn="bl" rotWithShape="0">
               <a:srgbClr val="000000">
                 <a:alpha val="12000"/>
               </a:srgbClr>
@@ -16382,7 +16258,7 @@
           <a:bodyPr wrap="square" lIns="0" tIns="0" rIns="0" bIns="0" rtlCol="0" anchor="ctr"/>
           <a:lstStyle/>
           <a:p>
-            <a:pPr indent="0" marL="0">
+            <a:pPr marL="0" indent="0">
               <a:buNone/>
             </a:pPr>
             <a:r>
@@ -16421,11 +16297,11 @@
           <a:bodyPr wrap="square" lIns="0" tIns="0" rIns="0" bIns="0" rtlCol="0" anchor="ctr"/>
           <a:lstStyle/>
           <a:p>
-            <a:pPr indent="0" marL="0">
-              <a:buNone/>
-            </a:pPr>
-            <a:r>
-              <a:rPr lang="en-US" sz="2200" b="1" dirty="0">
+            <a:pPr marL="0" indent="0" algn="ctr">
+              <a:buNone/>
+            </a:pPr>
+            <a:r>
+              <a:rPr lang="en-US" sz="1600" b="1" dirty="0">
                 <a:solidFill>
                   <a:srgbClr val="14FFEC"/>
                 </a:solidFill>
@@ -16435,7 +16311,7 @@
               </a:rPr>
               <a:t>q* = c_under / (c_under + c_over)  =  4 / (4 + 2)  =  0.667</a:t>
             </a:r>
-            <a:endParaRPr lang="en-US" sz="2200" dirty="0"/>
+            <a:endParaRPr lang="en-US" sz="1600" dirty="0"/>
           </a:p>
         </p:txBody>
       </p:sp>
@@ -16463,7 +16339,7 @@
             <a:prstDash val="solid"/>
           </a:ln>
           <a:effectLst>
-            <a:outerShdw sx="100000" sy="100000" kx="0" ky="0" algn="bl" rotWithShape="0" blurRad="101600" dist="25400" dir="8100000">
+            <a:outerShdw blurRad="101600" dist="25400" dir="8100000" algn="bl" rotWithShape="0">
               <a:srgbClr val="000000">
                 <a:alpha val="12000"/>
               </a:srgbClr>
@@ -16517,7 +16393,7 @@
           <a:bodyPr wrap="square" lIns="0" tIns="0" rIns="0" bIns="0" rtlCol="0" anchor="ctr"/>
           <a:lstStyle/>
           <a:p>
-            <a:pPr indent="0" marL="0">
+            <a:pPr marL="0" indent="0">
               <a:buNone/>
             </a:pPr>
             <a:r>
@@ -16543,8 +16419,8 @@
         </p:nvSpPr>
         <p:spPr>
           <a:xfrm>
-            <a:off x="274320" y="2404872"/>
-            <a:ext cx="2578608" cy="2139696"/>
+            <a:off x="274320" y="2496312"/>
+            <a:ext cx="2578608" cy="2048256"/>
           </a:xfrm>
           <a:prstGeom prst="rect">
             <a:avLst/>
@@ -16556,7 +16432,7 @@
           <a:bodyPr wrap="square" lIns="0" tIns="0" rIns="0" bIns="0" rtlCol="0" anchor="t"/>
           <a:lstStyle/>
           <a:p>
-            <a:pPr indent="0" marL="0">
+            <a:pPr marL="0" indent="0">
               <a:buNone/>
             </a:pPr>
             <a:r>
@@ -16598,7 +16474,7 @@
             <a:prstDash val="solid"/>
           </a:ln>
           <a:effectLst>
-            <a:outerShdw sx="100000" sy="100000" kx="0" ky="0" algn="bl" rotWithShape="0" blurRad="101600" dist="25400" dir="8100000">
+            <a:outerShdw blurRad="101600" dist="25400" dir="8100000" algn="bl" rotWithShape="0">
               <a:srgbClr val="000000">
                 <a:alpha val="12000"/>
               </a:srgbClr>
@@ -16652,7 +16528,7 @@
           <a:bodyPr wrap="square" lIns="0" tIns="0" rIns="0" bIns="0" rtlCol="0" anchor="ctr"/>
           <a:lstStyle/>
           <a:p>
-            <a:pPr indent="0" marL="0">
+            <a:pPr marL="0" indent="0">
               <a:buNone/>
             </a:pPr>
             <a:r>
@@ -16678,8 +16554,8 @@
         </p:nvSpPr>
         <p:spPr>
           <a:xfrm>
-            <a:off x="3200400" y="2404872"/>
-            <a:ext cx="2578608" cy="2139696"/>
+            <a:off x="3200400" y="2496312"/>
+            <a:ext cx="2578608" cy="2048256"/>
           </a:xfrm>
           <a:prstGeom prst="rect">
             <a:avLst/>
@@ -16691,7 +16567,7 @@
           <a:bodyPr wrap="square" lIns="0" tIns="0" rIns="0" bIns="0" rtlCol="0" anchor="t"/>
           <a:lstStyle/>
           <a:p>
-            <a:pPr indent="0" marL="0">
+            <a:pPr marL="0" indent="0">
               <a:buNone/>
             </a:pPr>
             <a:r>
@@ -16733,7 +16609,7 @@
             <a:prstDash val="solid"/>
           </a:ln>
           <a:effectLst>
-            <a:outerShdw sx="100000" sy="100000" kx="0" ky="0" algn="bl" rotWithShape="0" blurRad="101600" dist="25400" dir="8100000">
+            <a:outerShdw blurRad="101600" dist="25400" dir="8100000" algn="bl" rotWithShape="0">
               <a:srgbClr val="000000">
                 <a:alpha val="12000"/>
               </a:srgbClr>
@@ -16787,7 +16663,7 @@
           <a:bodyPr wrap="square" lIns="0" tIns="0" rIns="0" bIns="0" rtlCol="0" anchor="ctr"/>
           <a:lstStyle/>
           <a:p>
-            <a:pPr indent="0" marL="0">
+            <a:pPr marL="0" indent="0">
               <a:buNone/>
             </a:pPr>
             <a:r>
@@ -16813,8 +16689,8 @@
         </p:nvSpPr>
         <p:spPr>
           <a:xfrm>
-            <a:off x="6126480" y="2404872"/>
-            <a:ext cx="2715768" cy="2139696"/>
+            <a:off x="6126480" y="2496312"/>
+            <a:ext cx="2715768" cy="2048256"/>
           </a:xfrm>
           <a:prstGeom prst="rect">
             <a:avLst/>
@@ -16826,7 +16702,7 @@
           <a:bodyPr wrap="square" lIns="0" tIns="0" rIns="0" bIns="0" rtlCol="0" anchor="t"/>
           <a:lstStyle/>
           <a:p>
-            <a:pPr indent="0" marL="0">
+            <a:pPr marL="0" indent="0">
               <a:buNone/>
             </a:pPr>
             <a:r>
@@ -16867,7 +16743,7 @@
           <a:bodyPr wrap="square" rtlCol="0" anchor="ctr"/>
           <a:lstStyle/>
           <a:p>
-            <a:pPr algn="ctr" indent="0" marL="0">
+            <a:pPr marL="0" indent="0" algn="ctr">
               <a:buNone/>
             </a:pPr>
             <a:r>
@@ -16901,6 +16777,7 @@
         <a:solidFill>
           <a:srgbClr val="F7FAFC"/>
         </a:solidFill>
+        <a:effectLst/>
       </p:bgPr>
     </p:bg>
     <p:spTree>
@@ -16963,7 +16840,7 @@
           <a:bodyPr wrap="square" lIns="0" tIns="0" rIns="0" bIns="0" rtlCol="0" anchor="ctr"/>
           <a:lstStyle/>
           <a:p>
-            <a:pPr indent="0" marL="0">
+            <a:pPr marL="0" indent="0">
               <a:buNone/>
             </a:pPr>
             <a:r>
@@ -17002,7 +16879,7 @@
           <a:bodyPr wrap="square" lIns="0" tIns="0" rIns="0" bIns="0" rtlCol="0" anchor="ctr"/>
           <a:lstStyle/>
           <a:p>
-            <a:pPr indent="0" marL="0">
+            <a:pPr marL="0" indent="0">
               <a:buNone/>
             </a:pPr>
             <a:r>
@@ -17066,7 +16943,7 @@
           <a:bodyPr wrap="square" lIns="0" tIns="0" rIns="0" bIns="0" rtlCol="0" anchor="ctr"/>
           <a:lstStyle/>
           <a:p>
-            <a:pPr indent="0" marL="0">
+            <a:pPr marL="0" indent="0">
               <a:buNone/>
             </a:pPr>
             <a:r>
@@ -17105,7 +16982,7 @@
           <a:bodyPr wrap="square" lIns="0" tIns="0" rIns="0" bIns="0" rtlCol="0" anchor="ctr"/>
           <a:lstStyle/>
           <a:p>
-            <a:pPr indent="0" marL="0">
+            <a:pPr marL="0" indent="0">
               <a:buNone/>
             </a:pPr>
             <a:r>
@@ -17147,7 +17024,7 @@
             <a:prstDash val="solid"/>
           </a:ln>
           <a:effectLst>
-            <a:outerShdw sx="100000" sy="100000" kx="0" ky="0" algn="bl" rotWithShape="0" blurRad="101600" dist="25400" dir="8100000">
+            <a:outerShdw blurRad="101600" dist="25400" dir="8100000" algn="bl" rotWithShape="0">
               <a:srgbClr val="000000">
                 <a:alpha val="12000"/>
               </a:srgbClr>
@@ -17201,7 +17078,7 @@
           <a:bodyPr wrap="square" lIns="0" tIns="0" rIns="0" bIns="0" rtlCol="0" anchor="ctr"/>
           <a:lstStyle/>
           <a:p>
-            <a:pPr indent="0" marL="0">
+            <a:pPr marL="0" indent="0">
               <a:buNone/>
             </a:pPr>
             <a:r>
@@ -17337,7 +17214,7 @@
             <a:prstDash val="solid"/>
           </a:ln>
           <a:effectLst>
-            <a:outerShdw sx="100000" sy="100000" kx="0" ky="0" algn="bl" rotWithShape="0" blurRad="101600" dist="25400" dir="8100000">
+            <a:outerShdw blurRad="101600" dist="25400" dir="8100000" algn="bl" rotWithShape="0">
               <a:srgbClr val="000000">
                 <a:alpha val="12000"/>
               </a:srgbClr>
@@ -17391,7 +17268,7 @@
           <a:bodyPr wrap="square" lIns="0" tIns="0" rIns="0" bIns="0" rtlCol="0" anchor="ctr"/>
           <a:lstStyle/>
           <a:p>
-            <a:pPr indent="0" marL="0">
+            <a:pPr marL="0" indent="0">
               <a:buNone/>
             </a:pPr>
             <a:r>
@@ -17524,7 +17401,7 @@
           <a:bodyPr wrap="square" lIns="0" tIns="0" rIns="0" bIns="0" rtlCol="0" anchor="ctr"/>
           <a:lstStyle/>
           <a:p>
-            <a:pPr indent="0" marL="0">
+            <a:pPr marL="0" indent="0">
               <a:buNone/>
             </a:pPr>
             <a:r>
@@ -17566,7 +17443,7 @@
             <a:prstDash val="solid"/>
           </a:ln>
           <a:effectLst>
-            <a:outerShdw sx="100000" sy="100000" kx="0" ky="0" algn="bl" rotWithShape="0" blurRad="101600" dist="25400" dir="8100000">
+            <a:outerShdw blurRad="101600" dist="25400" dir="8100000" algn="bl" rotWithShape="0">
               <a:srgbClr val="000000">
                 <a:alpha val="12000"/>
               </a:srgbClr>
@@ -17595,7 +17472,7 @@
           <a:bodyPr wrap="square" lIns="0" tIns="0" rIns="0" bIns="0" rtlCol="0" anchor="ctr"/>
           <a:lstStyle/>
           <a:p>
-            <a:pPr algn="ctr" indent="0" marL="0">
+            <a:pPr marL="0" indent="0" algn="ctr">
               <a:buNone/>
             </a:pPr>
             <a:r>
@@ -17634,7 +17511,7 @@
           <a:bodyPr wrap="square" lIns="0" tIns="0" rIns="0" bIns="0" rtlCol="0" anchor="t"/>
           <a:lstStyle/>
           <a:p>
-            <a:pPr algn="ctr" indent="0" marL="0">
+            <a:pPr marL="0" indent="0" algn="ctr">
               <a:buNone/>
             </a:pPr>
             <a:r>
@@ -17651,7 +17528,7 @@
             <a:endParaRPr lang="en-US" sz="1100" dirty="0"/>
           </a:p>
           <a:p>
-            <a:pPr algn="ctr" indent="0" marL="0">
+            <a:pPr marL="0" indent="0" algn="ctr">
               <a:buNone/>
             </a:pPr>
             <a:r>
@@ -17693,7 +17570,7 @@
             <a:prstDash val="solid"/>
           </a:ln>
           <a:effectLst>
-            <a:outerShdw sx="100000" sy="100000" kx="0" ky="0" algn="bl" rotWithShape="0" blurRad="101600" dist="25400" dir="8100000">
+            <a:outerShdw blurRad="101600" dist="25400" dir="8100000" algn="bl" rotWithShape="0">
               <a:srgbClr val="000000">
                 <a:alpha val="12000"/>
               </a:srgbClr>
@@ -17722,7 +17599,7 @@
           <a:bodyPr wrap="square" lIns="0" tIns="0" rIns="0" bIns="0" rtlCol="0" anchor="ctr"/>
           <a:lstStyle/>
           <a:p>
-            <a:pPr algn="ctr" indent="0" marL="0">
+            <a:pPr marL="0" indent="0" algn="ctr">
               <a:buNone/>
             </a:pPr>
             <a:r>
@@ -17761,7 +17638,7 @@
           <a:bodyPr wrap="square" lIns="0" tIns="0" rIns="0" bIns="0" rtlCol="0" anchor="t"/>
           <a:lstStyle/>
           <a:p>
-            <a:pPr algn="ctr" indent="0" marL="0">
+            <a:pPr marL="0" indent="0" algn="ctr">
               <a:buNone/>
             </a:pPr>
             <a:r>
@@ -17778,7 +17655,7 @@
             <a:endParaRPr lang="en-US" sz="1100" dirty="0"/>
           </a:p>
           <a:p>
-            <a:pPr algn="ctr" indent="0" marL="0">
+            <a:pPr marL="0" indent="0" algn="ctr">
               <a:buNone/>
             </a:pPr>
             <a:r>
@@ -17820,7 +17697,7 @@
             <a:prstDash val="solid"/>
           </a:ln>
           <a:effectLst>
-            <a:outerShdw sx="100000" sy="100000" kx="0" ky="0" algn="bl" rotWithShape="0" blurRad="101600" dist="25400" dir="8100000">
+            <a:outerShdw blurRad="101600" dist="25400" dir="8100000" algn="bl" rotWithShape="0">
               <a:srgbClr val="000000">
                 <a:alpha val="12000"/>
               </a:srgbClr>
@@ -17849,7 +17726,7 @@
           <a:bodyPr wrap="square" lIns="0" tIns="0" rIns="0" bIns="0" rtlCol="0" anchor="ctr"/>
           <a:lstStyle/>
           <a:p>
-            <a:pPr algn="ctr" indent="0" marL="0">
+            <a:pPr marL="0" indent="0" algn="ctr">
               <a:buNone/>
             </a:pPr>
             <a:r>
@@ -17888,7 +17765,7 @@
           <a:bodyPr wrap="square" lIns="0" tIns="0" rIns="0" bIns="0" rtlCol="0" anchor="t"/>
           <a:lstStyle/>
           <a:p>
-            <a:pPr algn="ctr" indent="0" marL="0">
+            <a:pPr marL="0" indent="0" algn="ctr">
               <a:buNone/>
             </a:pPr>
             <a:r>
@@ -17905,7 +17782,7 @@
             <a:endParaRPr lang="en-US" sz="1100" dirty="0"/>
           </a:p>
           <a:p>
-            <a:pPr algn="ctr" indent="0" marL="0">
+            <a:pPr marL="0" indent="0" algn="ctr">
               <a:buNone/>
             </a:pPr>
             <a:r>
@@ -17947,7 +17824,7 @@
             <a:prstDash val="solid"/>
           </a:ln>
           <a:effectLst>
-            <a:outerShdw sx="100000" sy="100000" kx="0" ky="0" algn="bl" rotWithShape="0" blurRad="101600" dist="25400" dir="8100000">
+            <a:outerShdw blurRad="101600" dist="25400" dir="8100000" algn="bl" rotWithShape="0">
               <a:srgbClr val="000000">
                 <a:alpha val="12000"/>
               </a:srgbClr>
@@ -17976,7 +17853,7 @@
           <a:bodyPr wrap="square" lIns="0" tIns="0" rIns="0" bIns="0" rtlCol="0" anchor="ctr"/>
           <a:lstStyle/>
           <a:p>
-            <a:pPr algn="ctr" indent="0" marL="0">
+            <a:pPr marL="0" indent="0" algn="ctr">
               <a:buNone/>
             </a:pPr>
             <a:r>
@@ -18015,7 +17892,7 @@
           <a:bodyPr wrap="square" lIns="0" tIns="0" rIns="0" bIns="0" rtlCol="0" anchor="t"/>
           <a:lstStyle/>
           <a:p>
-            <a:pPr algn="ctr" indent="0" marL="0">
+            <a:pPr marL="0" indent="0" algn="ctr">
               <a:buNone/>
             </a:pPr>
             <a:r>
@@ -18032,7 +17909,7 @@
             <a:endParaRPr lang="en-US" sz="1100" dirty="0"/>
           </a:p>
           <a:p>
-            <a:pPr algn="ctr" indent="0" marL="0">
+            <a:pPr marL="0" indent="0" algn="ctr">
               <a:buNone/>
             </a:pPr>
             <a:r>
@@ -18071,7 +17948,7 @@
           <a:bodyPr wrap="square" rtlCol="0" anchor="ctr"/>
           <a:lstStyle/>
           <a:p>
-            <a:pPr indent="0" marL="0">
+            <a:pPr marL="0" indent="0">
               <a:buNone/>
             </a:pPr>
             <a:r>
@@ -18105,6 +17982,7 @@
         <a:solidFill>
           <a:srgbClr val="F7FAFC"/>
         </a:solidFill>
+        <a:effectLst/>
       </p:bgPr>
     </p:bg>
     <p:spTree>
@@ -18167,7 +18045,7 @@
           <a:bodyPr wrap="square" lIns="0" tIns="0" rIns="0" bIns="0" rtlCol="0" anchor="ctr"/>
           <a:lstStyle/>
           <a:p>
-            <a:pPr indent="0" marL="0">
+            <a:pPr marL="0" indent="0">
               <a:buNone/>
             </a:pPr>
             <a:r>
@@ -18206,7 +18084,7 @@
           <a:bodyPr wrap="square" lIns="0" tIns="0" rIns="0" bIns="0" rtlCol="0" anchor="ctr"/>
           <a:lstStyle/>
           <a:p>
-            <a:pPr indent="0" marL="0">
+            <a:pPr marL="0" indent="0">
               <a:buNone/>
             </a:pPr>
             <a:r>
@@ -18270,7 +18148,7 @@
           <a:bodyPr wrap="square" lIns="0" tIns="0" rIns="0" bIns="0" rtlCol="0" anchor="ctr"/>
           <a:lstStyle/>
           <a:p>
-            <a:pPr indent="0" marL="0">
+            <a:pPr marL="0" indent="0">
               <a:buNone/>
             </a:pPr>
             <a:r>
@@ -18309,7 +18187,7 @@
           <a:bodyPr wrap="square" lIns="0" tIns="0" rIns="0" bIns="0" rtlCol="0" anchor="ctr"/>
           <a:lstStyle/>
           <a:p>
-            <a:pPr indent="0" marL="0">
+            <a:pPr marL="0" indent="0">
               <a:buNone/>
             </a:pPr>
             <a:r>
@@ -18329,7 +18207,7 @@
       </p:sp>
       <p:graphicFrame>
         <p:nvGraphicFramePr>
-          <p:cNvPr id="8" name="Chart 0" descr=""/>
+          <p:cNvPr id="8" name="Chart 0"/>
           <p:cNvGraphicFramePr/>
           <p:nvPr/>
         </p:nvGraphicFramePr>
@@ -18337,9 +18215,9 @@
           <a:off x="182880" y="1005840"/>
           <a:ext cx="5303520" cy="3200400"/>
         </p:xfrm>
-        <a:graphic xmlns:a="http://schemas.openxmlformats.org/drawingml/2006/main">
+        <a:graphic>
           <a:graphicData uri="http://schemas.openxmlformats.org/drawingml/2006/chart">
-            <c:chart xmlns:c="http://schemas.openxmlformats.org/drawingml/2006/chart" r:id="rId1"/>
+            <c:chart xmlns:c="http://schemas.openxmlformats.org/drawingml/2006/chart" xmlns:r="http://schemas.openxmlformats.org/officeDocument/2006/relationships" r:id="rId3"/>
           </a:graphicData>
         </a:graphic>
       </p:graphicFrame>
@@ -18364,7 +18242,7 @@
           <a:bodyPr wrap="square" rtlCol="0" anchor="ctr"/>
           <a:lstStyle/>
           <a:p>
-            <a:pPr algn="ctr" indent="0" marL="0">
+            <a:pPr marL="0" indent="0" algn="ctr">
               <a:buNone/>
             </a:pPr>
             <a:r>
@@ -18403,7 +18281,7 @@
           <a:bodyPr wrap="square" lIns="0" tIns="0" rIns="0" bIns="0" rtlCol="0" anchor="ctr"/>
           <a:lstStyle/>
           <a:p>
-            <a:pPr indent="0" marL="0">
+            <a:pPr marL="0" indent="0">
               <a:buNone/>
             </a:pPr>
             <a:r>
@@ -18492,7 +18370,7 @@
           <a:bodyPr wrap="square" lIns="0" tIns="0" rIns="0" bIns="0" rtlCol="0" anchor="ctr"/>
           <a:lstStyle/>
           <a:p>
-            <a:pPr indent="0" marL="0">
+            <a:pPr marL="0" indent="0">
               <a:buNone/>
             </a:pPr>
             <a:r>
@@ -18531,7 +18409,7 @@
           <a:bodyPr wrap="square" lIns="0" tIns="0" rIns="0" bIns="0" rtlCol="0" anchor="ctr"/>
           <a:lstStyle/>
           <a:p>
-            <a:pPr indent="0" marL="0">
+            <a:pPr marL="0" indent="0">
               <a:buNone/>
             </a:pPr>
             <a:r>
@@ -18548,7 +18426,7 @@
             <a:endParaRPr lang="en-US" sz="900" dirty="0"/>
           </a:p>
           <a:p>
-            <a:pPr indent="0" marL="0">
+            <a:pPr marL="0" indent="0">
               <a:buNone/>
             </a:pPr>
             <a:r>
@@ -18637,7 +18515,7 @@
           <a:bodyPr wrap="square" lIns="0" tIns="0" rIns="0" bIns="0" rtlCol="0" anchor="ctr"/>
           <a:lstStyle/>
           <a:p>
-            <a:pPr indent="0" marL="0">
+            <a:pPr marL="0" indent="0">
               <a:buNone/>
             </a:pPr>
             <a:r>
@@ -18676,7 +18554,7 @@
           <a:bodyPr wrap="square" lIns="0" tIns="0" rIns="0" bIns="0" rtlCol="0" anchor="ctr"/>
           <a:lstStyle/>
           <a:p>
-            <a:pPr indent="0" marL="0">
+            <a:pPr marL="0" indent="0">
               <a:buNone/>
             </a:pPr>
             <a:r>
@@ -18693,7 +18571,7 @@
             <a:endParaRPr lang="en-US" sz="900" dirty="0"/>
           </a:p>
           <a:p>
-            <a:pPr indent="0" marL="0">
+            <a:pPr marL="0" indent="0">
               <a:buNone/>
             </a:pPr>
             <a:r>
@@ -18710,7 +18588,7 @@
             <a:endParaRPr lang="en-US" sz="900" dirty="0"/>
           </a:p>
           <a:p>
-            <a:pPr indent="0" marL="0">
+            <a:pPr marL="0" indent="0">
               <a:buNone/>
             </a:pPr>
             <a:r>
@@ -18799,7 +18677,7 @@
           <a:bodyPr wrap="square" lIns="0" tIns="0" rIns="0" bIns="0" rtlCol="0" anchor="ctr"/>
           <a:lstStyle/>
           <a:p>
-            <a:pPr indent="0" marL="0">
+            <a:pPr marL="0" indent="0">
               <a:buNone/>
             </a:pPr>
             <a:r>
@@ -18838,7 +18716,7 @@
           <a:bodyPr wrap="square" lIns="0" tIns="0" rIns="0" bIns="0" rtlCol="0" anchor="ctr"/>
           <a:lstStyle/>
           <a:p>
-            <a:pPr indent="0" marL="0">
+            <a:pPr marL="0" indent="0">
               <a:buNone/>
             </a:pPr>
             <a:r>
@@ -18855,7 +18733,7 @@
             <a:endParaRPr lang="en-US" sz="900" dirty="0"/>
           </a:p>
           <a:p>
-            <a:pPr indent="0" marL="0">
+            <a:pPr marL="0" indent="0">
               <a:buNone/>
             </a:pPr>
             <a:r>
@@ -18872,7 +18750,7 @@
             <a:endParaRPr lang="en-US" sz="900" dirty="0"/>
           </a:p>
           <a:p>
-            <a:pPr indent="0" marL="0">
+            <a:pPr marL="0" indent="0">
               <a:buNone/>
             </a:pPr>
             <a:r>
@@ -18961,7 +18839,7 @@
           <a:bodyPr wrap="square" lIns="0" tIns="0" rIns="0" bIns="0" rtlCol="0" anchor="ctr"/>
           <a:lstStyle/>
           <a:p>
-            <a:pPr indent="0" marL="0">
+            <a:pPr marL="0" indent="0">
               <a:buNone/>
             </a:pPr>
             <a:r>
@@ -19000,7 +18878,7 @@
           <a:bodyPr wrap="square" lIns="0" tIns="0" rIns="0" bIns="0" rtlCol="0" anchor="ctr"/>
           <a:lstStyle/>
           <a:p>
-            <a:pPr indent="0" marL="0">
+            <a:pPr marL="0" indent="0">
               <a:buNone/>
             </a:pPr>
             <a:r>
@@ -19017,7 +18895,7 @@
             <a:endParaRPr lang="en-US" sz="900" dirty="0"/>
           </a:p>
           <a:p>
-            <a:pPr indent="0" marL="0">
+            <a:pPr marL="0" indent="0">
               <a:buNone/>
             </a:pPr>
             <a:r>
@@ -19051,6 +18929,7 @@
         <a:solidFill>
           <a:srgbClr val="F7FAFC"/>
         </a:solidFill>
+        <a:effectLst/>
       </p:bgPr>
     </p:bg>
     <p:spTree>
@@ -19113,7 +18992,7 @@
           <a:bodyPr wrap="square" lIns="0" tIns="0" rIns="0" bIns="0" rtlCol="0" anchor="ctr"/>
           <a:lstStyle/>
           <a:p>
-            <a:pPr indent="0" marL="0">
+            <a:pPr marL="0" indent="0">
               <a:buNone/>
             </a:pPr>
             <a:r>
@@ -19152,7 +19031,7 @@
           <a:bodyPr wrap="square" lIns="0" tIns="0" rIns="0" bIns="0" rtlCol="0" anchor="ctr"/>
           <a:lstStyle/>
           <a:p>
-            <a:pPr indent="0" marL="0">
+            <a:pPr marL="0" indent="0">
               <a:buNone/>
             </a:pPr>
             <a:r>
@@ -19216,7 +19095,7 @@
           <a:bodyPr wrap="square" lIns="0" tIns="0" rIns="0" bIns="0" rtlCol="0" anchor="ctr"/>
           <a:lstStyle/>
           <a:p>
-            <a:pPr indent="0" marL="0">
+            <a:pPr marL="0" indent="0">
               <a:buNone/>
             </a:pPr>
             <a:r>
@@ -19255,7 +19134,7 @@
           <a:bodyPr wrap="square" lIns="0" tIns="0" rIns="0" bIns="0" rtlCol="0" anchor="ctr"/>
           <a:lstStyle/>
           <a:p>
-            <a:pPr indent="0" marL="0">
+            <a:pPr marL="0" indent="0">
               <a:buNone/>
             </a:pPr>
             <a:r>
@@ -19297,7 +19176,7 @@
             <a:prstDash val="solid"/>
           </a:ln>
           <a:effectLst>
-            <a:outerShdw sx="100000" sy="100000" kx="0" ky="0" algn="bl" rotWithShape="0" blurRad="101600" dist="25400" dir="8100000">
+            <a:outerShdw blurRad="101600" dist="25400" dir="8100000" algn="bl" rotWithShape="0">
               <a:srgbClr val="000000">
                 <a:alpha val="12000"/>
               </a:srgbClr>
@@ -19326,7 +19205,7 @@
           <a:bodyPr wrap="square" lIns="0" tIns="0" rIns="0" bIns="0" rtlCol="0" anchor="ctr"/>
           <a:lstStyle/>
           <a:p>
-            <a:pPr indent="0" marL="0">
+            <a:pPr marL="0" indent="0">
               <a:buNone/>
             </a:pPr>
             <a:r>
@@ -19365,11 +19244,11 @@
           <a:bodyPr wrap="square" lIns="0" tIns="0" rIns="0" bIns="0" rtlCol="0" anchor="ctr"/>
           <a:lstStyle/>
           <a:p>
-            <a:pPr indent="0" marL="0">
-              <a:buNone/>
-            </a:pPr>
-            <a:r>
-              <a:rPr lang="en-US" sz="2000" b="1" dirty="0">
+            <a:pPr marL="0" indent="0" algn="ctr">
+              <a:buNone/>
+            </a:pPr>
+            <a:r>
+              <a:rPr lang="en-US" sz="1400" b="1" dirty="0">
                 <a:solidFill>
                   <a:srgbClr val="14FFEC"/>
                 </a:solidFill>
@@ -19379,7 +19258,7 @@
               </a:rPr>
               <a:t>q* = 6 / (6 + 2)  =  0.750   (was 0.667 — a 12.4 percentile shift upward)</a:t>
             </a:r>
-            <a:endParaRPr lang="en-US" sz="2000" dirty="0"/>
+            <a:endParaRPr lang="en-US" sz="1400" dirty="0"/>
           </a:p>
         </p:txBody>
       </p:sp>
@@ -19407,7 +19286,7 @@
             <a:prstDash val="solid"/>
           </a:ln>
           <a:effectLst>
-            <a:outerShdw sx="100000" sy="100000" kx="0" ky="0" algn="bl" rotWithShape="0" blurRad="101600" dist="25400" dir="8100000">
+            <a:outerShdw blurRad="101600" dist="25400" dir="8100000" algn="bl" rotWithShape="0">
               <a:srgbClr val="000000">
                 <a:alpha val="12000"/>
               </a:srgbClr>
@@ -19461,7 +19340,7 @@
           <a:bodyPr wrap="square" lIns="0" tIns="0" rIns="0" bIns="0" rtlCol="0" anchor="ctr"/>
           <a:lstStyle/>
           <a:p>
-            <a:pPr indent="0" marL="0">
+            <a:pPr marL="0" indent="0">
               <a:buNone/>
             </a:pPr>
             <a:r>
@@ -19500,7 +19379,7 @@
           <a:bodyPr wrap="square" lIns="0" tIns="0" rIns="0" bIns="0" rtlCol="0" anchor="t"/>
           <a:lstStyle/>
           <a:p>
-            <a:pPr indent="0" marL="0">
+            <a:pPr marL="0" indent="0">
               <a:buNone/>
             </a:pPr>
             <a:r>
@@ -19542,7 +19421,7 @@
             <a:prstDash val="solid"/>
           </a:ln>
           <a:effectLst>
-            <a:outerShdw sx="100000" sy="100000" kx="0" ky="0" algn="bl" rotWithShape="0" blurRad="101600" dist="25400" dir="8100000">
+            <a:outerShdw blurRad="101600" dist="25400" dir="8100000" algn="bl" rotWithShape="0">
               <a:srgbClr val="000000">
                 <a:alpha val="12000"/>
               </a:srgbClr>
@@ -19596,7 +19475,7 @@
           <a:bodyPr wrap="square" lIns="0" tIns="0" rIns="0" bIns="0" rtlCol="0" anchor="ctr"/>
           <a:lstStyle/>
           <a:p>
-            <a:pPr indent="0" marL="0">
+            <a:pPr marL="0" indent="0">
               <a:buNone/>
             </a:pPr>
             <a:r>
@@ -19635,7 +19514,7 @@
           <a:bodyPr wrap="square" lIns="0" tIns="0" rIns="0" bIns="0" rtlCol="0" anchor="t"/>
           <a:lstStyle/>
           <a:p>
-            <a:pPr indent="0" marL="0">
+            <a:pPr marL="0" indent="0">
               <a:buNone/>
             </a:pPr>
             <a:r>
@@ -19677,7 +19556,7 @@
             <a:prstDash val="solid"/>
           </a:ln>
           <a:effectLst>
-            <a:outerShdw sx="100000" sy="100000" kx="0" ky="0" algn="bl" rotWithShape="0" blurRad="101600" dist="25400" dir="8100000">
+            <a:outerShdw blurRad="101600" dist="25400" dir="8100000" algn="bl" rotWithShape="0">
               <a:srgbClr val="000000">
                 <a:alpha val="12000"/>
               </a:srgbClr>
@@ -19731,7 +19610,7 @@
           <a:bodyPr wrap="square" lIns="0" tIns="0" rIns="0" bIns="0" rtlCol="0" anchor="ctr"/>
           <a:lstStyle/>
           <a:p>
-            <a:pPr indent="0" marL="0">
+            <a:pPr marL="0" indent="0">
               <a:buNone/>
             </a:pPr>
             <a:r>
@@ -19770,7 +19649,7 @@
           <a:bodyPr wrap="square" lIns="0" tIns="0" rIns="0" bIns="0" rtlCol="0" anchor="t"/>
           <a:lstStyle/>
           <a:p>
-            <a:pPr indent="0" marL="0">
+            <a:pPr marL="0" indent="0">
               <a:buNone/>
             </a:pPr>
             <a:r>
@@ -19812,7 +19691,7 @@
             <a:prstDash val="solid"/>
           </a:ln>
           <a:effectLst>
-            <a:outerShdw sx="100000" sy="100000" kx="0" ky="0" algn="bl" rotWithShape="0" blurRad="101600" dist="25400" dir="8100000">
+            <a:outerShdw blurRad="101600" dist="25400" dir="8100000" algn="bl" rotWithShape="0">
               <a:srgbClr val="000000">
                 <a:alpha val="12000"/>
               </a:srgbClr>
@@ -19866,7 +19745,7 @@
           <a:bodyPr wrap="square" lIns="0" tIns="0" rIns="0" bIns="0" rtlCol="0" anchor="ctr"/>
           <a:lstStyle/>
           <a:p>
-            <a:pPr indent="0" marL="0">
+            <a:pPr marL="0" indent="0">
               <a:buNone/>
             </a:pPr>
             <a:r>
@@ -19905,7 +19784,7 @@
           <a:bodyPr wrap="square" lIns="0" tIns="0" rIns="0" bIns="0" rtlCol="0" anchor="t"/>
           <a:lstStyle/>
           <a:p>
-            <a:pPr indent="0" marL="0">
+            <a:pPr marL="0" indent="0">
               <a:buNone/>
             </a:pPr>
             <a:r>
@@ -19944,7 +19823,7 @@
           <a:bodyPr wrap="square" rtlCol="0" anchor="ctr"/>
           <a:lstStyle/>
           <a:p>
-            <a:pPr indent="0" marL="0">
+            <a:pPr marL="0" indent="0">
               <a:buNone/>
             </a:pPr>
             <a:r>
@@ -19978,6 +19857,7 @@
         <a:solidFill>
           <a:srgbClr val="F7FAFC"/>
         </a:solidFill>
+        <a:effectLst/>
       </p:bgPr>
     </p:bg>
     <p:spTree>
@@ -20040,7 +19920,7 @@
           <a:bodyPr wrap="square" lIns="0" tIns="0" rIns="0" bIns="0" rtlCol="0" anchor="ctr"/>
           <a:lstStyle/>
           <a:p>
-            <a:pPr indent="0" marL="0">
+            <a:pPr marL="0" indent="0">
               <a:buNone/>
             </a:pPr>
             <a:r>
@@ -20079,7 +19959,7 @@
           <a:bodyPr wrap="square" lIns="0" tIns="0" rIns="0" bIns="0" rtlCol="0" anchor="ctr"/>
           <a:lstStyle/>
           <a:p>
-            <a:pPr indent="0" marL="0">
+            <a:pPr marL="0" indent="0">
               <a:buNone/>
             </a:pPr>
             <a:r>
@@ -20143,7 +20023,7 @@
           <a:bodyPr wrap="square" lIns="0" tIns="0" rIns="0" bIns="0" rtlCol="0" anchor="ctr"/>
           <a:lstStyle/>
           <a:p>
-            <a:pPr indent="0" marL="0">
+            <a:pPr marL="0" indent="0">
               <a:buNone/>
             </a:pPr>
             <a:r>
@@ -20182,7 +20062,7 @@
           <a:bodyPr wrap="square" lIns="0" tIns="0" rIns="0" bIns="0" rtlCol="0" anchor="ctr"/>
           <a:lstStyle/>
           <a:p>
-            <a:pPr indent="0" marL="0">
+            <a:pPr marL="0" indent="0">
               <a:buNone/>
             </a:pPr>
             <a:r>
@@ -20224,7 +20104,7 @@
             <a:prstDash val="solid"/>
           </a:ln>
           <a:effectLst>
-            <a:outerShdw sx="100000" sy="100000" kx="0" ky="0" algn="bl" rotWithShape="0" blurRad="101600" dist="25400" dir="8100000">
+            <a:outerShdw blurRad="101600" dist="25400" dir="8100000" algn="bl" rotWithShape="0">
               <a:srgbClr val="000000">
                 <a:alpha val="12000"/>
               </a:srgbClr>
@@ -20278,7 +20158,7 @@
           <a:bodyPr wrap="square" lIns="0" tIns="0" rIns="0" bIns="0" rtlCol="0" anchor="ctr"/>
           <a:lstStyle/>
           <a:p>
-            <a:pPr indent="0" marL="0">
+            <a:pPr marL="0" indent="0">
               <a:buNone/>
             </a:pPr>
             <a:r>
@@ -20317,7 +20197,7 @@
           <a:bodyPr wrap="square" lIns="0" tIns="0" rIns="0" bIns="0" rtlCol="0" anchor="ctr"/>
           <a:lstStyle/>
           <a:p>
-            <a:pPr indent="0" marL="0">
+            <a:pPr marL="0" indent="0">
               <a:buNone/>
             </a:pPr>
             <a:r>
@@ -20356,7 +20236,7 @@
           <a:bodyPr wrap="square" lIns="0" tIns="0" rIns="0" bIns="0" rtlCol="0" anchor="ctr"/>
           <a:lstStyle/>
           <a:p>
-            <a:pPr indent="0" marL="0">
+            <a:pPr marL="0" indent="0">
               <a:buNone/>
             </a:pPr>
             <a:r>
@@ -20373,7 +20253,7 @@
             <a:endParaRPr lang="en-US" sz="1000" dirty="0"/>
           </a:p>
           <a:p>
-            <a:pPr indent="0" marL="0">
+            <a:pPr marL="0" indent="0">
               <a:buNone/>
             </a:pPr>
             <a:r>
@@ -20437,7 +20317,7 @@
           <a:bodyPr wrap="square" lIns="0" tIns="0" rIns="0" bIns="0" rtlCol="0" anchor="ctr"/>
           <a:lstStyle/>
           <a:p>
-            <a:pPr algn="ctr" indent="0" marL="0">
+            <a:pPr marL="0" indent="0" algn="ctr">
               <a:buNone/>
             </a:pPr>
             <a:r>
@@ -20479,7 +20359,7 @@
             <a:prstDash val="solid"/>
           </a:ln>
           <a:effectLst>
-            <a:outerShdw sx="100000" sy="100000" kx="0" ky="0" algn="bl" rotWithShape="0" blurRad="101600" dist="25400" dir="8100000">
+            <a:outerShdw blurRad="101600" dist="25400" dir="8100000" algn="bl" rotWithShape="0">
               <a:srgbClr val="000000">
                 <a:alpha val="12000"/>
               </a:srgbClr>
@@ -20533,7 +20413,7 @@
           <a:bodyPr wrap="square" lIns="0" tIns="0" rIns="0" bIns="0" rtlCol="0" anchor="ctr"/>
           <a:lstStyle/>
           <a:p>
-            <a:pPr indent="0" marL="0">
+            <a:pPr marL="0" indent="0">
               <a:buNone/>
             </a:pPr>
             <a:r>
@@ -20572,7 +20452,7 @@
           <a:bodyPr wrap="square" lIns="0" tIns="0" rIns="0" bIns="0" rtlCol="0" anchor="ctr"/>
           <a:lstStyle/>
           <a:p>
-            <a:pPr indent="0" marL="0">
+            <a:pPr marL="0" indent="0">
               <a:buNone/>
             </a:pPr>
             <a:r>
@@ -20611,7 +20491,7 @@
           <a:bodyPr wrap="square" lIns="0" tIns="0" rIns="0" bIns="0" rtlCol="0" anchor="ctr"/>
           <a:lstStyle/>
           <a:p>
-            <a:pPr indent="0" marL="0">
+            <a:pPr marL="0" indent="0">
               <a:buNone/>
             </a:pPr>
             <a:r>
@@ -20628,7 +20508,7 @@
             <a:endParaRPr lang="en-US" sz="1000" dirty="0"/>
           </a:p>
           <a:p>
-            <a:pPr indent="0" marL="0">
+            <a:pPr marL="0" indent="0">
               <a:buNone/>
             </a:pPr>
             <a:r>
@@ -20692,7 +20572,7 @@
           <a:bodyPr wrap="square" lIns="0" tIns="0" rIns="0" bIns="0" rtlCol="0" anchor="ctr"/>
           <a:lstStyle/>
           <a:p>
-            <a:pPr algn="ctr" indent="0" marL="0">
+            <a:pPr marL="0" indent="0" algn="ctr">
               <a:buNone/>
             </a:pPr>
             <a:r>
@@ -20734,7 +20614,7 @@
             <a:prstDash val="solid"/>
           </a:ln>
           <a:effectLst>
-            <a:outerShdw sx="100000" sy="100000" kx="0" ky="0" algn="bl" rotWithShape="0" blurRad="101600" dist="25400" dir="8100000">
+            <a:outerShdw blurRad="101600" dist="25400" dir="8100000" algn="bl" rotWithShape="0">
               <a:srgbClr val="000000">
                 <a:alpha val="12000"/>
               </a:srgbClr>
@@ -20788,7 +20668,7 @@
           <a:bodyPr wrap="square" lIns="0" tIns="0" rIns="0" bIns="0" rtlCol="0" anchor="ctr"/>
           <a:lstStyle/>
           <a:p>
-            <a:pPr indent="0" marL="0">
+            <a:pPr marL="0" indent="0">
               <a:buNone/>
             </a:pPr>
             <a:r>
@@ -20827,7 +20707,7 @@
           <a:bodyPr wrap="square" lIns="0" tIns="0" rIns="0" bIns="0" rtlCol="0" anchor="ctr"/>
           <a:lstStyle/>
           <a:p>
-            <a:pPr indent="0" marL="0">
+            <a:pPr marL="0" indent="0">
               <a:buNone/>
             </a:pPr>
             <a:r>
@@ -20866,7 +20746,7 @@
           <a:bodyPr wrap="square" lIns="0" tIns="0" rIns="0" bIns="0" rtlCol="0" anchor="ctr"/>
           <a:lstStyle/>
           <a:p>
-            <a:pPr indent="0" marL="0">
+            <a:pPr marL="0" indent="0">
               <a:buNone/>
             </a:pPr>
             <a:r>
@@ -20883,7 +20763,7 @@
             <a:endParaRPr lang="en-US" sz="1000" dirty="0"/>
           </a:p>
           <a:p>
-            <a:pPr indent="0" marL="0">
+            <a:pPr marL="0" indent="0">
               <a:buNone/>
             </a:pPr>
             <a:r>
@@ -20947,7 +20827,7 @@
           <a:bodyPr wrap="square" lIns="0" tIns="0" rIns="0" bIns="0" rtlCol="0" anchor="ctr"/>
           <a:lstStyle/>
           <a:p>
-            <a:pPr algn="ctr" indent="0" marL="0">
+            <a:pPr marL="0" indent="0" algn="ctr">
               <a:buNone/>
             </a:pPr>
             <a:r>
@@ -20989,7 +20869,7 @@
             <a:prstDash val="solid"/>
           </a:ln>
           <a:effectLst>
-            <a:outerShdw sx="100000" sy="100000" kx="0" ky="0" algn="bl" rotWithShape="0" blurRad="101600" dist="25400" dir="8100000">
+            <a:outerShdw blurRad="101600" dist="25400" dir="8100000" algn="bl" rotWithShape="0">
               <a:srgbClr val="000000">
                 <a:alpha val="12000"/>
               </a:srgbClr>
@@ -21043,7 +20923,7 @@
           <a:bodyPr wrap="square" lIns="0" tIns="0" rIns="0" bIns="0" rtlCol="0" anchor="ctr"/>
           <a:lstStyle/>
           <a:p>
-            <a:pPr indent="0" marL="0">
+            <a:pPr marL="0" indent="0">
               <a:buNone/>
             </a:pPr>
             <a:r>
@@ -21082,7 +20962,7 @@
           <a:bodyPr wrap="square" lIns="0" tIns="0" rIns="0" bIns="0" rtlCol="0" anchor="ctr"/>
           <a:lstStyle/>
           <a:p>
-            <a:pPr indent="0" marL="0">
+            <a:pPr marL="0" indent="0">
               <a:buNone/>
             </a:pPr>
             <a:r>
@@ -21121,7 +21001,7 @@
           <a:bodyPr wrap="square" lIns="0" tIns="0" rIns="0" bIns="0" rtlCol="0" anchor="ctr"/>
           <a:lstStyle/>
           <a:p>
-            <a:pPr indent="0" marL="0">
+            <a:pPr marL="0" indent="0">
               <a:buNone/>
             </a:pPr>
             <a:r>
@@ -21138,7 +21018,7 @@
             <a:endParaRPr lang="en-US" sz="1000" dirty="0"/>
           </a:p>
           <a:p>
-            <a:pPr indent="0" marL="0">
+            <a:pPr marL="0" indent="0">
               <a:buNone/>
             </a:pPr>
             <a:r>
@@ -21202,7 +21082,7 @@
           <a:bodyPr wrap="square" lIns="0" tIns="0" rIns="0" bIns="0" rtlCol="0" anchor="ctr"/>
           <a:lstStyle/>
           <a:p>
-            <a:pPr algn="ctr" indent="0" marL="0">
+            <a:pPr marL="0" indent="0" algn="ctr">
               <a:buNone/>
             </a:pPr>
             <a:r>
@@ -21244,7 +21124,7 @@
             <a:prstDash val="solid"/>
           </a:ln>
           <a:effectLst>
-            <a:outerShdw sx="100000" sy="100000" kx="0" ky="0" algn="bl" rotWithShape="0" blurRad="101600" dist="25400" dir="8100000">
+            <a:outerShdw blurRad="101600" dist="25400" dir="8100000" algn="bl" rotWithShape="0">
               <a:srgbClr val="000000">
                 <a:alpha val="12000"/>
               </a:srgbClr>
@@ -21298,7 +21178,7 @@
           <a:bodyPr wrap="square" lIns="0" tIns="0" rIns="0" bIns="0" rtlCol="0" anchor="ctr"/>
           <a:lstStyle/>
           <a:p>
-            <a:pPr indent="0" marL="0">
+            <a:pPr marL="0" indent="0">
               <a:buNone/>
             </a:pPr>
             <a:r>
@@ -21337,7 +21217,7 @@
           <a:bodyPr wrap="square" lIns="0" tIns="0" rIns="0" bIns="0" rtlCol="0" anchor="ctr"/>
           <a:lstStyle/>
           <a:p>
-            <a:pPr indent="0" marL="0">
+            <a:pPr marL="0" indent="0">
               <a:buNone/>
             </a:pPr>
             <a:r>
@@ -21376,7 +21256,7 @@
           <a:bodyPr wrap="square" lIns="0" tIns="0" rIns="0" bIns="0" rtlCol="0" anchor="ctr"/>
           <a:lstStyle/>
           <a:p>
-            <a:pPr indent="0" marL="0">
+            <a:pPr marL="0" indent="0">
               <a:buNone/>
             </a:pPr>
             <a:r>
@@ -21393,7 +21273,7 @@
             <a:endParaRPr lang="en-US" sz="1000" dirty="0"/>
           </a:p>
           <a:p>
-            <a:pPr indent="0" marL="0">
+            <a:pPr marL="0" indent="0">
               <a:buNone/>
             </a:pPr>
             <a:r>
@@ -21457,7 +21337,7 @@
           <a:bodyPr wrap="square" lIns="0" tIns="0" rIns="0" bIns="0" rtlCol="0" anchor="ctr"/>
           <a:lstStyle/>
           <a:p>
-            <a:pPr algn="ctr" indent="0" marL="0">
+            <a:pPr marL="0" indent="0" algn="ctr">
               <a:buNone/>
             </a:pPr>
             <a:r>
@@ -21499,7 +21379,7 @@
             <a:prstDash val="solid"/>
           </a:ln>
           <a:effectLst>
-            <a:outerShdw sx="100000" sy="100000" kx="0" ky="0" algn="bl" rotWithShape="0" blurRad="101600" dist="25400" dir="8100000">
+            <a:outerShdw blurRad="101600" dist="25400" dir="8100000" algn="bl" rotWithShape="0">
               <a:srgbClr val="000000">
                 <a:alpha val="12000"/>
               </a:srgbClr>
@@ -21553,7 +21433,7 @@
           <a:bodyPr wrap="square" lIns="0" tIns="0" rIns="0" bIns="0" rtlCol="0" anchor="ctr"/>
           <a:lstStyle/>
           <a:p>
-            <a:pPr indent="0" marL="0">
+            <a:pPr marL="0" indent="0">
               <a:buNone/>
             </a:pPr>
             <a:r>
@@ -21592,7 +21472,7 @@
           <a:bodyPr wrap="square" lIns="0" tIns="0" rIns="0" bIns="0" rtlCol="0" anchor="ctr"/>
           <a:lstStyle/>
           <a:p>
-            <a:pPr indent="0" marL="0">
+            <a:pPr marL="0" indent="0">
               <a:buNone/>
             </a:pPr>
             <a:r>
@@ -21631,7 +21511,7 @@
           <a:bodyPr wrap="square" lIns="0" tIns="0" rIns="0" bIns="0" rtlCol="0" anchor="ctr"/>
           <a:lstStyle/>
           <a:p>
-            <a:pPr indent="0" marL="0">
+            <a:pPr marL="0" indent="0">
               <a:buNone/>
             </a:pPr>
             <a:r>
@@ -21648,7 +21528,7 @@
             <a:endParaRPr lang="en-US" sz="1000" dirty="0"/>
           </a:p>
           <a:p>
-            <a:pPr indent="0" marL="0">
+            <a:pPr marL="0" indent="0">
               <a:buNone/>
             </a:pPr>
             <a:r>
@@ -21712,7 +21592,7 @@
           <a:bodyPr wrap="square" lIns="0" tIns="0" rIns="0" bIns="0" rtlCol="0" anchor="ctr"/>
           <a:lstStyle/>
           <a:p>
-            <a:pPr algn="ctr" indent="0" marL="0">
+            <a:pPr marL="0" indent="0" algn="ctr">
               <a:buNone/>
             </a:pPr>
             <a:r>
@@ -21746,6 +21626,7 @@
         <a:solidFill>
           <a:srgbClr val="F7FAFC"/>
         </a:solidFill>
+        <a:effectLst/>
       </p:bgPr>
     </p:bg>
     <p:spTree>
@@ -21808,7 +21689,7 @@
           <a:bodyPr wrap="square" lIns="0" tIns="0" rIns="0" bIns="0" rtlCol="0" anchor="ctr"/>
           <a:lstStyle/>
           <a:p>
-            <a:pPr indent="0" marL="0">
+            <a:pPr marL="0" indent="0">
               <a:buNone/>
             </a:pPr>
             <a:r>
@@ -21847,7 +21728,7 @@
           <a:bodyPr wrap="square" lIns="0" tIns="0" rIns="0" bIns="0" rtlCol="0" anchor="ctr"/>
           <a:lstStyle/>
           <a:p>
-            <a:pPr indent="0" marL="0">
+            <a:pPr marL="0" indent="0">
               <a:buNone/>
             </a:pPr>
             <a:r>
@@ -21911,7 +21792,7 @@
           <a:bodyPr wrap="square" lIns="0" tIns="0" rIns="0" bIns="0" rtlCol="0" anchor="ctr"/>
           <a:lstStyle/>
           <a:p>
-            <a:pPr indent="0" marL="0">
+            <a:pPr marL="0" indent="0">
               <a:buNone/>
             </a:pPr>
             <a:r>
@@ -21950,7 +21831,7 @@
           <a:bodyPr wrap="square" lIns="0" tIns="0" rIns="0" bIns="0" rtlCol="0" anchor="ctr"/>
           <a:lstStyle/>
           <a:p>
-            <a:pPr indent="0" marL="0">
+            <a:pPr marL="0" indent="0">
               <a:buNone/>
             </a:pPr>
             <a:r>
@@ -21992,7 +21873,7 @@
             <a:prstDash val="solid"/>
           </a:ln>
           <a:effectLst>
-            <a:outerShdw sx="100000" sy="100000" kx="0" ky="0" algn="bl" rotWithShape="0" blurRad="101600" dist="25400" dir="8100000">
+            <a:outerShdw blurRad="101600" dist="25400" dir="8100000" algn="bl" rotWithShape="0">
               <a:srgbClr val="000000">
                 <a:alpha val="12000"/>
               </a:srgbClr>
@@ -22021,7 +21902,7 @@
           <a:bodyPr wrap="square" lIns="0" tIns="0" rIns="0" bIns="0" rtlCol="0" anchor="ctr"/>
           <a:lstStyle/>
           <a:p>
-            <a:pPr indent="0" marL="0">
+            <a:pPr marL="0" indent="0">
               <a:buNone/>
             </a:pPr>
             <a:r>
@@ -22060,7 +21941,7 @@
           <a:bodyPr wrap="none" rtlCol="0" anchor="t"/>
           <a:lstStyle/>
           <a:p>
-            <a:pPr indent="0" marL="0">
+            <a:pPr marL="0" indent="0">
               <a:buNone/>
             </a:pPr>
             <a:r>
@@ -22077,13 +21958,13 @@
             <a:endParaRPr lang="en-US" sz="1100" dirty="0"/>
           </a:p>
           <a:p>
-            <a:pPr indent="0" marL="0">
+            <a:pPr marL="0" indent="0">
               <a:buNone/>
             </a:pPr>
             <a:endParaRPr lang="en-US" sz="1100" dirty="0"/>
           </a:p>
           <a:p>
-            <a:pPr indent="0" marL="0">
+            <a:pPr marL="0" indent="0">
               <a:buNone/>
             </a:pPr>
             <a:r>
@@ -22100,7 +21981,7 @@
             <a:endParaRPr lang="en-US" sz="1100" dirty="0"/>
           </a:p>
           <a:p>
-            <a:pPr indent="0" marL="0">
+            <a:pPr marL="0" indent="0">
               <a:buNone/>
             </a:pPr>
             <a:r>
@@ -22117,13 +21998,13 @@
             <a:endParaRPr lang="en-US" sz="1100" dirty="0"/>
           </a:p>
           <a:p>
-            <a:pPr indent="0" marL="0">
+            <a:pPr marL="0" indent="0">
               <a:buNone/>
             </a:pPr>
             <a:endParaRPr lang="en-US" sz="1100" dirty="0"/>
           </a:p>
           <a:p>
-            <a:pPr indent="0" marL="0">
+            <a:pPr marL="0" indent="0">
               <a:buNone/>
             </a:pPr>
             <a:r>
@@ -22140,13 +22021,13 @@
             <a:endParaRPr lang="en-US" sz="1100" dirty="0"/>
           </a:p>
           <a:p>
-            <a:pPr indent="0" marL="0">
+            <a:pPr marL="0" indent="0">
               <a:buNone/>
             </a:pPr>
             <a:endParaRPr lang="en-US" sz="1100" dirty="0"/>
           </a:p>
           <a:p>
-            <a:pPr indent="0" marL="0">
+            <a:pPr marL="0" indent="0">
               <a:buNone/>
             </a:pPr>
             <a:r>
@@ -22163,7 +22044,7 @@
             <a:endParaRPr lang="en-US" sz="1100" dirty="0"/>
           </a:p>
           <a:p>
-            <a:pPr indent="0" marL="0">
+            <a:pPr marL="0" indent="0">
               <a:buNone/>
             </a:pPr>
             <a:r>
@@ -22202,7 +22083,7 @@
           <a:bodyPr wrap="square" lIns="0" tIns="0" rIns="0" bIns="0" rtlCol="0" anchor="ctr"/>
           <a:lstStyle/>
           <a:p>
-            <a:pPr indent="0" marL="0">
+            <a:pPr marL="0" indent="0">
               <a:buNone/>
             </a:pPr>
             <a:r>
@@ -22222,7 +22103,7 @@
       </p:sp>
       <p:graphicFrame>
         <p:nvGraphicFramePr>
-          <p:cNvPr id="10" name="Table 0"/>
+          <p:cNvPr id="12" name="Table 0"/>
           <p:cNvGraphicFramePr>
             <a:graphicFrameLocks noGrp="1"/>
           </p:cNvGraphicFramePr>
@@ -22236,17 +22117,41 @@
         </p:nvGraphicFramePr>
         <p:xfrm>
           <a:off x="5120640" y="1325880"/>
-          <a:ext cx="3794760" cy="2011680"/>
+          <a:ext cx="3794760" cy="2084832"/>
         </p:xfrm>
         <a:graphic>
           <a:graphicData uri="http://schemas.openxmlformats.org/drawingml/2006/table">
             <a:tbl>
               <a:tblPr/>
               <a:tblGrid>
-                <a:gridCol w="1280160"/>
-                <a:gridCol w="777240"/>
-                <a:gridCol w="640080"/>
-                <a:gridCol w="1097280"/>
+                <a:gridCol w="1280160">
+                  <a:extLst>
+                    <a:ext uri="{9D8B030D-6E8A-4147-A177-3AD203B41FA5}">
+                      <a16:colId xmlns:a16="http://schemas.microsoft.com/office/drawing/2014/main" val="20000"/>
+                    </a:ext>
+                  </a:extLst>
+                </a:gridCol>
+                <a:gridCol w="777240">
+                  <a:extLst>
+                    <a:ext uri="{9D8B030D-6E8A-4147-A177-3AD203B41FA5}">
+                      <a16:colId xmlns:a16="http://schemas.microsoft.com/office/drawing/2014/main" val="20001"/>
+                    </a:ext>
+                  </a:extLst>
+                </a:gridCol>
+                <a:gridCol w="640080">
+                  <a:extLst>
+                    <a:ext uri="{9D8B030D-6E8A-4147-A177-3AD203B41FA5}">
+                      <a16:colId xmlns:a16="http://schemas.microsoft.com/office/drawing/2014/main" val="20002"/>
+                    </a:ext>
+                  </a:extLst>
+                </a:gridCol>
+                <a:gridCol w="1097280">
+                  <a:extLst>
+                    <a:ext uri="{9D8B030D-6E8A-4147-A177-3AD203B41FA5}">
+                      <a16:colId xmlns:a16="http://schemas.microsoft.com/office/drawing/2014/main" val="20003"/>
+                    </a:ext>
+                  </a:extLst>
+                </a:gridCol>
               </a:tblGrid>
               <a:tr h="347472">
                 <a:tc>
@@ -22254,7 +22159,7 @@
                     <a:bodyPr/>
                     <a:lstStyle/>
                     <a:p>
-                      <a:pPr indent="0" marL="0">
+                      <a:pPr marL="0" indent="0">
                         <a:buNone/>
                       </a:pPr>
                       <a:r>
@@ -22275,7 +22180,7 @@
                       </a:endParaRPr>
                     </a:p>
                   </a:txBody>
-                  <a:tcPr marL="91440" marR="91440" marT="45720" marB="45720">
+                  <a:tcPr>
                     <a:lnL w="12700" cap="flat" cmpd="sng" algn="ctr">
                       <a:solidFill>
                         <a:srgbClr val="CCCCCC"/>
@@ -22319,7 +22224,7 @@
                     <a:bodyPr/>
                     <a:lstStyle/>
                     <a:p>
-                      <a:pPr indent="0" marL="0">
+                      <a:pPr marL="0" indent="0">
                         <a:buNone/>
                       </a:pPr>
                       <a:r>
@@ -22340,7 +22245,7 @@
                       </a:endParaRPr>
                     </a:p>
                   </a:txBody>
-                  <a:tcPr marL="91440" marR="91440" marT="45720" marB="45720">
+                  <a:tcPr>
                     <a:lnL w="12700" cap="flat" cmpd="sng" algn="ctr">
                       <a:solidFill>
                         <a:srgbClr val="CCCCCC"/>
@@ -22384,7 +22289,7 @@
                     <a:bodyPr/>
                     <a:lstStyle/>
                     <a:p>
-                      <a:pPr indent="0" marL="0">
+                      <a:pPr marL="0" indent="0">
                         <a:buNone/>
                       </a:pPr>
                       <a:r>
@@ -22405,7 +22310,7 @@
                       </a:endParaRPr>
                     </a:p>
                   </a:txBody>
-                  <a:tcPr marL="91440" marR="91440" marT="45720" marB="45720">
+                  <a:tcPr>
                     <a:lnL w="12700" cap="flat" cmpd="sng" algn="ctr">
                       <a:solidFill>
                         <a:srgbClr val="CCCCCC"/>
@@ -22449,7 +22354,7 @@
                     <a:bodyPr/>
                     <a:lstStyle/>
                     <a:p>
-                      <a:pPr indent="0" marL="0">
+                      <a:pPr marL="0" indent="0">
                         <a:buNone/>
                       </a:pPr>
                       <a:r>
@@ -22470,7 +22375,7 @@
                       </a:endParaRPr>
                     </a:p>
                   </a:txBody>
-                  <a:tcPr marL="91440" marR="91440" marT="45720" marB="45720">
+                  <a:tcPr>
                     <a:lnL w="12700" cap="flat" cmpd="sng" algn="ctr">
                       <a:solidFill>
                         <a:srgbClr val="CCCCCC"/>
@@ -22509,6 +22414,11 @@
                     </a:lnB>
                   </a:tcPr>
                 </a:tc>
+                <a:extLst>
+                  <a:ext uri="{0D108BD9-81ED-4DB2-BD59-A6C34878D82A}">
+                    <a16:rowId xmlns:a16="http://schemas.microsoft.com/office/drawing/2014/main" val="10000"/>
+                  </a:ext>
+                </a:extLst>
               </a:tr>
               <a:tr h="347472">
                 <a:tc>
@@ -22516,7 +22426,7 @@
                     <a:bodyPr/>
                     <a:lstStyle/>
                     <a:p>
-                      <a:pPr indent="0" marL="0">
+                      <a:pPr marL="0" indent="0">
                         <a:buNone/>
                       </a:pPr>
                       <a:r>
@@ -22537,7 +22447,7 @@
                       </a:endParaRPr>
                     </a:p>
                   </a:txBody>
-                  <a:tcPr marL="91440" marR="91440" marT="45720" marB="45720">
+                  <a:tcPr>
                     <a:lnL w="12700" cap="flat" cmpd="sng" algn="ctr">
                       <a:solidFill>
                         <a:srgbClr val="CCCCCC"/>
@@ -22581,7 +22491,7 @@
                     <a:bodyPr/>
                     <a:lstStyle/>
                     <a:p>
-                      <a:pPr indent="0" marL="0">
+                      <a:pPr marL="0" indent="0">
                         <a:buNone/>
                       </a:pPr>
                       <a:r>
@@ -22602,7 +22512,7 @@
                       </a:endParaRPr>
                     </a:p>
                   </a:txBody>
-                  <a:tcPr marL="91440" marR="91440" marT="45720" marB="45720">
+                  <a:tcPr>
                     <a:lnL w="12700" cap="flat" cmpd="sng" algn="ctr">
                       <a:solidFill>
                         <a:srgbClr val="CCCCCC"/>
@@ -22646,7 +22556,7 @@
                     <a:bodyPr/>
                     <a:lstStyle/>
                     <a:p>
-                      <a:pPr indent="0" marL="0">
+                      <a:pPr marL="0" indent="0">
                         <a:buNone/>
                       </a:pPr>
                       <a:r>
@@ -22667,7 +22577,7 @@
                       </a:endParaRPr>
                     </a:p>
                   </a:txBody>
-                  <a:tcPr marL="91440" marR="91440" marT="45720" marB="45720">
+                  <a:tcPr>
                     <a:lnL w="12700" cap="flat" cmpd="sng" algn="ctr">
                       <a:solidFill>
                         <a:srgbClr val="CCCCCC"/>
@@ -22711,7 +22621,7 @@
                     <a:bodyPr/>
                     <a:lstStyle/>
                     <a:p>
-                      <a:pPr indent="0" marL="0">
+                      <a:pPr marL="0" indent="0">
                         <a:buNone/>
                       </a:pPr>
                       <a:r>
@@ -22732,7 +22642,7 @@
                       </a:endParaRPr>
                     </a:p>
                   </a:txBody>
-                  <a:tcPr marL="91440" marR="91440" marT="45720" marB="45720">
+                  <a:tcPr>
                     <a:lnL w="12700" cap="flat" cmpd="sng" algn="ctr">
                       <a:solidFill>
                         <a:srgbClr val="CCCCCC"/>
@@ -22771,6 +22681,11 @@
                     </a:lnB>
                   </a:tcPr>
                 </a:tc>
+                <a:extLst>
+                  <a:ext uri="{0D108BD9-81ED-4DB2-BD59-A6C34878D82A}">
+                    <a16:rowId xmlns:a16="http://schemas.microsoft.com/office/drawing/2014/main" val="10001"/>
+                  </a:ext>
+                </a:extLst>
               </a:tr>
               <a:tr h="347472">
                 <a:tc>
@@ -22778,7 +22693,7 @@
                     <a:bodyPr/>
                     <a:lstStyle/>
                     <a:p>
-                      <a:pPr indent="0" marL="0">
+                      <a:pPr marL="0" indent="0">
                         <a:buNone/>
                       </a:pPr>
                       <a:r>
@@ -22799,7 +22714,7 @@
                       </a:endParaRPr>
                     </a:p>
                   </a:txBody>
-                  <a:tcPr marL="91440" marR="91440" marT="45720" marB="45720">
+                  <a:tcPr>
                     <a:lnL w="12700" cap="flat" cmpd="sng" algn="ctr">
                       <a:solidFill>
                         <a:srgbClr val="CCCCCC"/>
@@ -22843,7 +22758,7 @@
                     <a:bodyPr/>
                     <a:lstStyle/>
                     <a:p>
-                      <a:pPr indent="0" marL="0">
+                      <a:pPr marL="0" indent="0">
                         <a:buNone/>
                       </a:pPr>
                       <a:r>
@@ -22864,7 +22779,7 @@
                       </a:endParaRPr>
                     </a:p>
                   </a:txBody>
-                  <a:tcPr marL="91440" marR="91440" marT="45720" marB="45720">
+                  <a:tcPr>
                     <a:lnL w="12700" cap="flat" cmpd="sng" algn="ctr">
                       <a:solidFill>
                         <a:srgbClr val="CCCCCC"/>
@@ -22908,7 +22823,7 @@
                     <a:bodyPr/>
                     <a:lstStyle/>
                     <a:p>
-                      <a:pPr indent="0" marL="0">
+                      <a:pPr marL="0" indent="0">
                         <a:buNone/>
                       </a:pPr>
                       <a:r>
@@ -22929,7 +22844,7 @@
                       </a:endParaRPr>
                     </a:p>
                   </a:txBody>
-                  <a:tcPr marL="91440" marR="91440" marT="45720" marB="45720">
+                  <a:tcPr>
                     <a:lnL w="12700" cap="flat" cmpd="sng" algn="ctr">
                       <a:solidFill>
                         <a:srgbClr val="CCCCCC"/>
@@ -22973,7 +22888,7 @@
                     <a:bodyPr/>
                     <a:lstStyle/>
                     <a:p>
-                      <a:pPr indent="0" marL="0">
+                      <a:pPr marL="0" indent="0">
                         <a:buNone/>
                       </a:pPr>
                       <a:r>
@@ -22994,7 +22909,7 @@
                       </a:endParaRPr>
                     </a:p>
                   </a:txBody>
-                  <a:tcPr marL="91440" marR="91440" marT="45720" marB="45720">
+                  <a:tcPr>
                     <a:lnL w="12700" cap="flat" cmpd="sng" algn="ctr">
                       <a:solidFill>
                         <a:srgbClr val="CCCCCC"/>
@@ -23033,6 +22948,11 @@
                     </a:lnB>
                   </a:tcPr>
                 </a:tc>
+                <a:extLst>
+                  <a:ext uri="{0D108BD9-81ED-4DB2-BD59-A6C34878D82A}">
+                    <a16:rowId xmlns:a16="http://schemas.microsoft.com/office/drawing/2014/main" val="10002"/>
+                  </a:ext>
+                </a:extLst>
               </a:tr>
               <a:tr h="347472">
                 <a:tc>
@@ -23040,7 +22960,7 @@
                     <a:bodyPr/>
                     <a:lstStyle/>
                     <a:p>
-                      <a:pPr indent="0" marL="0">
+                      <a:pPr marL="0" indent="0">
                         <a:buNone/>
                       </a:pPr>
                       <a:r>
@@ -23061,7 +22981,7 @@
                       </a:endParaRPr>
                     </a:p>
                   </a:txBody>
-                  <a:tcPr marL="91440" marR="91440" marT="45720" marB="45720">
+                  <a:tcPr>
                     <a:lnL w="12700" cap="flat" cmpd="sng" algn="ctr">
                       <a:solidFill>
                         <a:srgbClr val="CCCCCC"/>
@@ -23105,7 +23025,7 @@
                     <a:bodyPr/>
                     <a:lstStyle/>
                     <a:p>
-                      <a:pPr indent="0" marL="0">
+                      <a:pPr marL="0" indent="0">
                         <a:buNone/>
                       </a:pPr>
                       <a:r>
@@ -23126,7 +23046,7 @@
                       </a:endParaRPr>
                     </a:p>
                   </a:txBody>
-                  <a:tcPr marL="91440" marR="91440" marT="45720" marB="45720">
+                  <a:tcPr>
                     <a:lnL w="12700" cap="flat" cmpd="sng" algn="ctr">
                       <a:solidFill>
                         <a:srgbClr val="CCCCCC"/>
@@ -23170,7 +23090,7 @@
                     <a:bodyPr/>
                     <a:lstStyle/>
                     <a:p>
-                      <a:pPr indent="0" marL="0">
+                      <a:pPr marL="0" indent="0">
                         <a:buNone/>
                       </a:pPr>
                       <a:r>
@@ -23191,7 +23111,7 @@
                       </a:endParaRPr>
                     </a:p>
                   </a:txBody>
-                  <a:tcPr marL="91440" marR="91440" marT="45720" marB="45720">
+                  <a:tcPr>
                     <a:lnL w="12700" cap="flat" cmpd="sng" algn="ctr">
                       <a:solidFill>
                         <a:srgbClr val="CCCCCC"/>
@@ -23235,7 +23155,7 @@
                     <a:bodyPr/>
                     <a:lstStyle/>
                     <a:p>
-                      <a:pPr indent="0" marL="0">
+                      <a:pPr marL="0" indent="0">
                         <a:buNone/>
                       </a:pPr>
                       <a:r>
@@ -23256,7 +23176,7 @@
                       </a:endParaRPr>
                     </a:p>
                   </a:txBody>
-                  <a:tcPr marL="91440" marR="91440" marT="45720" marB="45720">
+                  <a:tcPr>
                     <a:lnL w="12700" cap="flat" cmpd="sng" algn="ctr">
                       <a:solidFill>
                         <a:srgbClr val="CCCCCC"/>
@@ -23295,6 +23215,11 @@
                     </a:lnB>
                   </a:tcPr>
                 </a:tc>
+                <a:extLst>
+                  <a:ext uri="{0D108BD9-81ED-4DB2-BD59-A6C34878D82A}">
+                    <a16:rowId xmlns:a16="http://schemas.microsoft.com/office/drawing/2014/main" val="10003"/>
+                  </a:ext>
+                </a:extLst>
               </a:tr>
               <a:tr h="347472">
                 <a:tc>
@@ -23302,7 +23227,7 @@
                     <a:bodyPr/>
                     <a:lstStyle/>
                     <a:p>
-                      <a:pPr indent="0" marL="0">
+                      <a:pPr marL="0" indent="0">
                         <a:buNone/>
                       </a:pPr>
                       <a:r>
@@ -23323,7 +23248,7 @@
                       </a:endParaRPr>
                     </a:p>
                   </a:txBody>
-                  <a:tcPr marL="91440" marR="91440" marT="45720" marB="45720">
+                  <a:tcPr>
                     <a:lnL w="12700" cap="flat" cmpd="sng" algn="ctr">
                       <a:solidFill>
                         <a:srgbClr val="CCCCCC"/>
@@ -23367,7 +23292,7 @@
                     <a:bodyPr/>
                     <a:lstStyle/>
                     <a:p>
-                      <a:pPr indent="0" marL="0">
+                      <a:pPr marL="0" indent="0">
                         <a:buNone/>
                       </a:pPr>
                       <a:r>
@@ -23388,7 +23313,7 @@
                       </a:endParaRPr>
                     </a:p>
                   </a:txBody>
-                  <a:tcPr marL="91440" marR="91440" marT="45720" marB="45720">
+                  <a:tcPr>
                     <a:lnL w="12700" cap="flat" cmpd="sng" algn="ctr">
                       <a:solidFill>
                         <a:srgbClr val="CCCCCC"/>
@@ -23432,7 +23357,7 @@
                     <a:bodyPr/>
                     <a:lstStyle/>
                     <a:p>
-                      <a:pPr indent="0" marL="0">
+                      <a:pPr marL="0" indent="0">
                         <a:buNone/>
                       </a:pPr>
                       <a:r>
@@ -23453,7 +23378,7 @@
                       </a:endParaRPr>
                     </a:p>
                   </a:txBody>
-                  <a:tcPr marL="91440" marR="91440" marT="45720" marB="45720">
+                  <a:tcPr>
                     <a:lnL w="12700" cap="flat" cmpd="sng" algn="ctr">
                       <a:solidFill>
                         <a:srgbClr val="CCCCCC"/>
@@ -23497,7 +23422,7 @@
                     <a:bodyPr/>
                     <a:lstStyle/>
                     <a:p>
-                      <a:pPr indent="0" marL="0">
+                      <a:pPr marL="0" indent="0">
                         <a:buNone/>
                       </a:pPr>
                       <a:r>
@@ -23518,7 +23443,7 @@
                       </a:endParaRPr>
                     </a:p>
                   </a:txBody>
-                  <a:tcPr marL="91440" marR="91440" marT="45720" marB="45720">
+                  <a:tcPr>
                     <a:lnL w="12700" cap="flat" cmpd="sng" algn="ctr">
                       <a:solidFill>
                         <a:srgbClr val="CCCCCC"/>
@@ -23557,6 +23482,11 @@
                     </a:lnB>
                   </a:tcPr>
                 </a:tc>
+                <a:extLst>
+                  <a:ext uri="{0D108BD9-81ED-4DB2-BD59-A6C34878D82A}">
+                    <a16:rowId xmlns:a16="http://schemas.microsoft.com/office/drawing/2014/main" val="10004"/>
+                  </a:ext>
+                </a:extLst>
               </a:tr>
               <a:tr h="347472">
                 <a:tc>
@@ -23564,7 +23494,7 @@
                     <a:bodyPr/>
                     <a:lstStyle/>
                     <a:p>
-                      <a:pPr indent="0" marL="0">
+                      <a:pPr marL="0" indent="0">
                         <a:buNone/>
                       </a:pPr>
                       <a:r>
@@ -23585,7 +23515,7 @@
                       </a:endParaRPr>
                     </a:p>
                   </a:txBody>
-                  <a:tcPr marL="91440" marR="91440" marT="45720" marB="45720">
+                  <a:tcPr>
                     <a:lnL w="12700" cap="flat" cmpd="sng" algn="ctr">
                       <a:solidFill>
                         <a:srgbClr val="CCCCCC"/>
@@ -23629,7 +23559,7 @@
                     <a:bodyPr/>
                     <a:lstStyle/>
                     <a:p>
-                      <a:pPr indent="0" marL="0">
+                      <a:pPr marL="0" indent="0">
                         <a:buNone/>
                       </a:pPr>
                       <a:r>
@@ -23650,7 +23580,7 @@
                       </a:endParaRPr>
                     </a:p>
                   </a:txBody>
-                  <a:tcPr marL="91440" marR="91440" marT="45720" marB="45720">
+                  <a:tcPr>
                     <a:lnL w="12700" cap="flat" cmpd="sng" algn="ctr">
                       <a:solidFill>
                         <a:srgbClr val="CCCCCC"/>
@@ -23694,7 +23624,7 @@
                     <a:bodyPr/>
                     <a:lstStyle/>
                     <a:p>
-                      <a:pPr indent="0" marL="0">
+                      <a:pPr marL="0" indent="0">
                         <a:buNone/>
                       </a:pPr>
                       <a:r>
@@ -23715,7 +23645,7 @@
                       </a:endParaRPr>
                     </a:p>
                   </a:txBody>
-                  <a:tcPr marL="91440" marR="91440" marT="45720" marB="45720">
+                  <a:tcPr>
                     <a:lnL w="12700" cap="flat" cmpd="sng" algn="ctr">
                       <a:solidFill>
                         <a:srgbClr val="CCCCCC"/>
@@ -23759,7 +23689,7 @@
                     <a:bodyPr/>
                     <a:lstStyle/>
                     <a:p>
-                      <a:pPr indent="0" marL="0">
+                      <a:pPr marL="0" indent="0">
                         <a:buNone/>
                       </a:pPr>
                       <a:r>
@@ -23780,7 +23710,7 @@
                       </a:endParaRPr>
                     </a:p>
                   </a:txBody>
-                  <a:tcPr marL="91440" marR="91440" marT="45720" marB="45720">
+                  <a:tcPr>
                     <a:lnL w="12700" cap="flat" cmpd="sng" algn="ctr">
                       <a:solidFill>
                         <a:srgbClr val="CCCCCC"/>
@@ -23819,6 +23749,11 @@
                     </a:lnB>
                   </a:tcPr>
                 </a:tc>
+                <a:extLst>
+                  <a:ext uri="{0D108BD9-81ED-4DB2-BD59-A6C34878D82A}">
+                    <a16:rowId xmlns:a16="http://schemas.microsoft.com/office/drawing/2014/main" val="10005"/>
+                  </a:ext>
+                </a:extLst>
               </a:tr>
             </a:tbl>
           </a:graphicData>
@@ -23845,7 +23780,7 @@
           <a:bodyPr wrap="square" rtlCol="0" anchor="ctr"/>
           <a:lstStyle/>
           <a:p>
-            <a:pPr indent="0" marL="0">
+            <a:pPr marL="0" indent="0">
               <a:buNone/>
             </a:pPr>
             <a:r>
@@ -23884,7 +23819,7 @@
           <a:bodyPr wrap="square" lIns="0" tIns="0" rIns="0" bIns="0" rtlCol="0" anchor="ctr"/>
           <a:lstStyle/>
           <a:p>
-            <a:pPr indent="0" marL="0">
+            <a:pPr marL="0" indent="0">
               <a:buNone/>
             </a:pPr>
             <a:r>
@@ -23926,7 +23861,7 @@
             <a:prstDash val="solid"/>
           </a:ln>
           <a:effectLst>
-            <a:outerShdw sx="100000" sy="100000" kx="0" ky="0" algn="bl" rotWithShape="0" blurRad="101600" dist="25400" dir="8100000">
+            <a:outerShdw blurRad="101600" dist="25400" dir="8100000" algn="bl" rotWithShape="0">
               <a:srgbClr val="000000">
                 <a:alpha val="12000"/>
               </a:srgbClr>
@@ -23955,7 +23890,7 @@
           <a:bodyPr wrap="square" lIns="0" tIns="0" rIns="0" bIns="0" rtlCol="0" anchor="ctr"/>
           <a:lstStyle/>
           <a:p>
-            <a:pPr algn="ctr" indent="0" marL="0">
+            <a:pPr marL="0" indent="0" algn="ctr">
               <a:buNone/>
             </a:pPr>
             <a:r>
@@ -23994,7 +23929,7 @@
           <a:bodyPr wrap="square" lIns="0" tIns="0" rIns="0" bIns="0" rtlCol="0" anchor="t"/>
           <a:lstStyle/>
           <a:p>
-            <a:pPr algn="ctr" indent="0" marL="0">
+            <a:pPr marL="0" indent="0" algn="ctr">
               <a:buNone/>
             </a:pPr>
             <a:r>
@@ -24011,7 +23946,7 @@
             <a:endParaRPr lang="en-US" sz="1100" dirty="0"/>
           </a:p>
           <a:p>
-            <a:pPr algn="ctr" indent="0" marL="0">
+            <a:pPr marL="0" indent="0" algn="ctr">
               <a:buNone/>
             </a:pPr>
             <a:r>
@@ -24053,7 +23988,7 @@
             <a:prstDash val="solid"/>
           </a:ln>
           <a:effectLst>
-            <a:outerShdw sx="100000" sy="100000" kx="0" ky="0" algn="bl" rotWithShape="0" blurRad="101600" dist="25400" dir="8100000">
+            <a:outerShdw blurRad="101600" dist="25400" dir="8100000" algn="bl" rotWithShape="0">
               <a:srgbClr val="000000">
                 <a:alpha val="12000"/>
               </a:srgbClr>
@@ -24082,7 +24017,7 @@
           <a:bodyPr wrap="square" lIns="0" tIns="0" rIns="0" bIns="0" rtlCol="0" anchor="ctr"/>
           <a:lstStyle/>
           <a:p>
-            <a:pPr algn="ctr" indent="0" marL="0">
+            <a:pPr marL="0" indent="0" algn="ctr">
               <a:buNone/>
             </a:pPr>
             <a:r>
@@ -24121,7 +24056,7 @@
           <a:bodyPr wrap="square" lIns="0" tIns="0" rIns="0" bIns="0" rtlCol="0" anchor="t"/>
           <a:lstStyle/>
           <a:p>
-            <a:pPr algn="ctr" indent="0" marL="0">
+            <a:pPr marL="0" indent="0" algn="ctr">
               <a:buNone/>
             </a:pPr>
             <a:r>
@@ -24138,7 +24073,7 @@
             <a:endParaRPr lang="en-US" sz="1100" dirty="0"/>
           </a:p>
           <a:p>
-            <a:pPr algn="ctr" indent="0" marL="0">
+            <a:pPr marL="0" indent="0" algn="ctr">
               <a:buNone/>
             </a:pPr>
             <a:r>
@@ -24180,7 +24115,7 @@
             <a:prstDash val="solid"/>
           </a:ln>
           <a:effectLst>
-            <a:outerShdw sx="100000" sy="100000" kx="0" ky="0" algn="bl" rotWithShape="0" blurRad="101600" dist="25400" dir="8100000">
+            <a:outerShdw blurRad="101600" dist="25400" dir="8100000" algn="bl" rotWithShape="0">
               <a:srgbClr val="000000">
                 <a:alpha val="12000"/>
               </a:srgbClr>
@@ -24209,7 +24144,7 @@
           <a:bodyPr wrap="square" lIns="0" tIns="0" rIns="0" bIns="0" rtlCol="0" anchor="ctr"/>
           <a:lstStyle/>
           <a:p>
-            <a:pPr algn="ctr" indent="0" marL="0">
+            <a:pPr marL="0" indent="0" algn="ctr">
               <a:buNone/>
             </a:pPr>
             <a:r>
@@ -24248,7 +24183,7 @@
           <a:bodyPr wrap="square" lIns="0" tIns="0" rIns="0" bIns="0" rtlCol="0" anchor="t"/>
           <a:lstStyle/>
           <a:p>
-            <a:pPr algn="ctr" indent="0" marL="0">
+            <a:pPr marL="0" indent="0" algn="ctr">
               <a:buNone/>
             </a:pPr>
             <a:r>
@@ -24265,7 +24200,7 @@
             <a:endParaRPr lang="en-US" sz="1100" dirty="0"/>
           </a:p>
           <a:p>
-            <a:pPr algn="ctr" indent="0" marL="0">
+            <a:pPr marL="0" indent="0" algn="ctr">
               <a:buNone/>
             </a:pPr>
             <a:r>
@@ -24307,7 +24242,7 @@
             <a:prstDash val="solid"/>
           </a:ln>
           <a:effectLst>
-            <a:outerShdw sx="100000" sy="100000" kx="0" ky="0" algn="bl" rotWithShape="0" blurRad="101600" dist="25400" dir="8100000">
+            <a:outerShdw blurRad="101600" dist="25400" dir="8100000" algn="bl" rotWithShape="0">
               <a:srgbClr val="000000">
                 <a:alpha val="12000"/>
               </a:srgbClr>
@@ -24336,7 +24271,7 @@
           <a:bodyPr wrap="square" lIns="0" tIns="0" rIns="0" bIns="0" rtlCol="0" anchor="ctr"/>
           <a:lstStyle/>
           <a:p>
-            <a:pPr algn="ctr" indent="0" marL="0">
+            <a:pPr marL="0" indent="0" algn="ctr">
               <a:buNone/>
             </a:pPr>
             <a:r>
@@ -24375,7 +24310,7 @@
           <a:bodyPr wrap="square" lIns="0" tIns="0" rIns="0" bIns="0" rtlCol="0" anchor="t"/>
           <a:lstStyle/>
           <a:p>
-            <a:pPr algn="ctr" indent="0" marL="0">
+            <a:pPr marL="0" indent="0" algn="ctr">
               <a:buNone/>
             </a:pPr>
             <a:r>
@@ -24392,7 +24327,7 @@
             <a:endParaRPr lang="en-US" sz="1100" dirty="0"/>
           </a:p>
           <a:p>
-            <a:pPr algn="ctr" indent="0" marL="0">
+            <a:pPr marL="0" indent="0" algn="ctr">
               <a:buNone/>
             </a:pPr>
             <a:r>
@@ -24711,4 +24646,319 @@
     </a:ext>
   </a:extLst>
 </a:theme>
+</file>
+
+<file path=ppt/theme/theme2.xml><?xml version="1.0" encoding="utf-8"?>
+<a:theme xmlns:a="http://schemas.openxmlformats.org/drawingml/2006/main" name="Office Theme">
+  <a:themeElements>
+    <a:clrScheme name="Office">
+      <a:dk1>
+        <a:sysClr val="windowText" lastClr="000000"/>
+      </a:dk1>
+      <a:lt1>
+        <a:sysClr val="window" lastClr="FFFFFF"/>
+      </a:lt1>
+      <a:dk2>
+        <a:srgbClr val="0E2841"/>
+      </a:dk2>
+      <a:lt2>
+        <a:srgbClr val="E8E8E8"/>
+      </a:lt2>
+      <a:accent1>
+        <a:srgbClr val="156082"/>
+      </a:accent1>
+      <a:accent2>
+        <a:srgbClr val="E97132"/>
+      </a:accent2>
+      <a:accent3>
+        <a:srgbClr val="196B24"/>
+      </a:accent3>
+      <a:accent4>
+        <a:srgbClr val="0F9ED5"/>
+      </a:accent4>
+      <a:accent5>
+        <a:srgbClr val="A02B93"/>
+      </a:accent5>
+      <a:accent6>
+        <a:srgbClr val="4EA72E"/>
+      </a:accent6>
+      <a:hlink>
+        <a:srgbClr val="467886"/>
+      </a:hlink>
+      <a:folHlink>
+        <a:srgbClr val="96607D"/>
+      </a:folHlink>
+    </a:clrScheme>
+    <a:fontScheme name="Office">
+      <a:majorFont>
+        <a:latin typeface="Aptos Display" panose="02110004020202020204"/>
+        <a:ea typeface=""/>
+        <a:cs typeface=""/>
+        <a:font script="Jpan" typeface="游ゴシック Light"/>
+        <a:font script="Hang" typeface="맑은 고딕"/>
+        <a:font script="Hans" typeface="等线 Light"/>
+        <a:font script="Hant" typeface="新細明體"/>
+        <a:font script="Arab" typeface="Times New Roman"/>
+        <a:font script="Hebr" typeface="Times New Roman"/>
+        <a:font script="Thai" typeface="Angsana New"/>
+        <a:font script="Ethi" typeface="Nyala"/>
+        <a:font script="Beng" typeface="Vrinda"/>
+        <a:font script="Gujr" typeface="Shruti"/>
+        <a:font script="Khmr" typeface="MoolBoran"/>
+        <a:font script="Knda" typeface="Tunga"/>
+        <a:font script="Guru" typeface="Raavi"/>
+        <a:font script="Cans" typeface="Euphemia"/>
+        <a:font script="Cher" typeface="Plantagenet Cherokee"/>
+        <a:font script="Yiii" typeface="Microsoft Yi Baiti"/>
+        <a:font script="Tibt" typeface="Microsoft Himalaya"/>
+        <a:font script="Thaa" typeface="MV Boli"/>
+        <a:font script="Deva" typeface="Mangal"/>
+        <a:font script="Telu" typeface="Gautami"/>
+        <a:font script="Taml" typeface="Latha"/>
+        <a:font script="Syrc" typeface="Estrangelo Edessa"/>
+        <a:font script="Orya" typeface="Kalinga"/>
+        <a:font script="Mlym" typeface="Kartika"/>
+        <a:font script="Laoo" typeface="DokChampa"/>
+        <a:font script="Sinh" typeface="Iskoola Pota"/>
+        <a:font script="Mong" typeface="Mongolian Baiti"/>
+        <a:font script="Viet" typeface="Times New Roman"/>
+        <a:font script="Uigh" typeface="Microsoft Uighur"/>
+        <a:font script="Geor" typeface="Sylfaen"/>
+        <a:font script="Armn" typeface="Arial"/>
+        <a:font script="Bugi" typeface="Leelawadee UI"/>
+        <a:font script="Bopo" typeface="Microsoft JhengHei"/>
+        <a:font script="Java" typeface="Javanese Text"/>
+        <a:font script="Lisu" typeface="Segoe UI"/>
+        <a:font script="Mymr" typeface="Myanmar Text"/>
+        <a:font script="Nkoo" typeface="Ebrima"/>
+        <a:font script="Olck" typeface="Nirmala UI"/>
+        <a:font script="Osma" typeface="Ebrima"/>
+        <a:font script="Phag" typeface="Phagspa"/>
+        <a:font script="Syrn" typeface="Estrangelo Edessa"/>
+        <a:font script="Syrj" typeface="Estrangelo Edessa"/>
+        <a:font script="Syre" typeface="Estrangelo Edessa"/>
+        <a:font script="Sora" typeface="Nirmala UI"/>
+        <a:font script="Tale" typeface="Microsoft Tai Le"/>
+        <a:font script="Talu" typeface="Microsoft New Tai Lue"/>
+        <a:font script="Tfng" typeface="Ebrima"/>
+      </a:majorFont>
+      <a:minorFont>
+        <a:latin typeface="Aptos" panose="02110004020202020204"/>
+        <a:ea typeface=""/>
+        <a:cs typeface=""/>
+        <a:font script="Jpan" typeface="游ゴシック"/>
+        <a:font script="Hang" typeface="맑은 고딕"/>
+        <a:font script="Hans" typeface="等线"/>
+        <a:font script="Hant" typeface="新細明體"/>
+        <a:font script="Arab" typeface="Arial"/>
+        <a:font script="Hebr" typeface="Arial"/>
+        <a:font script="Thai" typeface="Cordia New"/>
+        <a:font script="Ethi" typeface="Nyala"/>
+        <a:font script="Beng" typeface="Vrinda"/>
+        <a:font script="Gujr" typeface="Shruti"/>
+        <a:font script="Khmr" typeface="DaunPenh"/>
+        <a:font script="Knda" typeface="Tunga"/>
+        <a:font script="Guru" typeface="Raavi"/>
+        <a:font script="Cans" typeface="Euphemia"/>
+        <a:font script="Cher" typeface="Plantagenet Cherokee"/>
+        <a:font script="Yiii" typeface="Microsoft Yi Baiti"/>
+        <a:font script="Tibt" typeface="Microsoft Himalaya"/>
+        <a:font script="Thaa" typeface="MV Boli"/>
+        <a:font script="Deva" typeface="Mangal"/>
+        <a:font script="Telu" typeface="Gautami"/>
+        <a:font script="Taml" typeface="Latha"/>
+        <a:font script="Syrc" typeface="Estrangelo Edessa"/>
+        <a:font script="Orya" typeface="Kalinga"/>
+        <a:font script="Mlym" typeface="Kartika"/>
+        <a:font script="Laoo" typeface="DokChampa"/>
+        <a:font script="Sinh" typeface="Iskoola Pota"/>
+        <a:font script="Mong" typeface="Mongolian Baiti"/>
+        <a:font script="Viet" typeface="Arial"/>
+        <a:font script="Uigh" typeface="Microsoft Uighur"/>
+        <a:font script="Geor" typeface="Sylfaen"/>
+        <a:font script="Armn" typeface="Arial"/>
+        <a:font script="Bugi" typeface="Leelawadee UI"/>
+        <a:font script="Bopo" typeface="Microsoft JhengHei"/>
+        <a:font script="Java" typeface="Javanese Text"/>
+        <a:font script="Lisu" typeface="Segoe UI"/>
+        <a:font script="Mymr" typeface="Myanmar Text"/>
+        <a:font script="Nkoo" typeface="Ebrima"/>
+        <a:font script="Olck" typeface="Nirmala UI"/>
+        <a:font script="Osma" typeface="Ebrima"/>
+        <a:font script="Phag" typeface="Phagspa"/>
+        <a:font script="Syrn" typeface="Estrangelo Edessa"/>
+        <a:font script="Syrj" typeface="Estrangelo Edessa"/>
+        <a:font script="Syre" typeface="Estrangelo Edessa"/>
+        <a:font script="Sora" typeface="Nirmala UI"/>
+        <a:font script="Tale" typeface="Microsoft Tai Le"/>
+        <a:font script="Talu" typeface="Microsoft New Tai Lue"/>
+        <a:font script="Tfng" typeface="Ebrima"/>
+      </a:minorFont>
+    </a:fontScheme>
+    <a:fmtScheme name="Office">
+      <a:fillStyleLst>
+        <a:solidFill>
+          <a:schemeClr val="phClr"/>
+        </a:solidFill>
+        <a:gradFill rotWithShape="1">
+          <a:gsLst>
+            <a:gs pos="0">
+              <a:schemeClr val="phClr">
+                <a:lumMod val="110000"/>
+                <a:satMod val="105000"/>
+                <a:tint val="67000"/>
+              </a:schemeClr>
+            </a:gs>
+            <a:gs pos="50000">
+              <a:schemeClr val="phClr">
+                <a:lumMod val="105000"/>
+                <a:satMod val="103000"/>
+                <a:tint val="73000"/>
+              </a:schemeClr>
+            </a:gs>
+            <a:gs pos="100000">
+              <a:schemeClr val="phClr">
+                <a:lumMod val="105000"/>
+                <a:satMod val="109000"/>
+                <a:tint val="81000"/>
+              </a:schemeClr>
+            </a:gs>
+          </a:gsLst>
+          <a:lin ang="5400000" scaled="0"/>
+        </a:gradFill>
+        <a:gradFill rotWithShape="1">
+          <a:gsLst>
+            <a:gs pos="0">
+              <a:schemeClr val="phClr">
+                <a:satMod val="103000"/>
+                <a:lumMod val="102000"/>
+                <a:tint val="94000"/>
+              </a:schemeClr>
+            </a:gs>
+            <a:gs pos="50000">
+              <a:schemeClr val="phClr">
+                <a:satMod val="110000"/>
+                <a:lumMod val="100000"/>
+                <a:shade val="100000"/>
+              </a:schemeClr>
+            </a:gs>
+            <a:gs pos="100000">
+              <a:schemeClr val="phClr">
+                <a:lumMod val="99000"/>
+                <a:satMod val="120000"/>
+                <a:shade val="78000"/>
+              </a:schemeClr>
+            </a:gs>
+          </a:gsLst>
+          <a:lin ang="5400000" scaled="0"/>
+        </a:gradFill>
+      </a:fillStyleLst>
+      <a:lnStyleLst>
+        <a:ln w="12700" cap="flat" cmpd="sng" algn="ctr">
+          <a:solidFill>
+            <a:schemeClr val="phClr"/>
+          </a:solidFill>
+          <a:prstDash val="solid"/>
+          <a:miter lim="800000"/>
+        </a:ln>
+        <a:ln w="19050" cap="flat" cmpd="sng" algn="ctr">
+          <a:solidFill>
+            <a:schemeClr val="phClr"/>
+          </a:solidFill>
+          <a:prstDash val="solid"/>
+          <a:miter lim="800000"/>
+        </a:ln>
+        <a:ln w="25400" cap="flat" cmpd="sng" algn="ctr">
+          <a:solidFill>
+            <a:schemeClr val="phClr"/>
+          </a:solidFill>
+          <a:prstDash val="solid"/>
+          <a:miter lim="800000"/>
+        </a:ln>
+      </a:lnStyleLst>
+      <a:effectStyleLst>
+        <a:effectStyle>
+          <a:effectLst/>
+        </a:effectStyle>
+        <a:effectStyle>
+          <a:effectLst/>
+        </a:effectStyle>
+        <a:effectStyle>
+          <a:effectLst>
+            <a:outerShdw blurRad="57150" dist="19050" dir="5400000" algn="ctr" rotWithShape="0">
+              <a:srgbClr val="000000">
+                <a:alpha val="63000"/>
+              </a:srgbClr>
+            </a:outerShdw>
+          </a:effectLst>
+        </a:effectStyle>
+      </a:effectStyleLst>
+      <a:bgFillStyleLst>
+        <a:solidFill>
+          <a:schemeClr val="phClr"/>
+        </a:solidFill>
+        <a:solidFill>
+          <a:schemeClr val="phClr">
+            <a:tint val="95000"/>
+            <a:satMod val="170000"/>
+          </a:schemeClr>
+        </a:solidFill>
+        <a:gradFill rotWithShape="1">
+          <a:gsLst>
+            <a:gs pos="0">
+              <a:schemeClr val="phClr">
+                <a:tint val="93000"/>
+                <a:satMod val="150000"/>
+                <a:shade val="98000"/>
+                <a:lumMod val="102000"/>
+              </a:schemeClr>
+            </a:gs>
+            <a:gs pos="50000">
+              <a:schemeClr val="phClr">
+                <a:tint val="98000"/>
+                <a:satMod val="130000"/>
+                <a:shade val="90000"/>
+                <a:lumMod val="103000"/>
+              </a:schemeClr>
+            </a:gs>
+            <a:gs pos="100000">
+              <a:schemeClr val="phClr">
+                <a:shade val="63000"/>
+                <a:satMod val="120000"/>
+              </a:schemeClr>
+            </a:gs>
+          </a:gsLst>
+          <a:lin ang="5400000" scaled="0"/>
+        </a:gradFill>
+      </a:bgFillStyleLst>
+    </a:fmtScheme>
+  </a:themeElements>
+  <a:objectDefaults>
+    <a:lnDef>
+      <a:spPr/>
+      <a:bodyPr/>
+      <a:lstStyle/>
+      <a:style>
+        <a:lnRef idx="2">
+          <a:schemeClr val="accent1"/>
+        </a:lnRef>
+        <a:fillRef idx="0">
+          <a:schemeClr val="accent1"/>
+        </a:fillRef>
+        <a:effectRef idx="1">
+          <a:schemeClr val="accent1"/>
+        </a:effectRef>
+        <a:fontRef idx="minor">
+          <a:schemeClr val="tx1"/>
+        </a:fontRef>
+      </a:style>
+    </a:lnDef>
+  </a:objectDefaults>
+  <a:extraClrSchemeLst/>
+  <a:extLst>
+    <a:ext uri="{05A4C25C-085E-4340-85A3-A5531E510DB2}">
+      <thm15:themeFamily xmlns:thm15="http://schemas.microsoft.com/office/thememl/2012/main" name="Office Theme" id="{2E142A2C-CD16-42D6-873A-C26D2A0506FA}" vid="{1BDDFF52-6CD6-40A5-AB3C-68EB2F1E4D0A}"/>
+    </a:ext>
+  </a:extLst>
+</a:theme>
 </file>
--- a/Final Deliverables/GRIDSHIELD_Executive_Presentation.pptx
+++ b/Final Deliverables/GRIDSHIELD_Executive_Presentation.pptx
@@ -12218,7 +12218,7 @@
           <p:nvPr>
             <p:extLst>
               <p:ext uri="{D42A27DB-BD31-4B8C-83A1-F6EECF244321}">
-                <p14:modId xmlns:p14="http://schemas.microsoft.com/office/powerpoint/2010/main" val="1579011935"/>
+                <p14:modId xmlns:p14="http://schemas.microsoft.com/office/powerpoint/2010/main" val="2548657881"/>
               </p:ext>
             </p:extLst>
           </p:nvPr>
@@ -12267,13 +12267,13 @@
                     <a:bodyPr/>
                     <a:lstStyle/>
                     <a:p>
-                      <a:pPr marL="0" indent="0">
+                      <a:pPr marL="0" indent="0" algn="ctr">
                         <a:buNone/>
                       </a:pPr>
                       <a:r>
                         <a:rPr lang="en-US" sz="1100" b="1" dirty="0">
                           <a:solidFill>
-                            <a:srgbClr val="FFFFFF"/>
+                            <a:schemeClr val="tx1"/>
                           </a:solidFill>
                           <a:latin typeface="Arial" pitchFamily="34" charset="0"/>
                           <a:ea typeface="Arial" pitchFamily="34" charset="-122"/>
@@ -12282,6 +12282,9 @@
                         <a:t>Condition</a:t>
                       </a:r>
                       <a:endParaRPr lang="en-US" sz="1100" dirty="0">
+                        <a:solidFill>
+                          <a:schemeClr val="tx1"/>
+                        </a:solidFill>
                         <a:latin typeface="Arial" charset="0"/>
                         <a:ea typeface="Arial" charset="0"/>
                         <a:cs typeface="Arial" charset="0"/>
@@ -12335,13 +12338,13 @@
                     <a:bodyPr/>
                     <a:lstStyle/>
                     <a:p>
-                      <a:pPr marL="0" indent="0">
+                      <a:pPr marL="0" indent="0" algn="ctr">
                         <a:buNone/>
                       </a:pPr>
                       <a:r>
                         <a:rPr lang="en-US" sz="1100" b="1" dirty="0">
                           <a:solidFill>
-                            <a:srgbClr val="FFFFFF"/>
+                            <a:schemeClr val="tx1"/>
                           </a:solidFill>
                           <a:latin typeface="Arial" pitchFamily="34" charset="0"/>
                           <a:ea typeface="Arial" pitchFamily="34" charset="-122"/>
@@ -12350,6 +12353,9 @@
                         <a:t>Stage 1</a:t>
                       </a:r>
                       <a:endParaRPr lang="en-US" sz="1100" dirty="0">
+                        <a:solidFill>
+                          <a:schemeClr val="tx1"/>
+                        </a:solidFill>
                         <a:latin typeface="Arial" charset="0"/>
                         <a:ea typeface="Arial" charset="0"/>
                         <a:cs typeface="Arial" charset="0"/>
@@ -12403,13 +12409,13 @@
                     <a:bodyPr/>
                     <a:lstStyle/>
                     <a:p>
-                      <a:pPr marL="0" indent="0">
+                      <a:pPr marL="0" indent="0" algn="ctr">
                         <a:buNone/>
                       </a:pPr>
                       <a:r>
                         <a:rPr lang="en-US" sz="1100" b="1" dirty="0">
                           <a:solidFill>
-                            <a:srgbClr val="FFFFFF"/>
+                            <a:schemeClr val="tx1"/>
                           </a:solidFill>
                           <a:latin typeface="Arial" pitchFamily="34" charset="0"/>
                           <a:ea typeface="Arial" pitchFamily="34" charset="-122"/>
@@ -12418,6 +12424,9 @@
                         <a:t>Stage 2–3 (Peak)</a:t>
                       </a:r>
                       <a:endParaRPr lang="en-US" sz="1100" dirty="0">
+                        <a:solidFill>
+                          <a:schemeClr val="tx1"/>
+                        </a:solidFill>
                         <a:latin typeface="Arial" charset="0"/>
                         <a:ea typeface="Arial" charset="0"/>
                         <a:cs typeface="Arial" charset="0"/>
@@ -12471,13 +12480,13 @@
                     <a:bodyPr/>
                     <a:lstStyle/>
                     <a:p>
-                      <a:pPr marL="0" indent="0">
+                      <a:pPr marL="0" indent="0" algn="ctr">
                         <a:buNone/>
                       </a:pPr>
                       <a:r>
                         <a:rPr lang="en-US" sz="1100" b="1" dirty="0">
                           <a:solidFill>
-                            <a:srgbClr val="FFFFFF"/>
+                            <a:schemeClr val="tx1"/>
                           </a:solidFill>
                           <a:latin typeface="Arial" pitchFamily="34" charset="0"/>
                           <a:ea typeface="Arial" pitchFamily="34" charset="-122"/>
@@ -12486,6 +12495,9 @@
                         <a:t>Optimal Quantile</a:t>
                       </a:r>
                       <a:endParaRPr lang="en-US" sz="1100" dirty="0">
+                        <a:solidFill>
+                          <a:schemeClr val="tx1"/>
+                        </a:solidFill>
                         <a:latin typeface="Arial" charset="0"/>
                         <a:ea typeface="Arial" charset="0"/>
                         <a:cs typeface="Arial" charset="0"/>
@@ -12546,13 +12558,13 @@
                     <a:bodyPr/>
                     <a:lstStyle/>
                     <a:p>
-                      <a:pPr marL="0" indent="0">
+                      <a:pPr marL="0" indent="0" algn="ctr">
                         <a:buNone/>
                       </a:pPr>
                       <a:r>
                         <a:rPr lang="en-US" sz="1100" dirty="0">
                           <a:solidFill>
-                            <a:srgbClr val="1A1A2E"/>
+                            <a:schemeClr val="tx1"/>
                           </a:solidFill>
                           <a:latin typeface="Arial" pitchFamily="34" charset="0"/>
                           <a:ea typeface="Arial" pitchFamily="34" charset="-122"/>
@@ -12561,6 +12573,9 @@
                         <a:t>Under-forecast (Actual &gt; Forecast)</a:t>
                       </a:r>
                       <a:endParaRPr lang="en-US" sz="1100" dirty="0">
+                        <a:solidFill>
+                          <a:schemeClr val="tx1"/>
+                        </a:solidFill>
                         <a:latin typeface="Arial" charset="0"/>
                         <a:ea typeface="Arial" charset="0"/>
                         <a:cs typeface="Arial" charset="0"/>
@@ -12614,13 +12629,13 @@
                     <a:bodyPr/>
                     <a:lstStyle/>
                     <a:p>
-                      <a:pPr marL="0" indent="0">
+                      <a:pPr marL="0" indent="0" algn="ctr">
                         <a:buNone/>
                       </a:pPr>
                       <a:r>
                         <a:rPr lang="en-US" sz="1100" dirty="0">
                           <a:solidFill>
-                            <a:srgbClr val="1A1A2E"/>
+                            <a:schemeClr val="tx1"/>
                           </a:solidFill>
                           <a:latin typeface="Arial" pitchFamily="34" charset="0"/>
                           <a:ea typeface="Arial" pitchFamily="34" charset="-122"/>
@@ -12629,6 +12644,9 @@
                         <a:t>Rs. 4/kWh</a:t>
                       </a:r>
                       <a:endParaRPr lang="en-US" sz="1100" dirty="0">
+                        <a:solidFill>
+                          <a:schemeClr val="tx1"/>
+                        </a:solidFill>
                         <a:latin typeface="Arial" charset="0"/>
                         <a:ea typeface="Arial" charset="0"/>
                         <a:cs typeface="Arial" charset="0"/>
@@ -12682,13 +12700,13 @@
                     <a:bodyPr/>
                     <a:lstStyle/>
                     <a:p>
-                      <a:pPr marL="0" indent="0">
+                      <a:pPr marL="0" indent="0" algn="ctr">
                         <a:buNone/>
                       </a:pPr>
                       <a:r>
                         <a:rPr lang="en-US" sz="1100" dirty="0">
                           <a:solidFill>
-                            <a:srgbClr val="1A1A2E"/>
+                            <a:schemeClr val="tx1"/>
                           </a:solidFill>
                           <a:latin typeface="Arial" pitchFamily="34" charset="0"/>
                           <a:ea typeface="Arial" pitchFamily="34" charset="-122"/>
@@ -12697,6 +12715,9 @@
                         <a:t>Rs. 6/kWh ▲</a:t>
                       </a:r>
                       <a:endParaRPr lang="en-US" sz="1100" dirty="0">
+                        <a:solidFill>
+                          <a:schemeClr val="tx1"/>
+                        </a:solidFill>
                         <a:latin typeface="Arial" charset="0"/>
                         <a:ea typeface="Arial" charset="0"/>
                         <a:cs typeface="Arial" charset="0"/>
@@ -12750,13 +12771,13 @@
                     <a:bodyPr/>
                     <a:lstStyle/>
                     <a:p>
-                      <a:pPr marL="0" indent="0">
+                      <a:pPr marL="0" indent="0" algn="ctr">
                         <a:buNone/>
                       </a:pPr>
                       <a:r>
                         <a:rPr lang="en-US" sz="1100" dirty="0">
                           <a:solidFill>
-                            <a:srgbClr val="1A1A2E"/>
+                            <a:schemeClr val="tx1"/>
                           </a:solidFill>
                           <a:latin typeface="Arial" pitchFamily="34" charset="0"/>
                           <a:ea typeface="Arial" pitchFamily="34" charset="-122"/>
@@ -12765,6 +12786,9 @@
                         <a:t>q* = c_u / (c_u + c_o)</a:t>
                       </a:r>
                       <a:endParaRPr lang="en-US" sz="1100" dirty="0">
+                        <a:solidFill>
+                          <a:schemeClr val="tx1"/>
+                        </a:solidFill>
                         <a:latin typeface="Arial" charset="0"/>
                         <a:ea typeface="Arial" charset="0"/>
                         <a:cs typeface="Arial" charset="0"/>
@@ -12825,13 +12849,13 @@
                     <a:bodyPr/>
                     <a:lstStyle/>
                     <a:p>
-                      <a:pPr marL="0" indent="0">
+                      <a:pPr marL="0" indent="0" algn="ctr">
                         <a:buNone/>
                       </a:pPr>
                       <a:r>
                         <a:rPr lang="en-US" sz="1100" dirty="0">
                           <a:solidFill>
-                            <a:srgbClr val="1A1A2E"/>
+                            <a:schemeClr val="tx1"/>
                           </a:solidFill>
                           <a:latin typeface="Arial" pitchFamily="34" charset="0"/>
                           <a:ea typeface="Arial" pitchFamily="34" charset="-122"/>
@@ -12840,6 +12864,9 @@
                         <a:t>Over-forecast (Forecast &gt; Actual)</a:t>
                       </a:r>
                       <a:endParaRPr lang="en-US" sz="1100" dirty="0">
+                        <a:solidFill>
+                          <a:schemeClr val="tx1"/>
+                        </a:solidFill>
                         <a:latin typeface="Arial" charset="0"/>
                         <a:ea typeface="Arial" charset="0"/>
                         <a:cs typeface="Arial" charset="0"/>
@@ -12893,13 +12920,13 @@
                     <a:bodyPr/>
                     <a:lstStyle/>
                     <a:p>
-                      <a:pPr marL="0" indent="0">
+                      <a:pPr marL="0" indent="0" algn="ctr">
                         <a:buNone/>
                       </a:pPr>
                       <a:r>
                         <a:rPr lang="en-US" sz="1100" dirty="0">
                           <a:solidFill>
-                            <a:srgbClr val="1A1A2E"/>
+                            <a:schemeClr val="tx1"/>
                           </a:solidFill>
                           <a:latin typeface="Arial" pitchFamily="34" charset="0"/>
                           <a:ea typeface="Arial" pitchFamily="34" charset="-122"/>
@@ -12908,6 +12935,9 @@
                         <a:t>Rs. 2/kWh</a:t>
                       </a:r>
                       <a:endParaRPr lang="en-US" sz="1100" dirty="0">
+                        <a:solidFill>
+                          <a:schemeClr val="tx1"/>
+                        </a:solidFill>
                         <a:latin typeface="Arial" charset="0"/>
                         <a:ea typeface="Arial" charset="0"/>
                         <a:cs typeface="Arial" charset="0"/>
@@ -12961,13 +12991,13 @@
                     <a:bodyPr/>
                     <a:lstStyle/>
                     <a:p>
-                      <a:pPr marL="0" indent="0">
+                      <a:pPr marL="0" indent="0" algn="ctr">
                         <a:buNone/>
                       </a:pPr>
                       <a:r>
                         <a:rPr lang="en-US" sz="1100" dirty="0">
                           <a:solidFill>
-                            <a:srgbClr val="1A1A2E"/>
+                            <a:schemeClr val="tx1"/>
                           </a:solidFill>
                           <a:latin typeface="Arial" pitchFamily="34" charset="0"/>
                           <a:ea typeface="Arial" pitchFamily="34" charset="-122"/>
@@ -12976,6 +13006,9 @@
                         <a:t>Rs. 2/kWh (unchanged)</a:t>
                       </a:r>
                       <a:endParaRPr lang="en-US" sz="1100" dirty="0">
+                        <a:solidFill>
+                          <a:schemeClr val="tx1"/>
+                        </a:solidFill>
                         <a:latin typeface="Arial" charset="0"/>
                         <a:ea typeface="Arial" charset="0"/>
                         <a:cs typeface="Arial" charset="0"/>
@@ -13029,13 +13062,13 @@
                     <a:bodyPr/>
                     <a:lstStyle/>
                     <a:p>
-                      <a:pPr marL="0" indent="0">
+                      <a:pPr marL="0" indent="0" algn="ctr">
                         <a:buNone/>
                       </a:pPr>
                       <a:r>
                         <a:rPr lang="en-US" sz="1100" dirty="0">
                           <a:solidFill>
-                            <a:srgbClr val="1A1A2E"/>
+                            <a:schemeClr val="tx1"/>
                           </a:solidFill>
                           <a:latin typeface="Arial" pitchFamily="34" charset="0"/>
                           <a:ea typeface="Arial" pitchFamily="34" charset="-122"/>
@@ -13044,6 +13077,9 @@
                         <a:t>Always = 0.5 if symmetric</a:t>
                       </a:r>
                       <a:endParaRPr lang="en-US" sz="1100" dirty="0">
+                        <a:solidFill>
+                          <a:schemeClr val="tx1"/>
+                        </a:solidFill>
                         <a:latin typeface="Arial" charset="0"/>
                         <a:ea typeface="Arial" charset="0"/>
                         <a:cs typeface="Arial" charset="0"/>
@@ -13104,13 +13140,13 @@
                     <a:bodyPr/>
                     <a:lstStyle/>
                     <a:p>
-                      <a:pPr marL="0" indent="0">
+                      <a:pPr marL="0" indent="0" algn="ctr">
                         <a:buNone/>
                       </a:pPr>
                       <a:r>
                         <a:rPr lang="en-US" sz="1100" dirty="0">
                           <a:solidFill>
-                            <a:srgbClr val="1A1A2E"/>
+                            <a:schemeClr val="tx1"/>
                           </a:solidFill>
                           <a:latin typeface="Arial" pitchFamily="34" charset="0"/>
                           <a:ea typeface="Arial" pitchFamily="34" charset="-122"/>
@@ -13119,6 +13155,9 @@
                         <a:t>Peak Hours (6–10 PM)</a:t>
                       </a:r>
                       <a:endParaRPr lang="en-US" sz="1100" dirty="0">
+                        <a:solidFill>
+                          <a:schemeClr val="tx1"/>
+                        </a:solidFill>
                         <a:latin typeface="Arial" charset="0"/>
                         <a:ea typeface="Arial" charset="0"/>
                         <a:cs typeface="Arial" charset="0"/>
@@ -13172,13 +13211,13 @@
                     <a:bodyPr/>
                     <a:lstStyle/>
                     <a:p>
-                      <a:pPr marL="0" indent="0">
+                      <a:pPr marL="0" indent="0" algn="ctr">
                         <a:buNone/>
                       </a:pPr>
                       <a:r>
                         <a:rPr lang="en-US" sz="1100" dirty="0">
                           <a:solidFill>
-                            <a:srgbClr val="1A1A2E"/>
+                            <a:schemeClr val="tx1"/>
                           </a:solidFill>
                           <a:latin typeface="Arial" pitchFamily="34" charset="0"/>
                           <a:ea typeface="Arial" pitchFamily="34" charset="-122"/>
@@ -13187,6 +13226,9 @@
                         <a:t>Same as above</a:t>
                       </a:r>
                       <a:endParaRPr lang="en-US" sz="1100" dirty="0">
+                        <a:solidFill>
+                          <a:schemeClr val="tx1"/>
+                        </a:solidFill>
                         <a:latin typeface="Arial" charset="0"/>
                         <a:ea typeface="Arial" charset="0"/>
                         <a:cs typeface="Arial" charset="0"/>
@@ -13240,13 +13282,13 @@
                     <a:bodyPr/>
                     <a:lstStyle/>
                     <a:p>
-                      <a:pPr marL="0" indent="0">
+                      <a:pPr marL="0" indent="0" algn="ctr">
                         <a:buNone/>
                       </a:pPr>
                       <a:r>
                         <a:rPr lang="en-US" sz="1100" dirty="0">
                           <a:solidFill>
-                            <a:srgbClr val="1A1A2E"/>
+                            <a:schemeClr val="tx1"/>
                           </a:solidFill>
                           <a:latin typeface="Arial" pitchFamily="34" charset="0"/>
                           <a:ea typeface="Arial" pitchFamily="34" charset="-122"/>
@@ -13255,6 +13297,9 @@
                         <a:t>Higher risk: Rs. 6 under</a:t>
                       </a:r>
                       <a:endParaRPr lang="en-US" sz="1100" dirty="0">
+                        <a:solidFill>
+                          <a:schemeClr val="tx1"/>
+                        </a:solidFill>
                         <a:latin typeface="Arial" charset="0"/>
                         <a:ea typeface="Arial" charset="0"/>
                         <a:cs typeface="Arial" charset="0"/>
@@ -13308,13 +13353,13 @@
                     <a:bodyPr/>
                     <a:lstStyle/>
                     <a:p>
-                      <a:pPr marL="0" indent="0">
+                      <a:pPr marL="0" indent="0" algn="ctr">
                         <a:buNone/>
                       </a:pPr>
                       <a:r>
                         <a:rPr lang="en-US" sz="1100" dirty="0">
                           <a:solidFill>
-                            <a:srgbClr val="1A1A2E"/>
+                            <a:schemeClr val="tx1"/>
                           </a:solidFill>
                           <a:latin typeface="Arial" pitchFamily="34" charset="0"/>
                           <a:ea typeface="Arial" pitchFamily="34" charset="-122"/>
@@ -13323,6 +13368,9 @@
                         <a:t>Stage 1: 0.667 | Stage 2: 0.750</a:t>
                       </a:r>
                       <a:endParaRPr lang="en-US" sz="1100" dirty="0">
+                        <a:solidFill>
+                          <a:schemeClr val="tx1"/>
+                        </a:solidFill>
                         <a:latin typeface="Arial" charset="0"/>
                         <a:ea typeface="Arial" charset="0"/>
                         <a:cs typeface="Arial" charset="0"/>
